--- a/课件/C2/C2-A-04/C2-A-04.pptx
+++ b/课件/C2/C2-A-04/C2-A-04.pptx
@@ -1,30 +1,30 @@
 
 <file path=ppt/presentation.xml><?xml version="1.0" encoding="utf-8"?>
-<p:presentation xmlns:a="http://schemas.openxmlformats.org/drawingml/2006/main" xmlns:r="http://schemas.openxmlformats.org/officeDocument/2006/relationships" xmlns:p="http://schemas.openxmlformats.org/presentationml/2006/main" saveSubsetFonts="1" autoCompressPictures="0">
+<p:presentation xmlns:a="http://schemas.openxmlformats.org/drawingml/2006/main" xmlns:r="http://schemas.openxmlformats.org/officeDocument/2006/relationships" xmlns:p="http://schemas.openxmlformats.org/presentationml/2006/main" autoCompressPictures="0">
   <p:sldMasterIdLst>
     <p:sldMasterId id="2147483648" r:id="rId1"/>
   </p:sldMasterIdLst>
+  <p:notesMasterIdLst>
+    <p:notesMasterId r:id="rId4"/>
+  </p:notesMasterIdLst>
   <p:sldIdLst>
-    <p:sldId id="256" r:id="rId2"/>
-    <p:sldId id="257" r:id="rId3"/>
-    <p:sldId id="258" r:id="rId4"/>
-    <p:sldId id="259" r:id="rId5"/>
-    <p:sldId id="260" r:id="rId6"/>
-    <p:sldId id="261" r:id="rId7"/>
-    <p:sldId id="262" r:id="rId8"/>
-    <p:sldId id="263" r:id="rId9"/>
-    <p:sldId id="264" r:id="rId10"/>
-    <p:sldId id="265" r:id="rId11"/>
-    <p:sldId id="266" r:id="rId12"/>
-    <p:sldId id="267" r:id="rId13"/>
-    <p:sldId id="268" r:id="rId14"/>
-    <p:sldId id="269" r:id="rId15"/>
+    <p:sldId id="256" r:id="rId3"/>
+    <p:sldId id="257" r:id="rId5"/>
+    <p:sldId id="258" r:id="rId6"/>
+    <p:sldId id="259" r:id="rId7"/>
+    <p:sldId id="260" r:id="rId8"/>
+    <p:sldId id="261" r:id="rId9"/>
+    <p:sldId id="262" r:id="rId10"/>
+    <p:sldId id="263" r:id="rId11"/>
+    <p:sldId id="264" r:id="rId12"/>
+    <p:sldId id="265" r:id="rId13"/>
+    <p:sldId id="266" r:id="rId14"/>
+    <p:sldId id="267" r:id="rId15"/>
+    <p:sldId id="268" r:id="rId16"/>
+    <p:sldId id="269" r:id="rId17"/>
   </p:sldIdLst>
-  <p:notesMasterIdLst>
-    <p:notesMasterId r:id="rId16"/>
-  </p:notesMasterIdLst>
-  <p:sldSz cx="12191695" cy="6858000"/>
-  <p:notesSz cx="6858000" cy="12191695"/>
+  <p:sldSz cx="12191365" cy="6858000"/>
+  <p:notesSz cx="6858000" cy="12191365"/>
   <p:defaultTextStyle>
     <a:lvl1pPr marL="0" algn="l" defTabSz="914400" rtl="0" eaLnBrk="1" latinLnBrk="0" hangingPunct="1">
       <a:defRPr sz="1800" kern="1200">
@@ -202,7 +202,6 @@
           <a:p>
             <a:fld id="{5282F153-3F37-0F45-9E97-73ACFA13230C}" type="datetimeFigureOut">
               <a:rPr lang="en-US"/>
-              <a:t>7/23/19</a:t>
             </a:fld>
             <a:endParaRPr lang="en-US"/>
           </a:p>
@@ -269,6 +268,7 @@
               <a:rPr lang="en-US"/>
               <a:t>Click to edit Master text styles</a:t>
             </a:r>
+            <a:endParaRPr lang="en-US"/>
           </a:p>
           <a:p>
             <a:pPr lvl="1"/>
@@ -276,6 +276,7 @@
               <a:rPr lang="en-US"/>
               <a:t>Second level</a:t>
             </a:r>
+            <a:endParaRPr lang="en-US"/>
           </a:p>
           <a:p>
             <a:pPr lvl="2"/>
@@ -283,6 +284,7 @@
               <a:rPr lang="en-US"/>
               <a:t>Third level</a:t>
             </a:r>
+            <a:endParaRPr lang="en-US"/>
           </a:p>
           <a:p>
             <a:pPr lvl="3"/>
@@ -290,6 +292,7 @@
               <a:rPr lang="en-US"/>
               <a:t>Fourth level</a:t>
             </a:r>
+            <a:endParaRPr lang="en-US"/>
           </a:p>
           <a:p>
             <a:pPr lvl="4"/>
@@ -297,6 +300,7 @@
               <a:rPr lang="en-US"/>
               <a:t>Fifth level</a:t>
             </a:r>
+            <a:endParaRPr lang="en-US"/>
           </a:p>
         </p:txBody>
       </p:sp>
@@ -360,18 +364,12 @@
           <a:p>
             <a:fld id="{CE5E9CC1-C706-0F49-92D6-E571CC5EEA8F}" type="slidenum">
               <a:rPr lang="en-US"/>
-              <a:t>‹#›</a:t>
             </a:fld>
             <a:endParaRPr lang="en-US"/>
           </a:p>
         </p:txBody>
       </p:sp>
     </p:spTree>
-    <p:extLst>
-      <p:ext uri="{BB962C8B-B14F-4D97-AF65-F5344CB8AC3E}">
-        <p14:creationId xmlns:p14="http://schemas.microsoft.com/office/powerpoint/2010/main" val="1024086991"/>
-      </p:ext>
-    </p:extLst>
   </p:cSld>
   <p:clrMap bg1="lt1" tx1="dk1" bg2="lt2" tx2="dk2" accent1="accent1" accent2="accent2" accent3="accent3" accent4="accent4" accent5="accent5" accent6="accent6" hlink="hlink" folHlink="folHlink"/>
   <p:notesStyle>
@@ -513,10 +511,6 @@
           <a:bodyPr/>
           <a:lstStyle/>
           <a:p>
-            <a:r>
-              <a:rPr lang="en-US" dirty="0"/>
-              <a:t/>
-            </a:r>
             <a:endParaRPr lang="en-US" dirty="0"/>
           </a:p>
         </p:txBody>
@@ -538,18 +532,12 @@
           <a:p>
             <a:fld id="{F7021451-1387-4CA6-816F-3879F97B5CBC}" type="slidenum">
               <a:rPr lang="en-US"/>
-              <a:t>1</a:t>
             </a:fld>
             <a:endParaRPr lang="en-US"/>
           </a:p>
         </p:txBody>
       </p:sp>
     </p:spTree>
-    <p:extLst>
-      <p:ext uri="{BB962C8B-B14F-4D97-AF65-F5344CB8AC3E}">
-        <p14:creationId xmlns:p14="http://schemas.microsoft.com/office/powerpoint/2010/main" val="1024086991"/>
-      </p:ext>
-    </p:extLst>
   </p:cSld>
   <p:clrMapOvr>
     <a:masterClrMapping/>
@@ -601,10 +589,6 @@
           <a:bodyPr/>
           <a:lstStyle/>
           <a:p>
-            <a:r>
-              <a:rPr lang="en-US" dirty="0"/>
-              <a:t/>
-            </a:r>
             <a:endParaRPr lang="en-US" dirty="0"/>
           </a:p>
         </p:txBody>
@@ -626,18 +610,12 @@
           <a:p>
             <a:fld id="{F7021451-1387-4CA6-816F-3879F97B5CBC}" type="slidenum">
               <a:rPr lang="en-US"/>
-              <a:t>10</a:t>
             </a:fld>
             <a:endParaRPr lang="en-US"/>
           </a:p>
         </p:txBody>
       </p:sp>
     </p:spTree>
-    <p:extLst>
-      <p:ext uri="{BB962C8B-B14F-4D97-AF65-F5344CB8AC3E}">
-        <p14:creationId xmlns:p14="http://schemas.microsoft.com/office/powerpoint/2010/main" val="1024086991"/>
-      </p:ext>
-    </p:extLst>
   </p:cSld>
   <p:clrMapOvr>
     <a:masterClrMapping/>
@@ -689,10 +667,6 @@
           <a:bodyPr/>
           <a:lstStyle/>
           <a:p>
-            <a:r>
-              <a:rPr lang="en-US" dirty="0"/>
-              <a:t/>
-            </a:r>
             <a:endParaRPr lang="en-US" dirty="0"/>
           </a:p>
         </p:txBody>
@@ -714,18 +688,12 @@
           <a:p>
             <a:fld id="{F7021451-1387-4CA6-816F-3879F97B5CBC}" type="slidenum">
               <a:rPr lang="en-US"/>
-              <a:t>11</a:t>
             </a:fld>
             <a:endParaRPr lang="en-US"/>
           </a:p>
         </p:txBody>
       </p:sp>
     </p:spTree>
-    <p:extLst>
-      <p:ext uri="{BB962C8B-B14F-4D97-AF65-F5344CB8AC3E}">
-        <p14:creationId xmlns:p14="http://schemas.microsoft.com/office/powerpoint/2010/main" val="1024086991"/>
-      </p:ext>
-    </p:extLst>
   </p:cSld>
   <p:clrMapOvr>
     <a:masterClrMapping/>
@@ -777,10 +745,6 @@
           <a:bodyPr/>
           <a:lstStyle/>
           <a:p>
-            <a:r>
-              <a:rPr lang="en-US" dirty="0"/>
-              <a:t/>
-            </a:r>
             <a:endParaRPr lang="en-US" dirty="0"/>
           </a:p>
         </p:txBody>
@@ -802,18 +766,12 @@
           <a:p>
             <a:fld id="{F7021451-1387-4CA6-816F-3879F97B5CBC}" type="slidenum">
               <a:rPr lang="en-US"/>
-              <a:t>12</a:t>
             </a:fld>
             <a:endParaRPr lang="en-US"/>
           </a:p>
         </p:txBody>
       </p:sp>
     </p:spTree>
-    <p:extLst>
-      <p:ext uri="{BB962C8B-B14F-4D97-AF65-F5344CB8AC3E}">
-        <p14:creationId xmlns:p14="http://schemas.microsoft.com/office/powerpoint/2010/main" val="1024086991"/>
-      </p:ext>
-    </p:extLst>
   </p:cSld>
   <p:clrMapOvr>
     <a:masterClrMapping/>
@@ -865,10 +823,6 @@
           <a:bodyPr/>
           <a:lstStyle/>
           <a:p>
-            <a:r>
-              <a:rPr lang="en-US" dirty="0"/>
-              <a:t/>
-            </a:r>
             <a:endParaRPr lang="en-US" dirty="0"/>
           </a:p>
         </p:txBody>
@@ -890,18 +844,12 @@
           <a:p>
             <a:fld id="{F7021451-1387-4CA6-816F-3879F97B5CBC}" type="slidenum">
               <a:rPr lang="en-US"/>
-              <a:t>13</a:t>
             </a:fld>
             <a:endParaRPr lang="en-US"/>
           </a:p>
         </p:txBody>
       </p:sp>
     </p:spTree>
-    <p:extLst>
-      <p:ext uri="{BB962C8B-B14F-4D97-AF65-F5344CB8AC3E}">
-        <p14:creationId xmlns:p14="http://schemas.microsoft.com/office/powerpoint/2010/main" val="1024086991"/>
-      </p:ext>
-    </p:extLst>
   </p:cSld>
   <p:clrMapOvr>
     <a:masterClrMapping/>
@@ -953,10 +901,6 @@
           <a:bodyPr/>
           <a:lstStyle/>
           <a:p>
-            <a:r>
-              <a:rPr lang="en-US" dirty="0"/>
-              <a:t/>
-            </a:r>
             <a:endParaRPr lang="en-US" dirty="0"/>
           </a:p>
         </p:txBody>
@@ -978,18 +922,12 @@
           <a:p>
             <a:fld id="{F7021451-1387-4CA6-816F-3879F97B5CBC}" type="slidenum">
               <a:rPr lang="en-US"/>
-              <a:t>14</a:t>
             </a:fld>
             <a:endParaRPr lang="en-US"/>
           </a:p>
         </p:txBody>
       </p:sp>
     </p:spTree>
-    <p:extLst>
-      <p:ext uri="{BB962C8B-B14F-4D97-AF65-F5344CB8AC3E}">
-        <p14:creationId xmlns:p14="http://schemas.microsoft.com/office/powerpoint/2010/main" val="1024086991"/>
-      </p:ext>
-    </p:extLst>
   </p:cSld>
   <p:clrMapOvr>
     <a:masterClrMapping/>
@@ -1041,10 +979,6 @@
           <a:bodyPr/>
           <a:lstStyle/>
           <a:p>
-            <a:r>
-              <a:rPr lang="en-US" dirty="0"/>
-              <a:t/>
-            </a:r>
             <a:endParaRPr lang="en-US" dirty="0"/>
           </a:p>
         </p:txBody>
@@ -1066,18 +1000,12 @@
           <a:p>
             <a:fld id="{F7021451-1387-4CA6-816F-3879F97B5CBC}" type="slidenum">
               <a:rPr lang="en-US"/>
-              <a:t>2</a:t>
             </a:fld>
             <a:endParaRPr lang="en-US"/>
           </a:p>
         </p:txBody>
       </p:sp>
     </p:spTree>
-    <p:extLst>
-      <p:ext uri="{BB962C8B-B14F-4D97-AF65-F5344CB8AC3E}">
-        <p14:creationId xmlns:p14="http://schemas.microsoft.com/office/powerpoint/2010/main" val="1024086991"/>
-      </p:ext>
-    </p:extLst>
   </p:cSld>
   <p:clrMapOvr>
     <a:masterClrMapping/>
@@ -1129,10 +1057,6 @@
           <a:bodyPr/>
           <a:lstStyle/>
           <a:p>
-            <a:r>
-              <a:rPr lang="en-US" dirty="0"/>
-              <a:t/>
-            </a:r>
             <a:endParaRPr lang="en-US" dirty="0"/>
           </a:p>
         </p:txBody>
@@ -1154,18 +1078,12 @@
           <a:p>
             <a:fld id="{F7021451-1387-4CA6-816F-3879F97B5CBC}" type="slidenum">
               <a:rPr lang="en-US"/>
-              <a:t>3</a:t>
             </a:fld>
             <a:endParaRPr lang="en-US"/>
           </a:p>
         </p:txBody>
       </p:sp>
     </p:spTree>
-    <p:extLst>
-      <p:ext uri="{BB962C8B-B14F-4D97-AF65-F5344CB8AC3E}">
-        <p14:creationId xmlns:p14="http://schemas.microsoft.com/office/powerpoint/2010/main" val="1024086991"/>
-      </p:ext>
-    </p:extLst>
   </p:cSld>
   <p:clrMapOvr>
     <a:masterClrMapping/>
@@ -1217,10 +1135,6 @@
           <a:bodyPr/>
           <a:lstStyle/>
           <a:p>
-            <a:r>
-              <a:rPr lang="en-US" dirty="0"/>
-              <a:t/>
-            </a:r>
             <a:endParaRPr lang="en-US" dirty="0"/>
           </a:p>
         </p:txBody>
@@ -1242,18 +1156,12 @@
           <a:p>
             <a:fld id="{F7021451-1387-4CA6-816F-3879F97B5CBC}" type="slidenum">
               <a:rPr lang="en-US"/>
-              <a:t>4</a:t>
             </a:fld>
             <a:endParaRPr lang="en-US"/>
           </a:p>
         </p:txBody>
       </p:sp>
     </p:spTree>
-    <p:extLst>
-      <p:ext uri="{BB962C8B-B14F-4D97-AF65-F5344CB8AC3E}">
-        <p14:creationId xmlns:p14="http://schemas.microsoft.com/office/powerpoint/2010/main" val="1024086991"/>
-      </p:ext>
-    </p:extLst>
   </p:cSld>
   <p:clrMapOvr>
     <a:masterClrMapping/>
@@ -1305,10 +1213,6 @@
           <a:bodyPr/>
           <a:lstStyle/>
           <a:p>
-            <a:r>
-              <a:rPr lang="en-US" dirty="0"/>
-              <a:t/>
-            </a:r>
             <a:endParaRPr lang="en-US" dirty="0"/>
           </a:p>
         </p:txBody>
@@ -1330,18 +1234,12 @@
           <a:p>
             <a:fld id="{F7021451-1387-4CA6-816F-3879F97B5CBC}" type="slidenum">
               <a:rPr lang="en-US"/>
-              <a:t>5</a:t>
             </a:fld>
             <a:endParaRPr lang="en-US"/>
           </a:p>
         </p:txBody>
       </p:sp>
     </p:spTree>
-    <p:extLst>
-      <p:ext uri="{BB962C8B-B14F-4D97-AF65-F5344CB8AC3E}">
-        <p14:creationId xmlns:p14="http://schemas.microsoft.com/office/powerpoint/2010/main" val="1024086991"/>
-      </p:ext>
-    </p:extLst>
   </p:cSld>
   <p:clrMapOvr>
     <a:masterClrMapping/>
@@ -1393,10 +1291,6 @@
           <a:bodyPr/>
           <a:lstStyle/>
           <a:p>
-            <a:r>
-              <a:rPr lang="en-US" dirty="0"/>
-              <a:t/>
-            </a:r>
             <a:endParaRPr lang="en-US" dirty="0"/>
           </a:p>
         </p:txBody>
@@ -1418,18 +1312,12 @@
           <a:p>
             <a:fld id="{F7021451-1387-4CA6-816F-3879F97B5CBC}" type="slidenum">
               <a:rPr lang="en-US"/>
-              <a:t>6</a:t>
             </a:fld>
             <a:endParaRPr lang="en-US"/>
           </a:p>
         </p:txBody>
       </p:sp>
     </p:spTree>
-    <p:extLst>
-      <p:ext uri="{BB962C8B-B14F-4D97-AF65-F5344CB8AC3E}">
-        <p14:creationId xmlns:p14="http://schemas.microsoft.com/office/powerpoint/2010/main" val="1024086991"/>
-      </p:ext>
-    </p:extLst>
   </p:cSld>
   <p:clrMapOvr>
     <a:masterClrMapping/>
@@ -1481,10 +1369,6 @@
           <a:bodyPr/>
           <a:lstStyle/>
           <a:p>
-            <a:r>
-              <a:rPr lang="en-US" dirty="0"/>
-              <a:t/>
-            </a:r>
             <a:endParaRPr lang="en-US" dirty="0"/>
           </a:p>
         </p:txBody>
@@ -1506,18 +1390,12 @@
           <a:p>
             <a:fld id="{F7021451-1387-4CA6-816F-3879F97B5CBC}" type="slidenum">
               <a:rPr lang="en-US"/>
-              <a:t>7</a:t>
             </a:fld>
             <a:endParaRPr lang="en-US"/>
           </a:p>
         </p:txBody>
       </p:sp>
     </p:spTree>
-    <p:extLst>
-      <p:ext uri="{BB962C8B-B14F-4D97-AF65-F5344CB8AC3E}">
-        <p14:creationId xmlns:p14="http://schemas.microsoft.com/office/powerpoint/2010/main" val="1024086991"/>
-      </p:ext>
-    </p:extLst>
   </p:cSld>
   <p:clrMapOvr>
     <a:masterClrMapping/>
@@ -1569,10 +1447,6 @@
           <a:bodyPr/>
           <a:lstStyle/>
           <a:p>
-            <a:r>
-              <a:rPr lang="en-US" dirty="0"/>
-              <a:t/>
-            </a:r>
             <a:endParaRPr lang="en-US" dirty="0"/>
           </a:p>
         </p:txBody>
@@ -1594,18 +1468,12 @@
           <a:p>
             <a:fld id="{F7021451-1387-4CA6-816F-3879F97B5CBC}" type="slidenum">
               <a:rPr lang="en-US"/>
-              <a:t>8</a:t>
             </a:fld>
             <a:endParaRPr lang="en-US"/>
           </a:p>
         </p:txBody>
       </p:sp>
     </p:spTree>
-    <p:extLst>
-      <p:ext uri="{BB962C8B-B14F-4D97-AF65-F5344CB8AC3E}">
-        <p14:creationId xmlns:p14="http://schemas.microsoft.com/office/powerpoint/2010/main" val="1024086991"/>
-      </p:ext>
-    </p:extLst>
   </p:cSld>
   <p:clrMapOvr>
     <a:masterClrMapping/>
@@ -1657,10 +1525,6 @@
           <a:bodyPr/>
           <a:lstStyle/>
           <a:p>
-            <a:r>
-              <a:rPr lang="en-US" dirty="0"/>
-              <a:t/>
-            </a:r>
             <a:endParaRPr lang="en-US" dirty="0"/>
           </a:p>
         </p:txBody>
@@ -1682,18 +1546,12 @@
           <a:p>
             <a:fld id="{F7021451-1387-4CA6-816F-3879F97B5CBC}" type="slidenum">
               <a:rPr lang="en-US"/>
-              <a:t>9</a:t>
             </a:fld>
             <a:endParaRPr lang="en-US"/>
           </a:p>
         </p:txBody>
       </p:sp>
     </p:spTree>
-    <p:extLst>
-      <p:ext uri="{BB962C8B-B14F-4D97-AF65-F5344CB8AC3E}">
-        <p14:creationId xmlns:p14="http://schemas.microsoft.com/office/powerpoint/2010/main" val="1024086991"/>
-      </p:ext>
-    </p:extLst>
   </p:cSld>
   <p:clrMapOvr>
     <a:masterClrMapping/>
@@ -1734,6 +1592,11 @@
 <file path=ppt/slideMasters/slideMaster1.xml><?xml version="1.0" encoding="utf-8"?>
 <p:sldMaster xmlns:a="http://schemas.openxmlformats.org/drawingml/2006/main" xmlns:r="http://schemas.openxmlformats.org/officeDocument/2006/relationships" xmlns:p="http://schemas.openxmlformats.org/presentationml/2006/main">
   <p:cSld>
+    <p:bg>
+      <p:bgRef idx="1001">
+        <a:schemeClr val="bg1"/>
+      </p:bgRef>
+    </p:bg>
     <p:spTree>
       <p:nvGrpSpPr>
         <p:cNvPr id="1" name=""/>
@@ -1777,7 +1640,7 @@
         <a:spcBef>
           <a:spcPct val="20000"/>
         </a:spcBef>
-        <a:buFont typeface="Arial" pitchFamily="34" charset="0"/>
+        <a:buFont typeface="Arial" panose="020B0604020202020204" pitchFamily="34" charset="0"/>
         <a:buChar char="•"/>
         <a:defRPr sz="3200" kern="1200">
           <a:solidFill>
@@ -1792,7 +1655,7 @@
         <a:spcBef>
           <a:spcPct val="20000"/>
         </a:spcBef>
-        <a:buFont typeface="Arial" pitchFamily="34" charset="0"/>
+        <a:buFont typeface="Arial" panose="020B0604020202020204" pitchFamily="34" charset="0"/>
         <a:buChar char="–"/>
         <a:defRPr sz="2800" kern="1200">
           <a:solidFill>
@@ -1807,7 +1670,7 @@
         <a:spcBef>
           <a:spcPct val="20000"/>
         </a:spcBef>
-        <a:buFont typeface="Arial" pitchFamily="34" charset="0"/>
+        <a:buFont typeface="Arial" panose="020B0604020202020204" pitchFamily="34" charset="0"/>
         <a:buChar char="•"/>
         <a:defRPr sz="2400" kern="1200">
           <a:solidFill>
@@ -1822,7 +1685,7 @@
         <a:spcBef>
           <a:spcPct val="20000"/>
         </a:spcBef>
-        <a:buFont typeface="Arial" pitchFamily="34" charset="0"/>
+        <a:buFont typeface="Arial" panose="020B0604020202020204" pitchFamily="34" charset="0"/>
         <a:buChar char="–"/>
         <a:defRPr sz="2000" kern="1200">
           <a:solidFill>
@@ -1837,7 +1700,7 @@
         <a:spcBef>
           <a:spcPct val="20000"/>
         </a:spcBef>
-        <a:buFont typeface="Arial" pitchFamily="34" charset="0"/>
+        <a:buFont typeface="Arial" panose="020B0604020202020204" pitchFamily="34" charset="0"/>
         <a:buChar char="»"/>
         <a:defRPr sz="2000" kern="1200">
           <a:solidFill>
@@ -1852,7 +1715,7 @@
         <a:spcBef>
           <a:spcPct val="20000"/>
         </a:spcBef>
-        <a:buFont typeface="Arial" pitchFamily="34" charset="0"/>
+        <a:buFont typeface="Arial" panose="020B0604020202020204" pitchFamily="34" charset="0"/>
         <a:buChar char="•"/>
         <a:defRPr sz="2000" kern="1200">
           <a:solidFill>
@@ -1867,7 +1730,7 @@
         <a:spcBef>
           <a:spcPct val="20000"/>
         </a:spcBef>
-        <a:buFont typeface="Arial" pitchFamily="34" charset="0"/>
+        <a:buFont typeface="Arial" panose="020B0604020202020204" pitchFamily="34" charset="0"/>
         <a:buChar char="•"/>
         <a:defRPr sz="2000" kern="1200">
           <a:solidFill>
@@ -1882,7 +1745,7 @@
         <a:spcBef>
           <a:spcPct val="20000"/>
         </a:spcBef>
-        <a:buFont typeface="Arial" pitchFamily="34" charset="0"/>
+        <a:buFont typeface="Arial" panose="020B0604020202020204" pitchFamily="34" charset="0"/>
         <a:buChar char="•"/>
         <a:defRPr sz="2000" kern="1200">
           <a:solidFill>
@@ -1897,7 +1760,7 @@
         <a:spcBef>
           <a:spcPct val="20000"/>
         </a:spcBef>
-        <a:buFont typeface="Arial" pitchFamily="34" charset="0"/>
+        <a:buFont typeface="Arial" panose="020B0604020202020204" pitchFamily="34" charset="0"/>
         <a:buChar char="•"/>
         <a:defRPr sz="2000" kern="1200">
           <a:solidFill>
@@ -2010,7 +1873,7 @@
 
 <file path=ppt/slides/slide1.xml><?xml version="1.0" encoding="utf-8"?>
 <p:sld xmlns:a="http://schemas.openxmlformats.org/drawingml/2006/main" xmlns:r="http://schemas.openxmlformats.org/officeDocument/2006/relationships" xmlns:p="http://schemas.openxmlformats.org/presentationml/2006/main">
-  <p:cSld name="Slide 1">
+  <p:cSld>
     <p:bg>
       <p:bgPr>
         <a:blipFill dpi="0" rotWithShape="1">
@@ -2054,13 +1917,12 @@
             <a:avLst/>
           </a:prstGeom>
           <a:noFill/>
-          <a:ln/>
         </p:spPr>
         <p:txBody>
           <a:bodyPr wrap="square" rtlCol="0" anchor="ctr"/>
           <a:lstStyle/>
           <a:p>
-            <a:pPr algn="r" indent="0" marL="0">
+            <a:pPr marL="0" indent="0" algn="r">
               <a:buNone/>
             </a:pPr>
             <a:r>
@@ -2068,9 +1930,9 @@
                 <a:solidFill>
                   <a:srgbClr val="8A9099"/>
                 </a:solidFill>
-                <a:latin typeface="微软雅黑" pitchFamily="34" charset="0"/>
-                <a:ea typeface="微软雅黑" pitchFamily="34" charset="-122"/>
-                <a:cs typeface="微软雅黑" pitchFamily="34" charset="-120"/>
+                <a:latin typeface="微软雅黑" panose="020B0503020204020204" pitchFamily="34" charset="-122"/>
+                <a:ea typeface="微软雅黑" panose="020B0503020204020204" pitchFamily="34" charset="-122"/>
+                <a:cs typeface="微软雅黑" panose="020B0503020204020204" pitchFamily="34" charset="-120"/>
               </a:rPr>
               <a:t>1 / 14</a:t>
             </a:r>
@@ -2093,13 +1955,12 @@
             <a:avLst/>
           </a:prstGeom>
           <a:noFill/>
-          <a:ln/>
         </p:spPr>
         <p:txBody>
           <a:bodyPr wrap="square" rtlCol="0" anchor="ctr"/>
           <a:lstStyle/>
           <a:p>
-            <a:pPr algn="ctr" indent="0" marL="0">
+            <a:pPr marL="0" indent="0" algn="ctr">
               <a:buNone/>
             </a:pPr>
             <a:r>
@@ -2107,9 +1968,9 @@
                 <a:solidFill>
                   <a:srgbClr val="1F4E9C"/>
                 </a:solidFill>
-                <a:latin typeface="微软雅黑" pitchFamily="34" charset="0"/>
-                <a:ea typeface="微软雅黑" pitchFamily="34" charset="-122"/>
-                <a:cs typeface="微软雅黑" pitchFamily="34" charset="-120"/>
+                <a:latin typeface="微软雅黑" panose="020B0503020204020204" pitchFamily="34" charset="-122"/>
+                <a:ea typeface="微软雅黑" panose="020B0503020204020204" pitchFamily="34" charset="-122"/>
+                <a:cs typeface="微软雅黑" panose="020B0503020204020204" pitchFamily="34" charset="-120"/>
               </a:rPr>
               <a:t>重邮802 数据结构代码课程</a:t>
             </a:r>
@@ -2132,13 +1993,12 @@
             <a:avLst/>
           </a:prstGeom>
           <a:noFill/>
-          <a:ln/>
         </p:spPr>
         <p:txBody>
           <a:bodyPr wrap="square" rtlCol="0" anchor="ctr"/>
           <a:lstStyle/>
           <a:p>
-            <a:pPr algn="ctr" indent="0" marL="0">
+            <a:pPr marL="0" indent="0" algn="ctr">
               <a:buNone/>
             </a:pPr>
             <a:r>
@@ -2146,9 +2006,9 @@
                 <a:solidFill>
                   <a:srgbClr val="1F2329"/>
                 </a:solidFill>
-                <a:latin typeface="微软雅黑" pitchFamily="34" charset="0"/>
-                <a:ea typeface="微软雅黑" pitchFamily="34" charset="-122"/>
-                <a:cs typeface="微软雅黑" pitchFamily="34" charset="-120"/>
+                <a:latin typeface="微软雅黑" panose="020B0503020204020204" pitchFamily="34" charset="-122"/>
+                <a:ea typeface="微软雅黑" panose="020B0503020204020204" pitchFamily="34" charset="-122"/>
+                <a:cs typeface="微软雅黑" panose="020B0503020204020204" pitchFamily="34" charset="-120"/>
               </a:rPr>
               <a:t>数据结构基础阶段</a:t>
             </a:r>
@@ -2171,13 +2031,12 @@
             <a:avLst/>
           </a:prstGeom>
           <a:noFill/>
-          <a:ln/>
         </p:spPr>
         <p:txBody>
           <a:bodyPr wrap="square" rtlCol="0" anchor="ctr"/>
           <a:lstStyle/>
           <a:p>
-            <a:pPr algn="ctr" indent="0" marL="0">
+            <a:pPr marL="0" indent="0" algn="ctr">
               <a:buNone/>
             </a:pPr>
             <a:r>
@@ -2185,9 +2044,9 @@
                 <a:solidFill>
                   <a:srgbClr val="1F2329"/>
                 </a:solidFill>
-                <a:latin typeface="微软雅黑" pitchFamily="34" charset="0"/>
-                <a:ea typeface="微软雅黑" pitchFamily="34" charset="-122"/>
-                <a:cs typeface="微软雅黑" pitchFamily="34" charset="-120"/>
+                <a:latin typeface="微软雅黑" panose="020B0503020204020204" pitchFamily="34" charset="-122"/>
+                <a:ea typeface="微软雅黑" panose="020B0503020204020204" pitchFamily="34" charset="-122"/>
+                <a:cs typeface="微软雅黑" panose="020B0503020204020204" pitchFamily="34" charset="-120"/>
               </a:rPr>
               <a:t>第4节 双链表、循环链表与静态链表</a:t>
             </a:r>
@@ -2210,13 +2069,12 @@
             <a:avLst/>
           </a:prstGeom>
           <a:noFill/>
-          <a:ln/>
         </p:spPr>
         <p:txBody>
           <a:bodyPr wrap="square" rtlCol="0" anchor="ctr"/>
           <a:lstStyle/>
           <a:p>
-            <a:pPr algn="ctr" indent="0" marL="0">
+            <a:pPr marL="0" indent="0" algn="ctr">
               <a:buNone/>
             </a:pPr>
             <a:r>
@@ -2224,9 +2082,9 @@
                 <a:solidFill>
                   <a:srgbClr val="8A9099"/>
                 </a:solidFill>
-                <a:latin typeface="微软雅黑" pitchFamily="34" charset="0"/>
-                <a:ea typeface="微软雅黑" pitchFamily="34" charset="-122"/>
-                <a:cs typeface="微软雅黑" pitchFamily="34" charset="-120"/>
+                <a:latin typeface="微软雅黑" panose="020B0503020204020204" pitchFamily="34" charset="-122"/>
+                <a:ea typeface="微软雅黑" panose="020B0503020204020204" pitchFamily="34" charset="-122"/>
+                <a:cs typeface="微软雅黑" panose="020B0503020204020204" pitchFamily="34" charset="-120"/>
               </a:rPr>
               <a:t>阶段：基础 ｜ 主讲：牙膏学长 ｜ 预计40分钟 ｜ 资料答疑：伴梦研途QQ群</a:t>
             </a:r>
@@ -2244,7 +2102,7 @@
 
 <file path=ppt/slides/slide10.xml><?xml version="1.0" encoding="utf-8"?>
 <p:sld xmlns:a="http://schemas.openxmlformats.org/drawingml/2006/main" xmlns:r="http://schemas.openxmlformats.org/officeDocument/2006/relationships" xmlns:p="http://schemas.openxmlformats.org/presentationml/2006/main">
-  <p:cSld name="Slide 10">
+  <p:cSld>
     <p:bg>
       <p:bgPr>
         <a:blipFill dpi="0" rotWithShape="1">
@@ -2288,13 +2146,12 @@
             <a:avLst/>
           </a:prstGeom>
           <a:noFill/>
-          <a:ln/>
         </p:spPr>
         <p:txBody>
           <a:bodyPr wrap="square" rtlCol="0" anchor="ctr"/>
           <a:lstStyle/>
           <a:p>
-            <a:pPr algn="r" indent="0" marL="0">
+            <a:pPr marL="0" indent="0" algn="r">
               <a:buNone/>
             </a:pPr>
             <a:r>
@@ -2302,9 +2159,9 @@
                 <a:solidFill>
                   <a:srgbClr val="8A9099"/>
                 </a:solidFill>
-                <a:latin typeface="微软雅黑" pitchFamily="34" charset="0"/>
-                <a:ea typeface="微软雅黑" pitchFamily="34" charset="-122"/>
-                <a:cs typeface="微软雅黑" pitchFamily="34" charset="-120"/>
+                <a:latin typeface="微软雅黑" panose="020B0503020204020204" pitchFamily="34" charset="-122"/>
+                <a:ea typeface="微软雅黑" panose="020B0503020204020204" pitchFamily="34" charset="-122"/>
+                <a:cs typeface="微软雅黑" panose="020B0503020204020204" pitchFamily="34" charset="-120"/>
               </a:rPr>
               <a:t>10 / 14</a:t>
             </a:r>
@@ -2327,13 +2184,12 @@
             <a:avLst/>
           </a:prstGeom>
           <a:noFill/>
-          <a:ln/>
         </p:spPr>
         <p:txBody>
           <a:bodyPr wrap="square" rtlCol="0" anchor="ctr"/>
           <a:lstStyle/>
           <a:p>
-            <a:pPr algn="l" indent="0" marL="0">
+            <a:pPr marL="0" indent="0" algn="l">
               <a:buNone/>
             </a:pPr>
             <a:r>
@@ -2341,9 +2197,9 @@
                 <a:solidFill>
                   <a:srgbClr val="1F4E9C"/>
                 </a:solidFill>
-                <a:latin typeface="微软雅黑" pitchFamily="34" charset="0"/>
-                <a:ea typeface="微软雅黑" pitchFamily="34" charset="-122"/>
-                <a:cs typeface="微软雅黑" pitchFamily="34" charset="-120"/>
+                <a:latin typeface="微软雅黑" panose="020B0503020204020204" pitchFamily="34" charset="-122"/>
+                <a:ea typeface="微软雅黑" panose="020B0503020204020204" pitchFamily="34" charset="-122"/>
+                <a:cs typeface="微软雅黑" panose="020B0503020204020204" pitchFamily="34" charset="-120"/>
               </a:rPr>
               <a:t>检查页</a:t>
             </a:r>
@@ -2366,13 +2222,12 @@
             <a:avLst/>
           </a:prstGeom>
           <a:noFill/>
-          <a:ln/>
         </p:spPr>
         <p:txBody>
           <a:bodyPr wrap="square" rtlCol="0" anchor="ctr"/>
           <a:lstStyle/>
           <a:p>
-            <a:pPr algn="l" indent="0" marL="0">
+            <a:pPr marL="0" indent="0" algn="l">
               <a:buNone/>
             </a:pPr>
             <a:r>
@@ -2380,9 +2235,9 @@
                 <a:solidFill>
                   <a:srgbClr val="1F2329"/>
                 </a:solidFill>
-                <a:latin typeface="微软雅黑" pitchFamily="34" charset="0"/>
-                <a:ea typeface="微软雅黑" pitchFamily="34" charset="-122"/>
-                <a:cs typeface="微软雅黑" pitchFamily="34" charset="-120"/>
+                <a:latin typeface="微软雅黑" panose="020B0503020204020204" pitchFamily="34" charset="-122"/>
+                <a:ea typeface="微软雅黑" panose="020B0503020204020204" pitchFamily="34" charset="-122"/>
+                <a:cs typeface="微软雅黑" panose="020B0503020204020204" pitchFamily="34" charset="-120"/>
               </a:rPr>
               <a:t>给你一个场景，该选哪种链表？（先自己判断）</a:t>
             </a:r>
@@ -2396,17 +2251,11 @@
           <p:cNvGraphicFramePr>
             <a:graphicFrameLocks noGrp="1"/>
           </p:cNvGraphicFramePr>
-          <p:nvPr>
-            <p:extLst>
-              <p:ext uri="{D42A27DB-BD31-4B8C-83A1-F6EECF244321}">
-                <p14:modId xmlns:p14="http://schemas.microsoft.com/office/powerpoint/2010/main" val="1579011935"/>
-              </p:ext>
-            </p:extLst>
-          </p:nvPr>
+          <p:nvPr/>
         </p:nvGraphicFramePr>
         <p:xfrm>
           <a:off x="822960" y="2395728"/>
-          <a:ext cx="10545775" cy="914400"/>
+          <a:ext cx="10545775" cy="2523744"/>
         </p:xfrm>
         <a:graphic>
           <a:graphicData uri="http://schemas.openxmlformats.org/drawingml/2006/table">
@@ -2423,7 +2272,7 @@
                     <a:bodyPr/>
                     <a:lstStyle/>
                     <a:p>
-                      <a:pPr algn="ctr" indent="0" marL="0">
+                      <a:pPr marL="0" indent="0" algn="ctr">
                         <a:buNone/>
                       </a:pPr>
                       <a:r>
@@ -2431,20 +2280,20 @@
                           <a:solidFill>
                             <a:srgbClr val="1F4E9C"/>
                           </a:solidFill>
-                          <a:latin typeface="微软雅黑" pitchFamily="34" charset="0"/>
-                          <a:ea typeface="微软雅黑" pitchFamily="34" charset="-122"/>
-                          <a:cs typeface="微软雅黑" pitchFamily="34" charset="-120"/>
+                          <a:latin typeface="微软雅黑" panose="020B0503020204020204" pitchFamily="34" charset="-122"/>
+                          <a:ea typeface="微软雅黑" panose="020B0503020204020204" pitchFamily="34" charset="-122"/>
+                          <a:cs typeface="微软雅黑" panose="020B0503020204020204" pitchFamily="34" charset="-120"/>
                         </a:rPr>
                         <a:t>需求</a:t>
                       </a:r>
                       <a:endParaRPr lang="en-US" sz="1500" dirty="0">
-                        <a:latin typeface="微软雅黑" charset="0"/>
-                        <a:ea typeface="微软雅黑" charset="0"/>
-                        <a:cs typeface="微软雅黑" charset="0"/>
+                        <a:latin typeface="微软雅黑" panose="020B0503020204020204" pitchFamily="34" charset="-122"/>
+                        <a:ea typeface="微软雅黑" panose="020B0503020204020204" pitchFamily="34" charset="-122"/>
+                        <a:cs typeface="微软雅黑" panose="020B0503020204020204" pitchFamily="34" charset="-122"/>
                       </a:endParaRPr>
                     </a:p>
                   </a:txBody>
-                  <a:tcPr marL="91440" marR="91440" marT="45720" marB="45720" anchor="ctr">
+                  <a:tcPr anchor="ctr">
                     <a:lnL w="9525" cap="flat" cmpd="sng" algn="ctr">
                       <a:solidFill>
                         <a:srgbClr val="D8DBE0"/>
@@ -2491,7 +2340,7 @@
                     <a:bodyPr/>
                     <a:lstStyle/>
                     <a:p>
-                      <a:pPr algn="ctr" indent="0" marL="0">
+                      <a:pPr marL="0" indent="0" algn="ctr">
                         <a:buNone/>
                       </a:pPr>
                       <a:r>
@@ -2499,20 +2348,20 @@
                           <a:solidFill>
                             <a:srgbClr val="1F4E9C"/>
                           </a:solidFill>
-                          <a:latin typeface="微软雅黑" pitchFamily="34" charset="0"/>
-                          <a:ea typeface="微软雅黑" pitchFamily="34" charset="-122"/>
-                          <a:cs typeface="微软雅黑" pitchFamily="34" charset="-120"/>
+                          <a:latin typeface="微软雅黑" panose="020B0503020204020204" pitchFamily="34" charset="-122"/>
+                          <a:ea typeface="微软雅黑" panose="020B0503020204020204" pitchFamily="34" charset="-122"/>
+                          <a:cs typeface="微软雅黑" panose="020B0503020204020204" pitchFamily="34" charset="-120"/>
                         </a:rPr>
                         <a:t>选哪种</a:t>
                       </a:r>
                       <a:endParaRPr lang="en-US" sz="1500" dirty="0">
-                        <a:latin typeface="微软雅黑" charset="0"/>
-                        <a:ea typeface="微软雅黑" charset="0"/>
-                        <a:cs typeface="微软雅黑" charset="0"/>
+                        <a:latin typeface="微软雅黑" panose="020B0503020204020204" pitchFamily="34" charset="-122"/>
+                        <a:ea typeface="微软雅黑" panose="020B0503020204020204" pitchFamily="34" charset="-122"/>
+                        <a:cs typeface="微软雅黑" panose="020B0503020204020204" pitchFamily="34" charset="-122"/>
                       </a:endParaRPr>
                     </a:p>
                   </a:txBody>
-                  <a:tcPr marL="91440" marR="91440" marT="45720" marB="45720" anchor="ctr">
+                  <a:tcPr anchor="ctr">
                     <a:lnL w="9525" cap="flat" cmpd="sng" algn="ctr">
                       <a:solidFill>
                         <a:srgbClr val="D8DBE0"/>
@@ -2559,7 +2408,7 @@
                     <a:bodyPr/>
                     <a:lstStyle/>
                     <a:p>
-                      <a:pPr algn="ctr" indent="0" marL="0">
+                      <a:pPr marL="0" indent="0" algn="ctr">
                         <a:buNone/>
                       </a:pPr>
                       <a:r>
@@ -2567,20 +2416,20 @@
                           <a:solidFill>
                             <a:srgbClr val="1F4E9C"/>
                           </a:solidFill>
-                          <a:latin typeface="微软雅黑" pitchFamily="34" charset="0"/>
-                          <a:ea typeface="微软雅黑" pitchFamily="34" charset="-122"/>
-                          <a:cs typeface="微软雅黑" pitchFamily="34" charset="-120"/>
+                          <a:latin typeface="微软雅黑" panose="020B0503020204020204" pitchFamily="34" charset="-122"/>
+                          <a:ea typeface="微软雅黑" panose="020B0503020204020204" pitchFamily="34" charset="-122"/>
+                          <a:cs typeface="微软雅黑" panose="020B0503020204020204" pitchFamily="34" charset="-120"/>
                         </a:rPr>
                         <a:t>理由</a:t>
                       </a:r>
                       <a:endParaRPr lang="en-US" sz="1500" dirty="0">
-                        <a:latin typeface="微软雅黑" charset="0"/>
-                        <a:ea typeface="微软雅黑" charset="0"/>
-                        <a:cs typeface="微软雅黑" charset="0"/>
+                        <a:latin typeface="微软雅黑" panose="020B0503020204020204" pitchFamily="34" charset="-122"/>
+                        <a:ea typeface="微软雅黑" panose="020B0503020204020204" pitchFamily="34" charset="-122"/>
+                        <a:cs typeface="微软雅黑" panose="020B0503020204020204" pitchFamily="34" charset="-122"/>
                       </a:endParaRPr>
                     </a:p>
                   </a:txBody>
-                  <a:tcPr marL="91440" marR="91440" marT="45720" marB="45720" anchor="ctr">
+                  <a:tcPr anchor="ctr">
                     <a:lnL w="9525" cap="flat" cmpd="sng" algn="ctr">
                       <a:solidFill>
                         <a:srgbClr val="D8DBE0"/>
@@ -2629,28 +2478,61 @@
                     <a:bodyPr/>
                     <a:lstStyle/>
                     <a:p>
-                      <a:pPr algn="ctr" indent="0" marL="0">
+                      <a:pPr marL="0" indent="0" algn="ctr">
                         <a:buNone/>
                       </a:pPr>
+                      <a:r>
+                        <a:rPr lang="zh-CN" altLang="en-US" sz="1500" dirty="0">
+                          <a:solidFill>
+                            <a:srgbClr val="1F2329"/>
+                          </a:solidFill>
+                          <a:latin typeface="微软雅黑" panose="020B0503020204020204" pitchFamily="34" charset="-122"/>
+                          <a:ea typeface="微软雅黑" panose="020B0503020204020204" pitchFamily="34" charset="-122"/>
+                          <a:cs typeface="微软雅黑" panose="020B0503020204020204" pitchFamily="34" charset="-120"/>
+                        </a:rPr>
+                        <a:t>常</a:t>
+                      </a:r>
                       <a:r>
                         <a:rPr lang="en-US" sz="1500" dirty="0">
                           <a:solidFill>
                             <a:srgbClr val="1F2329"/>
                           </a:solidFill>
-                          <a:latin typeface="微软雅黑" pitchFamily="34" charset="0"/>
-                          <a:ea typeface="微软雅黑" pitchFamily="34" charset="-122"/>
-                          <a:cs typeface="微软雅黑" pitchFamily="34" charset="-120"/>
+                          <a:latin typeface="微软雅黑" panose="020B0503020204020204" pitchFamily="34" charset="-122"/>
+                          <a:ea typeface="微软雅黑" panose="020B0503020204020204" pitchFamily="34" charset="-122"/>
+                          <a:cs typeface="微软雅黑" panose="020B0503020204020204" pitchFamily="34" charset="-120"/>
                         </a:rPr>
-                        <a:t>只在尾部操作、要顺序</a:t>
+                        <a:t>在尾部操作、</a:t>
+                      </a:r>
+                      <a:r>
+                        <a:rPr lang="zh-CN" altLang="en-US" sz="1500" dirty="0">
+                          <a:solidFill>
+                            <a:srgbClr val="1F2329"/>
+                          </a:solidFill>
+                          <a:latin typeface="微软雅黑" panose="020B0503020204020204" pitchFamily="34" charset="-122"/>
+                          <a:ea typeface="微软雅黑" panose="020B0503020204020204" pitchFamily="34" charset="-122"/>
+                          <a:cs typeface="微软雅黑" panose="020B0503020204020204" pitchFamily="34" charset="-120"/>
+                        </a:rPr>
+                        <a:t>保持输入</a:t>
+                      </a:r>
+                      <a:r>
+                        <a:rPr lang="en-US" sz="1500" dirty="0">
+                          <a:solidFill>
+                            <a:srgbClr val="1F2329"/>
+                          </a:solidFill>
+                          <a:latin typeface="微软雅黑" panose="020B0503020204020204" pitchFamily="34" charset="-122"/>
+                          <a:ea typeface="微软雅黑" panose="020B0503020204020204" pitchFamily="34" charset="-122"/>
+                          <a:cs typeface="微软雅黑" panose="020B0503020204020204" pitchFamily="34" charset="-120"/>
+                        </a:rPr>
+                        <a:t>顺序</a:t>
                       </a:r>
                       <a:endParaRPr lang="en-US" sz="1500" dirty="0">
-                        <a:latin typeface="微软雅黑" charset="0"/>
-                        <a:ea typeface="微软雅黑" charset="0"/>
-                        <a:cs typeface="微软雅黑" charset="0"/>
+                        <a:latin typeface="微软雅黑" panose="020B0503020204020204" pitchFamily="34" charset="-122"/>
+                        <a:ea typeface="微软雅黑" panose="020B0503020204020204" pitchFamily="34" charset="-122"/>
+                        <a:cs typeface="微软雅黑" panose="020B0503020204020204" pitchFamily="34" charset="-122"/>
                       </a:endParaRPr>
                     </a:p>
                   </a:txBody>
-                  <a:tcPr marL="91440" marR="91440" marT="45720" marB="45720" anchor="ctr">
+                  <a:tcPr anchor="ctr">
                     <a:lnL w="9525" cap="flat" cmpd="sng" algn="ctr">
                       <a:solidFill>
                         <a:srgbClr val="D8DBE0"/>
@@ -2697,7 +2579,7 @@
                     <a:bodyPr/>
                     <a:lstStyle/>
                     <a:p>
-                      <a:pPr algn="ctr" indent="0" marL="0">
+                      <a:pPr marL="0" indent="0" algn="ctr">
                         <a:buNone/>
                       </a:pPr>
                       <a:r>
@@ -2705,20 +2587,20 @@
                           <a:solidFill>
                             <a:srgbClr val="1F2329"/>
                           </a:solidFill>
-                          <a:latin typeface="微软雅黑" pitchFamily="34" charset="0"/>
-                          <a:ea typeface="微软雅黑" pitchFamily="34" charset="-122"/>
-                          <a:cs typeface="微软雅黑" pitchFamily="34" charset="-120"/>
+                          <a:latin typeface="微软雅黑" panose="020B0503020204020204" pitchFamily="34" charset="-122"/>
+                          <a:ea typeface="微软雅黑" panose="020B0503020204020204" pitchFamily="34" charset="-122"/>
+                          <a:cs typeface="微软雅黑" panose="020B0503020204020204" pitchFamily="34" charset="-120"/>
                         </a:rPr>
                         <a:t>单链表加 rear</a:t>
                       </a:r>
                       <a:endParaRPr lang="en-US" sz="1500" dirty="0">
-                        <a:latin typeface="微软雅黑" charset="0"/>
-                        <a:ea typeface="微软雅黑" charset="0"/>
-                        <a:cs typeface="微软雅黑" charset="0"/>
+                        <a:latin typeface="微软雅黑" panose="020B0503020204020204" pitchFamily="34" charset="-122"/>
+                        <a:ea typeface="微软雅黑" panose="020B0503020204020204" pitchFamily="34" charset="-122"/>
+                        <a:cs typeface="微软雅黑" panose="020B0503020204020204" pitchFamily="34" charset="-122"/>
                       </a:endParaRPr>
                     </a:p>
                   </a:txBody>
-                  <a:tcPr marL="91440" marR="91440" marT="45720" marB="45720" anchor="ctr">
+                  <a:tcPr anchor="ctr">
                     <a:lnL w="9525" cap="flat" cmpd="sng" algn="ctr">
                       <a:solidFill>
                         <a:srgbClr val="D8DBE0"/>
@@ -2765,7 +2647,7 @@
                     <a:bodyPr/>
                     <a:lstStyle/>
                     <a:p>
-                      <a:pPr algn="ctr" indent="0" marL="0">
+                      <a:pPr marL="0" indent="0" algn="ctr">
                         <a:buNone/>
                       </a:pPr>
                       <a:r>
@@ -2773,20 +2655,20 @@
                           <a:solidFill>
                             <a:srgbClr val="1F2329"/>
                           </a:solidFill>
-                          <a:latin typeface="微软雅黑" pitchFamily="34" charset="0"/>
-                          <a:ea typeface="微软雅黑" pitchFamily="34" charset="-122"/>
-                          <a:cs typeface="微软雅黑" pitchFamily="34" charset="-120"/>
+                          <a:latin typeface="微软雅黑" panose="020B0503020204020204" pitchFamily="34" charset="-122"/>
+                          <a:ea typeface="微软雅黑" panose="020B0503020204020204" pitchFamily="34" charset="-122"/>
+                          <a:cs typeface="微软雅黑" panose="020B0503020204020204" pitchFamily="34" charset="-120"/>
                         </a:rPr>
                         <a:t>尾插 O(1)</a:t>
                       </a:r>
                       <a:endParaRPr lang="en-US" sz="1500" dirty="0">
-                        <a:latin typeface="微软雅黑" charset="0"/>
-                        <a:ea typeface="微软雅黑" charset="0"/>
-                        <a:cs typeface="微软雅黑" charset="0"/>
+                        <a:latin typeface="微软雅黑" panose="020B0503020204020204" pitchFamily="34" charset="-122"/>
+                        <a:ea typeface="微软雅黑" panose="020B0503020204020204" pitchFamily="34" charset="-122"/>
+                        <a:cs typeface="微软雅黑" panose="020B0503020204020204" pitchFamily="34" charset="-122"/>
                       </a:endParaRPr>
                     </a:p>
                   </a:txBody>
-                  <a:tcPr marL="91440" marR="91440" marT="45720" marB="45720" anchor="ctr">
+                  <a:tcPr anchor="ctr">
                     <a:lnL w="9525" cap="flat" cmpd="sng" algn="ctr">
                       <a:solidFill>
                         <a:srgbClr val="D8DBE0"/>
@@ -2835,7 +2717,7 @@
                     <a:bodyPr/>
                     <a:lstStyle/>
                     <a:p>
-                      <a:pPr algn="ctr" indent="0" marL="0">
+                      <a:pPr marL="0" indent="0" algn="ctr">
                         <a:buNone/>
                       </a:pPr>
                       <a:r>
@@ -2843,20 +2725,20 @@
                           <a:solidFill>
                             <a:srgbClr val="1F2329"/>
                           </a:solidFill>
-                          <a:latin typeface="微软雅黑" pitchFamily="34" charset="0"/>
-                          <a:ea typeface="微软雅黑" pitchFamily="34" charset="-122"/>
-                          <a:cs typeface="微软雅黑" pitchFamily="34" charset="-120"/>
+                          <a:latin typeface="微软雅黑" panose="020B0503020204020204" pitchFamily="34" charset="-122"/>
+                          <a:ea typeface="微软雅黑" panose="020B0503020204020204" pitchFamily="34" charset="-122"/>
+                          <a:cs typeface="微软雅黑" panose="020B0503020204020204" pitchFamily="34" charset="-120"/>
                         </a:rPr>
                         <a:t>要频繁找前驱或双向走</a:t>
                       </a:r>
                       <a:endParaRPr lang="en-US" sz="1500" dirty="0">
-                        <a:latin typeface="微软雅黑" charset="0"/>
-                        <a:ea typeface="微软雅黑" charset="0"/>
-                        <a:cs typeface="微软雅黑" charset="0"/>
+                        <a:latin typeface="微软雅黑" panose="020B0503020204020204" pitchFamily="34" charset="-122"/>
+                        <a:ea typeface="微软雅黑" panose="020B0503020204020204" pitchFamily="34" charset="-122"/>
+                        <a:cs typeface="微软雅黑" panose="020B0503020204020204" pitchFamily="34" charset="-122"/>
                       </a:endParaRPr>
                     </a:p>
                   </a:txBody>
-                  <a:tcPr marL="91440" marR="91440" marT="45720" marB="45720" anchor="ctr">
+                  <a:tcPr anchor="ctr">
                     <a:lnL w="9525" cap="flat" cmpd="sng" algn="ctr">
                       <a:solidFill>
                         <a:srgbClr val="D8DBE0"/>
@@ -2903,7 +2785,7 @@
                     <a:bodyPr/>
                     <a:lstStyle/>
                     <a:p>
-                      <a:pPr algn="ctr" indent="0" marL="0">
+                      <a:pPr marL="0" indent="0" algn="ctr">
                         <a:buNone/>
                       </a:pPr>
                       <a:r>
@@ -2911,20 +2793,20 @@
                           <a:solidFill>
                             <a:srgbClr val="1F2329"/>
                           </a:solidFill>
-                          <a:latin typeface="微软雅黑" pitchFamily="34" charset="0"/>
-                          <a:ea typeface="微软雅黑" pitchFamily="34" charset="-122"/>
-                          <a:cs typeface="微软雅黑" pitchFamily="34" charset="-120"/>
+                          <a:latin typeface="微软雅黑" panose="020B0503020204020204" pitchFamily="34" charset="-122"/>
+                          <a:ea typeface="微软雅黑" panose="020B0503020204020204" pitchFamily="34" charset="-122"/>
+                          <a:cs typeface="微软雅黑" panose="020B0503020204020204" pitchFamily="34" charset="-120"/>
                         </a:rPr>
                         <a:t>双链表</a:t>
                       </a:r>
                       <a:endParaRPr lang="en-US" sz="1500" dirty="0">
-                        <a:latin typeface="微软雅黑" charset="0"/>
-                        <a:ea typeface="微软雅黑" charset="0"/>
-                        <a:cs typeface="微软雅黑" charset="0"/>
+                        <a:latin typeface="微软雅黑" panose="020B0503020204020204" pitchFamily="34" charset="-122"/>
+                        <a:ea typeface="微软雅黑" panose="020B0503020204020204" pitchFamily="34" charset="-122"/>
+                        <a:cs typeface="微软雅黑" panose="020B0503020204020204" pitchFamily="34" charset="-122"/>
                       </a:endParaRPr>
                     </a:p>
                   </a:txBody>
-                  <a:tcPr marL="91440" marR="91440" marT="45720" marB="45720" anchor="ctr">
+                  <a:tcPr anchor="ctr">
                     <a:lnL w="9525" cap="flat" cmpd="sng" algn="ctr">
                       <a:solidFill>
                         <a:srgbClr val="D8DBE0"/>
@@ -2971,7 +2853,7 @@
                     <a:bodyPr/>
                     <a:lstStyle/>
                     <a:p>
-                      <a:pPr algn="ctr" indent="0" marL="0">
+                      <a:pPr marL="0" indent="0" algn="ctr">
                         <a:buNone/>
                       </a:pPr>
                       <a:r>
@@ -2979,20 +2861,20 @@
                           <a:solidFill>
                             <a:srgbClr val="1F2329"/>
                           </a:solidFill>
-                          <a:latin typeface="微软雅黑" pitchFamily="34" charset="0"/>
-                          <a:ea typeface="微软雅黑" pitchFamily="34" charset="-122"/>
-                          <a:cs typeface="微软雅黑" pitchFamily="34" charset="-120"/>
+                          <a:latin typeface="微软雅黑" panose="020B0503020204020204" pitchFamily="34" charset="-122"/>
+                          <a:ea typeface="微软雅黑" panose="020B0503020204020204" pitchFamily="34" charset="-122"/>
+                          <a:cs typeface="微软雅黑" panose="020B0503020204020204" pitchFamily="34" charset="-120"/>
                         </a:rPr>
                         <a:t>prior 直接给前驱</a:t>
                       </a:r>
                       <a:endParaRPr lang="en-US" sz="1500" dirty="0">
-                        <a:latin typeface="微软雅黑" charset="0"/>
-                        <a:ea typeface="微软雅黑" charset="0"/>
-                        <a:cs typeface="微软雅黑" charset="0"/>
+                        <a:latin typeface="微软雅黑" panose="020B0503020204020204" pitchFamily="34" charset="-122"/>
+                        <a:ea typeface="微软雅黑" panose="020B0503020204020204" pitchFamily="34" charset="-122"/>
+                        <a:cs typeface="微软雅黑" panose="020B0503020204020204" pitchFamily="34" charset="-122"/>
                       </a:endParaRPr>
                     </a:p>
                   </a:txBody>
-                  <a:tcPr marL="91440" marR="91440" marT="45720" marB="45720" anchor="ctr">
+                  <a:tcPr anchor="ctr">
                     <a:lnL w="9525" cap="flat" cmpd="sng" algn="ctr">
                       <a:solidFill>
                         <a:srgbClr val="D8DBE0"/>
@@ -3041,7 +2923,7 @@
                     <a:bodyPr/>
                     <a:lstStyle/>
                     <a:p>
-                      <a:pPr algn="ctr" indent="0" marL="0">
+                      <a:pPr marL="0" indent="0" algn="ctr">
                         <a:buNone/>
                       </a:pPr>
                       <a:r>
@@ -3049,20 +2931,20 @@
                           <a:solidFill>
                             <a:srgbClr val="1F2329"/>
                           </a:solidFill>
-                          <a:latin typeface="微软雅黑" pitchFamily="34" charset="0"/>
-                          <a:ea typeface="微软雅黑" pitchFamily="34" charset="-122"/>
-                          <a:cs typeface="微软雅黑" pitchFamily="34" charset="-120"/>
+                          <a:latin typeface="微软雅黑" panose="020B0503020204020204" pitchFamily="34" charset="-122"/>
+                          <a:ea typeface="微软雅黑" panose="020B0503020204020204" pitchFamily="34" charset="-122"/>
+                          <a:cs typeface="微软雅黑" panose="020B0503020204020204" pitchFamily="34" charset="-120"/>
                         </a:rPr>
                         <a:t>要循环报数、轮转</a:t>
                       </a:r>
                       <a:endParaRPr lang="en-US" sz="1500" dirty="0">
-                        <a:latin typeface="微软雅黑" charset="0"/>
-                        <a:ea typeface="微软雅黑" charset="0"/>
-                        <a:cs typeface="微软雅黑" charset="0"/>
+                        <a:latin typeface="微软雅黑" panose="020B0503020204020204" pitchFamily="34" charset="-122"/>
+                        <a:ea typeface="微软雅黑" panose="020B0503020204020204" pitchFamily="34" charset="-122"/>
+                        <a:cs typeface="微软雅黑" panose="020B0503020204020204" pitchFamily="34" charset="-122"/>
                       </a:endParaRPr>
                     </a:p>
                   </a:txBody>
-                  <a:tcPr marL="91440" marR="91440" marT="45720" marB="45720" anchor="ctr">
+                  <a:tcPr anchor="ctr">
                     <a:lnL w="9525" cap="flat" cmpd="sng" algn="ctr">
                       <a:solidFill>
                         <a:srgbClr val="D8DBE0"/>
@@ -3109,7 +2991,7 @@
                     <a:bodyPr/>
                     <a:lstStyle/>
                     <a:p>
-                      <a:pPr algn="ctr" indent="0" marL="0">
+                      <a:pPr marL="0" indent="0" algn="ctr">
                         <a:buNone/>
                       </a:pPr>
                       <a:r>
@@ -3117,20 +2999,20 @@
                           <a:solidFill>
                             <a:srgbClr val="1F2329"/>
                           </a:solidFill>
-                          <a:latin typeface="微软雅黑" pitchFamily="34" charset="0"/>
-                          <a:ea typeface="微软雅黑" pitchFamily="34" charset="-122"/>
-                          <a:cs typeface="微软雅黑" pitchFamily="34" charset="-120"/>
+                          <a:latin typeface="微软雅黑" panose="020B0503020204020204" pitchFamily="34" charset="-122"/>
+                          <a:ea typeface="微软雅黑" panose="020B0503020204020204" pitchFamily="34" charset="-122"/>
+                          <a:cs typeface="微软雅黑" panose="020B0503020204020204" pitchFamily="34" charset="-120"/>
                         </a:rPr>
                         <a:t>循环单链表</a:t>
                       </a:r>
                       <a:endParaRPr lang="en-US" sz="1500" dirty="0">
-                        <a:latin typeface="微软雅黑" charset="0"/>
-                        <a:ea typeface="微软雅黑" charset="0"/>
-                        <a:cs typeface="微软雅黑" charset="0"/>
+                        <a:latin typeface="微软雅黑" panose="020B0503020204020204" pitchFamily="34" charset="-122"/>
+                        <a:ea typeface="微软雅黑" panose="020B0503020204020204" pitchFamily="34" charset="-122"/>
+                        <a:cs typeface="微软雅黑" panose="020B0503020204020204" pitchFamily="34" charset="-122"/>
                       </a:endParaRPr>
                     </a:p>
                   </a:txBody>
-                  <a:tcPr marL="91440" marR="91440" marT="45720" marB="45720" anchor="ctr">
+                  <a:tcPr anchor="ctr">
                     <a:lnL w="9525" cap="flat" cmpd="sng" algn="ctr">
                       <a:solidFill>
                         <a:srgbClr val="D8DBE0"/>
@@ -3177,7 +3059,7 @@
                     <a:bodyPr/>
                     <a:lstStyle/>
                     <a:p>
-                      <a:pPr algn="ctr" indent="0" marL="0">
+                      <a:pPr marL="0" indent="0" algn="ctr">
                         <a:buNone/>
                       </a:pPr>
                       <a:r>
@@ -3185,20 +3067,20 @@
                           <a:solidFill>
                             <a:srgbClr val="1F2329"/>
                           </a:solidFill>
-                          <a:latin typeface="微软雅黑" pitchFamily="34" charset="0"/>
-                          <a:ea typeface="微软雅黑" pitchFamily="34" charset="-122"/>
-                          <a:cs typeface="微软雅黑" pitchFamily="34" charset="-120"/>
+                          <a:latin typeface="微软雅黑" panose="020B0503020204020204" pitchFamily="34" charset="-122"/>
+                          <a:ea typeface="微软雅黑" panose="020B0503020204020204" pitchFamily="34" charset="-122"/>
+                          <a:cs typeface="微软雅黑" panose="020B0503020204020204" pitchFamily="34" charset="-120"/>
                         </a:rPr>
                         <a:t>走到尾自动回头</a:t>
                       </a:r>
                       <a:endParaRPr lang="en-US" sz="1500" dirty="0">
-                        <a:latin typeface="微软雅黑" charset="0"/>
-                        <a:ea typeface="微软雅黑" charset="0"/>
-                        <a:cs typeface="微软雅黑" charset="0"/>
+                        <a:latin typeface="微软雅黑" panose="020B0503020204020204" pitchFamily="34" charset="-122"/>
+                        <a:ea typeface="微软雅黑" panose="020B0503020204020204" pitchFamily="34" charset="-122"/>
+                        <a:cs typeface="微软雅黑" panose="020B0503020204020204" pitchFamily="34" charset="-122"/>
                       </a:endParaRPr>
                     </a:p>
                   </a:txBody>
-                  <a:tcPr marL="91440" marR="91440" marT="45720" marB="45720" anchor="ctr">
+                  <a:tcPr anchor="ctr">
                     <a:lnL w="9525" cap="flat" cmpd="sng" algn="ctr">
                       <a:solidFill>
                         <a:srgbClr val="D8DBE0"/>
@@ -3247,7 +3129,7 @@
                     <a:bodyPr/>
                     <a:lstStyle/>
                     <a:p>
-                      <a:pPr algn="ctr" indent="0" marL="0">
+                      <a:pPr marL="0" indent="0" algn="ctr">
                         <a:buNone/>
                       </a:pPr>
                       <a:r>
@@ -3255,20 +3137,20 @@
                           <a:solidFill>
                             <a:srgbClr val="1F2329"/>
                           </a:solidFill>
-                          <a:latin typeface="微软雅黑" pitchFamily="34" charset="0"/>
-                          <a:ea typeface="微软雅黑" pitchFamily="34" charset="-122"/>
-                          <a:cs typeface="微软雅黑" pitchFamily="34" charset="-120"/>
+                          <a:latin typeface="微软雅黑" panose="020B0503020204020204" pitchFamily="34" charset="-122"/>
+                          <a:ea typeface="微软雅黑" panose="020B0503020204020204" pitchFamily="34" charset="-122"/>
+                          <a:cs typeface="微软雅黑" panose="020B0503020204020204" pitchFamily="34" charset="-120"/>
                         </a:rPr>
                         <a:t>要频繁在头尾两端操作</a:t>
                       </a:r>
                       <a:endParaRPr lang="en-US" sz="1500" dirty="0">
-                        <a:latin typeface="微软雅黑" charset="0"/>
-                        <a:ea typeface="微软雅黑" charset="0"/>
-                        <a:cs typeface="微软雅黑" charset="0"/>
+                        <a:latin typeface="微软雅黑" panose="020B0503020204020204" pitchFamily="34" charset="-122"/>
+                        <a:ea typeface="微软雅黑" panose="020B0503020204020204" pitchFamily="34" charset="-122"/>
+                        <a:cs typeface="微软雅黑" panose="020B0503020204020204" pitchFamily="34" charset="-122"/>
                       </a:endParaRPr>
                     </a:p>
                   </a:txBody>
-                  <a:tcPr marL="91440" marR="91440" marT="45720" marB="45720" anchor="ctr">
+                  <a:tcPr anchor="ctr">
                     <a:lnL w="9525" cap="flat" cmpd="sng" algn="ctr">
                       <a:solidFill>
                         <a:srgbClr val="D8DBE0"/>
@@ -3315,7 +3197,7 @@
                     <a:bodyPr/>
                     <a:lstStyle/>
                     <a:p>
-                      <a:pPr algn="ctr" indent="0" marL="0">
+                      <a:pPr marL="0" indent="0" algn="ctr">
                         <a:buNone/>
                       </a:pPr>
                       <a:r>
@@ -3323,20 +3205,20 @@
                           <a:solidFill>
                             <a:srgbClr val="1F2329"/>
                           </a:solidFill>
-                          <a:latin typeface="微软雅黑" pitchFamily="34" charset="0"/>
-                          <a:ea typeface="微软雅黑" pitchFamily="34" charset="-122"/>
-                          <a:cs typeface="微软雅黑" pitchFamily="34" charset="-120"/>
+                          <a:latin typeface="微软雅黑" panose="020B0503020204020204" pitchFamily="34" charset="-122"/>
+                          <a:ea typeface="微软雅黑" panose="020B0503020204020204" pitchFamily="34" charset="-122"/>
+                          <a:cs typeface="微软雅黑" panose="020B0503020204020204" pitchFamily="34" charset="-120"/>
                         </a:rPr>
                         <a:t>循环双链表</a:t>
                       </a:r>
                       <a:endParaRPr lang="en-US" sz="1500" dirty="0">
-                        <a:latin typeface="微软雅黑" charset="0"/>
-                        <a:ea typeface="微软雅黑" charset="0"/>
-                        <a:cs typeface="微软雅黑" charset="0"/>
+                        <a:latin typeface="微软雅黑" panose="020B0503020204020204" pitchFamily="34" charset="-122"/>
+                        <a:ea typeface="微软雅黑" panose="020B0503020204020204" pitchFamily="34" charset="-122"/>
+                        <a:cs typeface="微软雅黑" panose="020B0503020204020204" pitchFamily="34" charset="-122"/>
                       </a:endParaRPr>
                     </a:p>
                   </a:txBody>
-                  <a:tcPr marL="91440" marR="91440" marT="45720" marB="45720" anchor="ctr">
+                  <a:tcPr anchor="ctr">
                     <a:lnL w="9525" cap="flat" cmpd="sng" algn="ctr">
                       <a:solidFill>
                         <a:srgbClr val="D8DBE0"/>
@@ -3383,7 +3265,7 @@
                     <a:bodyPr/>
                     <a:lstStyle/>
                     <a:p>
-                      <a:pPr algn="ctr" indent="0" marL="0">
+                      <a:pPr marL="0" indent="0" algn="ctr">
                         <a:buNone/>
                       </a:pPr>
                       <a:r>
@@ -3391,20 +3273,20 @@
                           <a:solidFill>
                             <a:srgbClr val="1F2329"/>
                           </a:solidFill>
-                          <a:latin typeface="微软雅黑" pitchFamily="34" charset="0"/>
-                          <a:ea typeface="微软雅黑" pitchFamily="34" charset="-122"/>
-                          <a:cs typeface="微软雅黑" pitchFamily="34" charset="-120"/>
+                          <a:latin typeface="微软雅黑" panose="020B0503020204020204" pitchFamily="34" charset="-122"/>
+                          <a:ea typeface="微软雅黑" panose="020B0503020204020204" pitchFamily="34" charset="-122"/>
+                          <a:cs typeface="微软雅黑" panose="020B0503020204020204" pitchFamily="34" charset="-120"/>
                         </a:rPr>
                         <a:t>头尾都是 O(1)</a:t>
                       </a:r>
                       <a:endParaRPr lang="en-US" sz="1500" dirty="0">
-                        <a:latin typeface="微软雅黑" charset="0"/>
-                        <a:ea typeface="微软雅黑" charset="0"/>
-                        <a:cs typeface="微软雅黑" charset="0"/>
+                        <a:latin typeface="微软雅黑" panose="020B0503020204020204" pitchFamily="34" charset="-122"/>
+                        <a:ea typeface="微软雅黑" panose="020B0503020204020204" pitchFamily="34" charset="-122"/>
+                        <a:cs typeface="微软雅黑" panose="020B0503020204020204" pitchFamily="34" charset="-122"/>
                       </a:endParaRPr>
                     </a:p>
                   </a:txBody>
-                  <a:tcPr marL="91440" marR="91440" marT="45720" marB="45720" anchor="ctr">
+                  <a:tcPr anchor="ctr">
                     <a:lnL w="9525" cap="flat" cmpd="sng" algn="ctr">
                       <a:solidFill>
                         <a:srgbClr val="D8DBE0"/>
@@ -3453,7 +3335,7 @@
                     <a:bodyPr/>
                     <a:lstStyle/>
                     <a:p>
-                      <a:pPr algn="ctr" indent="0" marL="0">
+                      <a:pPr marL="0" indent="0" algn="ctr">
                         <a:buNone/>
                       </a:pPr>
                       <a:r>
@@ -3461,20 +3343,20 @@
                           <a:solidFill>
                             <a:srgbClr val="1F2329"/>
                           </a:solidFill>
-                          <a:latin typeface="微软雅黑" pitchFamily="34" charset="0"/>
-                          <a:ea typeface="微软雅黑" pitchFamily="34" charset="-122"/>
-                          <a:cs typeface="微软雅黑" pitchFamily="34" charset="-120"/>
+                          <a:latin typeface="微软雅黑" panose="020B0503020204020204" pitchFamily="34" charset="-122"/>
+                          <a:ea typeface="微软雅黑" panose="020B0503020204020204" pitchFamily="34" charset="-122"/>
+                          <a:cs typeface="微软雅黑" panose="020B0503020204020204" pitchFamily="34" charset="-120"/>
                         </a:rPr>
                         <a:t>题目要求用数组</a:t>
                       </a:r>
                       <a:endParaRPr lang="en-US" sz="1500" dirty="0">
-                        <a:latin typeface="微软雅黑" charset="0"/>
-                        <a:ea typeface="微软雅黑" charset="0"/>
-                        <a:cs typeface="微软雅黑" charset="0"/>
+                        <a:latin typeface="微软雅黑" panose="020B0503020204020204" pitchFamily="34" charset="-122"/>
+                        <a:ea typeface="微软雅黑" panose="020B0503020204020204" pitchFamily="34" charset="-122"/>
+                        <a:cs typeface="微软雅黑" panose="020B0503020204020204" pitchFamily="34" charset="-122"/>
                       </a:endParaRPr>
                     </a:p>
                   </a:txBody>
-                  <a:tcPr marL="91440" marR="91440" marT="45720" marB="45720" anchor="ctr">
+                  <a:tcPr anchor="ctr">
                     <a:lnL w="9525" cap="flat" cmpd="sng" algn="ctr">
                       <a:solidFill>
                         <a:srgbClr val="D8DBE0"/>
@@ -3521,7 +3403,7 @@
                     <a:bodyPr/>
                     <a:lstStyle/>
                     <a:p>
-                      <a:pPr algn="ctr" indent="0" marL="0">
+                      <a:pPr marL="0" indent="0" algn="ctr">
                         <a:buNone/>
                       </a:pPr>
                       <a:r>
@@ -3529,20 +3411,20 @@
                           <a:solidFill>
                             <a:srgbClr val="1F2329"/>
                           </a:solidFill>
-                          <a:latin typeface="微软雅黑" pitchFamily="34" charset="0"/>
-                          <a:ea typeface="微软雅黑" pitchFamily="34" charset="-122"/>
-                          <a:cs typeface="微软雅黑" pitchFamily="34" charset="-120"/>
+                          <a:latin typeface="微软雅黑" panose="020B0503020204020204" pitchFamily="34" charset="-122"/>
+                          <a:ea typeface="微软雅黑" panose="020B0503020204020204" pitchFamily="34" charset="-122"/>
+                          <a:cs typeface="微软雅黑" panose="020B0503020204020204" pitchFamily="34" charset="-120"/>
                         </a:rPr>
                         <a:t>静态链表</a:t>
                       </a:r>
                       <a:endParaRPr lang="en-US" sz="1500" dirty="0">
-                        <a:latin typeface="微软雅黑" charset="0"/>
-                        <a:ea typeface="微软雅黑" charset="0"/>
-                        <a:cs typeface="微软雅黑" charset="0"/>
+                        <a:latin typeface="微软雅黑" panose="020B0503020204020204" pitchFamily="34" charset="-122"/>
+                        <a:ea typeface="微软雅黑" panose="020B0503020204020204" pitchFamily="34" charset="-122"/>
+                        <a:cs typeface="微软雅黑" panose="020B0503020204020204" pitchFamily="34" charset="-122"/>
                       </a:endParaRPr>
                     </a:p>
                   </a:txBody>
-                  <a:tcPr marL="91440" marR="91440" marT="45720" marB="45720" anchor="ctr">
+                  <a:tcPr anchor="ctr">
                     <a:lnL w="9525" cap="flat" cmpd="sng" algn="ctr">
                       <a:solidFill>
                         <a:srgbClr val="D8DBE0"/>
@@ -3589,7 +3471,7 @@
                     <a:bodyPr/>
                     <a:lstStyle/>
                     <a:p>
-                      <a:pPr algn="ctr" indent="0" marL="0">
+                      <a:pPr marL="0" indent="0" algn="ctr">
                         <a:buNone/>
                       </a:pPr>
                       <a:r>
@@ -3597,20 +3479,20 @@
                           <a:solidFill>
                             <a:srgbClr val="1F2329"/>
                           </a:solidFill>
-                          <a:latin typeface="微软雅黑" pitchFamily="34" charset="0"/>
-                          <a:ea typeface="微软雅黑" pitchFamily="34" charset="-122"/>
-                          <a:cs typeface="微软雅黑" pitchFamily="34" charset="-120"/>
+                          <a:latin typeface="微软雅黑" panose="020B0503020204020204" pitchFamily="34" charset="-122"/>
+                          <a:ea typeface="微软雅黑" panose="020B0503020204020204" pitchFamily="34" charset="-122"/>
+                          <a:cs typeface="微软雅黑" panose="020B0503020204020204" pitchFamily="34" charset="-120"/>
                         </a:rPr>
                         <a:t>游标代替指针</a:t>
                       </a:r>
                       <a:endParaRPr lang="en-US" sz="1500" dirty="0">
-                        <a:latin typeface="微软雅黑" charset="0"/>
-                        <a:ea typeface="微软雅黑" charset="0"/>
-                        <a:cs typeface="微软雅黑" charset="0"/>
+                        <a:latin typeface="微软雅黑" panose="020B0503020204020204" pitchFamily="34" charset="-122"/>
+                        <a:ea typeface="微软雅黑" panose="020B0503020204020204" pitchFamily="34" charset="-122"/>
+                        <a:cs typeface="微软雅黑" panose="020B0503020204020204" pitchFamily="34" charset="-122"/>
                       </a:endParaRPr>
                     </a:p>
                   </a:txBody>
-                  <a:tcPr marL="91440" marR="91440" marT="45720" marB="45720" anchor="ctr">
+                  <a:tcPr anchor="ctr">
                     <a:lnL w="9525" cap="flat" cmpd="sng" algn="ctr">
                       <a:solidFill>
                         <a:srgbClr val="D8DBE0"/>
@@ -3672,13 +3554,12 @@
             <a:avLst/>
           </a:prstGeom>
           <a:noFill/>
-          <a:ln/>
         </p:spPr>
         <p:txBody>
           <a:bodyPr wrap="square" rtlCol="0" anchor="t"/>
           <a:lstStyle/>
           <a:p>
-            <a:pPr algn="l" indent="0" marL="0">
+            <a:pPr marL="0" indent="0" algn="l">
               <a:buNone/>
             </a:pPr>
             <a:r>
@@ -3686,9 +3567,9 @@
                 <a:solidFill>
                   <a:srgbClr val="8A9099"/>
                 </a:solidFill>
-                <a:latin typeface="微软雅黑" pitchFamily="34" charset="0"/>
-                <a:ea typeface="微软雅黑" pitchFamily="34" charset="-122"/>
-                <a:cs typeface="微软雅黑" pitchFamily="34" charset="-120"/>
+                <a:latin typeface="微软雅黑" panose="020B0503020204020204" pitchFamily="34" charset="-122"/>
+                <a:ea typeface="微软雅黑" panose="020B0503020204020204" pitchFamily="34" charset="-122"/>
+                <a:cs typeface="微软雅黑" panose="020B0503020204020204" pitchFamily="34" charset="-120"/>
               </a:rPr>
               <a:t>先盖住右边两列，只看需求自己选，再对答案；这类'给场景选存储'是常考的判断点</a:t>
             </a:r>
@@ -3706,7 +3587,7 @@
 
 <file path=ppt/slides/slide11.xml><?xml version="1.0" encoding="utf-8"?>
 <p:sld xmlns:a="http://schemas.openxmlformats.org/drawingml/2006/main" xmlns:r="http://schemas.openxmlformats.org/officeDocument/2006/relationships" xmlns:p="http://schemas.openxmlformats.org/presentationml/2006/main">
-  <p:cSld name="Slide 11">
+  <p:cSld>
     <p:bg>
       <p:bgPr>
         <a:blipFill dpi="0" rotWithShape="1">
@@ -3750,13 +3631,12 @@
             <a:avLst/>
           </a:prstGeom>
           <a:noFill/>
-          <a:ln/>
         </p:spPr>
         <p:txBody>
           <a:bodyPr wrap="square" rtlCol="0" anchor="ctr"/>
           <a:lstStyle/>
           <a:p>
-            <a:pPr algn="r" indent="0" marL="0">
+            <a:pPr marL="0" indent="0" algn="r">
               <a:buNone/>
             </a:pPr>
             <a:r>
@@ -3764,9 +3644,9 @@
                 <a:solidFill>
                   <a:srgbClr val="8A9099"/>
                 </a:solidFill>
-                <a:latin typeface="微软雅黑" pitchFamily="34" charset="0"/>
-                <a:ea typeface="微软雅黑" pitchFamily="34" charset="-122"/>
-                <a:cs typeface="微软雅黑" pitchFamily="34" charset="-120"/>
+                <a:latin typeface="微软雅黑" panose="020B0503020204020204" pitchFamily="34" charset="-122"/>
+                <a:ea typeface="微软雅黑" panose="020B0503020204020204" pitchFamily="34" charset="-122"/>
+                <a:cs typeface="微软雅黑" panose="020B0503020204020204" pitchFamily="34" charset="-120"/>
               </a:rPr>
               <a:t>11 / 14</a:t>
             </a:r>
@@ -3789,13 +3669,12 @@
             <a:avLst/>
           </a:prstGeom>
           <a:noFill/>
-          <a:ln/>
         </p:spPr>
         <p:txBody>
           <a:bodyPr wrap="square" rtlCol="0" anchor="ctr"/>
           <a:lstStyle/>
           <a:p>
-            <a:pPr algn="l" indent="0" marL="0">
+            <a:pPr marL="0" indent="0" algn="l">
               <a:buNone/>
             </a:pPr>
             <a:r>
@@ -3803,9 +3682,9 @@
                 <a:solidFill>
                   <a:srgbClr val="1F4E9C"/>
                 </a:solidFill>
-                <a:latin typeface="微软雅黑" pitchFamily="34" charset="0"/>
-                <a:ea typeface="微软雅黑" pitchFamily="34" charset="-122"/>
-                <a:cs typeface="微软雅黑" pitchFamily="34" charset="-120"/>
+                <a:latin typeface="微软雅黑" panose="020B0503020204020204" pitchFamily="34" charset="-122"/>
+                <a:ea typeface="微软雅黑" panose="020B0503020204020204" pitchFamily="34" charset="-122"/>
+                <a:cs typeface="微软雅黑" panose="020B0503020204020204" pitchFamily="34" charset="-120"/>
               </a:rPr>
               <a:t>本节小结</a:t>
             </a:r>
@@ -3828,13 +3707,12 @@
             <a:avLst/>
           </a:prstGeom>
           <a:noFill/>
-          <a:ln/>
         </p:spPr>
         <p:txBody>
           <a:bodyPr wrap="square" rtlCol="0" anchor="ctr"/>
           <a:lstStyle/>
           <a:p>
-            <a:pPr algn="l" indent="0" marL="0">
+            <a:pPr marL="0" indent="0" algn="l">
               <a:buNone/>
             </a:pPr>
             <a:r>
@@ -3842,9 +3720,9 @@
                 <a:solidFill>
                   <a:srgbClr val="1F2329"/>
                 </a:solidFill>
-                <a:latin typeface="微软雅黑" pitchFamily="34" charset="0"/>
-                <a:ea typeface="微软雅黑" pitchFamily="34" charset="-122"/>
-                <a:cs typeface="微软雅黑" pitchFamily="34" charset="-120"/>
+                <a:latin typeface="微软雅黑" panose="020B0503020204020204" pitchFamily="34" charset="-122"/>
+                <a:ea typeface="微软雅黑" panose="020B0503020204020204" pitchFamily="34" charset="-122"/>
+                <a:cs typeface="微软雅黑" panose="020B0503020204020204" pitchFamily="34" charset="-120"/>
               </a:rPr>
               <a:t>小结</a:t>
             </a:r>
@@ -3867,13 +3745,12 @@
             <a:avLst/>
           </a:prstGeom>
           <a:noFill/>
-          <a:ln/>
         </p:spPr>
         <p:txBody>
           <a:bodyPr wrap="square" rtlCol="0" anchor="t"/>
           <a:lstStyle/>
           <a:p>
-            <a:pPr algn="l" indent="0" marL="0">
+            <a:pPr marL="0" indent="0" algn="l">
               <a:lnSpc>
                 <a:spcPct val="115000"/>
               </a:lnSpc>
@@ -3884,25 +3761,84 @@
                 <a:solidFill>
                   <a:srgbClr val="1F4E9C"/>
                 </a:solidFill>
-                <a:latin typeface="微软雅黑" pitchFamily="34" charset="0"/>
-                <a:ea typeface="微软雅黑" pitchFamily="34" charset="-122"/>
-                <a:cs typeface="微软雅黑" pitchFamily="34" charset="-120"/>
+                <a:latin typeface="微软雅黑" panose="020B0503020204020204" pitchFamily="34" charset="-122"/>
+                <a:ea typeface="微软雅黑" panose="020B0503020204020204" pitchFamily="34" charset="-122"/>
+                <a:cs typeface="微软雅黑" panose="020B0503020204020204" pitchFamily="34" charset="-120"/>
               </a:rPr>
               <a:t>•  </a:t>
             </a:r>
-            <a:pPr algn="l" indent="0" marL="0">
+            <a:r>
+              <a:rPr lang="en-US" sz="1800" dirty="0">
+                <a:solidFill>
+                  <a:srgbClr val="000000"/>
+                </a:solidFill>
+              </a:rPr>
+              <a:t>双链表：多一根 prior；插入四条赋值，</a:t>
+            </a:r>
+            <a:r>
+              <a:rPr lang="zh-CN" altLang="en-US" sz="1800" dirty="0">
+                <a:solidFill>
+                  <a:srgbClr val="000000"/>
+                </a:solidFill>
+              </a:rPr>
+              <a:t>建立先于更改</a:t>
+            </a:r>
+            <a:r>
+              <a:rPr lang="en-US" sz="1800" dirty="0">
+                <a:solidFill>
+                  <a:srgbClr val="000000"/>
+                </a:solidFill>
+              </a:rPr>
+              <a:t>；删除要改后继的 prior</a:t>
+            </a:r>
+            <a:endParaRPr lang="en-US" sz="1800" dirty="0"/>
+          </a:p>
+        </p:txBody>
+      </p:sp>
+      <p:sp>
+        <p:nvSpPr>
+          <p:cNvPr id="6" name="Text 4"/>
+          <p:cNvSpPr/>
+          <p:nvPr/>
+        </p:nvSpPr>
+        <p:spPr>
+          <a:xfrm>
+            <a:off x="896112" y="2866644"/>
+            <a:ext cx="10454335" cy="740664"/>
+          </a:xfrm>
+          <a:prstGeom prst="rect">
+            <a:avLst/>
+          </a:prstGeom>
+          <a:noFill/>
+        </p:spPr>
+        <p:txBody>
+          <a:bodyPr wrap="square" rtlCol="0" anchor="t"/>
+          <a:lstStyle/>
+          <a:p>
+            <a:pPr marL="0" indent="0" algn="l">
               <a:lnSpc>
                 <a:spcPct val="115000"/>
               </a:lnSpc>
               <a:buNone/>
             </a:pPr>
             <a:r>
+              <a:rPr lang="en-US" sz="1800" b="1" dirty="0">
+                <a:solidFill>
+                  <a:srgbClr val="1F4E9C"/>
+                </a:solidFill>
+                <a:latin typeface="微软雅黑" panose="020B0503020204020204" pitchFamily="34" charset="-122"/>
+                <a:ea typeface="微软雅黑" panose="020B0503020204020204" pitchFamily="34" charset="-122"/>
+                <a:cs typeface="微软雅黑" panose="020B0503020204020204" pitchFamily="34" charset="-120"/>
+              </a:rPr>
+              <a:t>•  </a:t>
+            </a:r>
+            <a:r>
               <a:rPr lang="en-US" sz="1800" dirty="0">
                 <a:solidFill>
                   <a:srgbClr val="000000"/>
                 </a:solidFill>
               </a:rPr>
-              <a:t>双链表：多一根 prior；插入四条赋值，③必须在④前；删除要改后继的 prior</a:t>
+              <a:t>循环单链表：尾巴接回头，判空 L-&gt;next==L、遍历终止 p!=L；循环双链表判空要两个条件</a:t>
             </a:r>
             <a:endParaRPr lang="en-US" sz="1800" dirty="0"/>
           </a:p>
@@ -3910,26 +3846,25 @@
       </p:sp>
       <p:sp>
         <p:nvSpPr>
-          <p:cNvPr id="6" name="Text 4"/>
-          <p:cNvSpPr/>
-          <p:nvPr/>
-        </p:nvSpPr>
-        <p:spPr>
-          <a:xfrm>
-            <a:off x="896112" y="2866644"/>
-            <a:ext cx="10454335" cy="740664"/>
+          <p:cNvPr id="7" name="Text 5"/>
+          <p:cNvSpPr/>
+          <p:nvPr/>
+        </p:nvSpPr>
+        <p:spPr>
+          <a:xfrm>
+            <a:off x="896112" y="3680460"/>
+            <a:ext cx="10454335" cy="397764"/>
           </a:xfrm>
           <a:prstGeom prst="rect">
             <a:avLst/>
           </a:prstGeom>
           <a:noFill/>
-          <a:ln/>
         </p:spPr>
         <p:txBody>
           <a:bodyPr wrap="square" rtlCol="0" anchor="t"/>
           <a:lstStyle/>
           <a:p>
-            <a:pPr algn="l" indent="0" marL="0">
+            <a:pPr marL="0" indent="0" algn="l">
               <a:lnSpc>
                 <a:spcPct val="115000"/>
               </a:lnSpc>
@@ -3940,25 +3875,68 @@
                 <a:solidFill>
                   <a:srgbClr val="1F4E9C"/>
                 </a:solidFill>
-                <a:latin typeface="微软雅黑" pitchFamily="34" charset="0"/>
-                <a:ea typeface="微软雅黑" pitchFamily="34" charset="-122"/>
-                <a:cs typeface="微软雅黑" pitchFamily="34" charset="-120"/>
+                <a:latin typeface="微软雅黑" panose="020B0503020204020204" pitchFamily="34" charset="-122"/>
+                <a:ea typeface="微软雅黑" panose="020B0503020204020204" pitchFamily="34" charset="-122"/>
+                <a:cs typeface="微软雅黑" panose="020B0503020204020204" pitchFamily="34" charset="-120"/>
               </a:rPr>
               <a:t>•  </a:t>
             </a:r>
-            <a:pPr algn="l" indent="0" marL="0">
+            <a:r>
+              <a:rPr lang="en-US" sz="1800" dirty="0">
+                <a:solidFill>
+                  <a:srgbClr val="000000"/>
+                </a:solidFill>
+              </a:rPr>
+              <a:t>静态链表：数组加游标，next 存下标不存地址，插删只改游标</a:t>
+            </a:r>
+            <a:endParaRPr lang="en-US" sz="1800" dirty="0"/>
+          </a:p>
+        </p:txBody>
+      </p:sp>
+      <p:sp>
+        <p:nvSpPr>
+          <p:cNvPr id="8" name="Text 6"/>
+          <p:cNvSpPr/>
+          <p:nvPr/>
+        </p:nvSpPr>
+        <p:spPr>
+          <a:xfrm>
+            <a:off x="896112" y="4151376"/>
+            <a:ext cx="10454335" cy="397764"/>
+          </a:xfrm>
+          <a:prstGeom prst="rect">
+            <a:avLst/>
+          </a:prstGeom>
+          <a:noFill/>
+        </p:spPr>
+        <p:txBody>
+          <a:bodyPr wrap="square" rtlCol="0" anchor="t"/>
+          <a:lstStyle/>
+          <a:p>
+            <a:pPr marL="0" indent="0" algn="l">
               <a:lnSpc>
                 <a:spcPct val="115000"/>
               </a:lnSpc>
               <a:buNone/>
             </a:pPr>
             <a:r>
+              <a:rPr lang="en-US" sz="1800" b="1" dirty="0">
+                <a:solidFill>
+                  <a:srgbClr val="1F4E9C"/>
+                </a:solidFill>
+                <a:latin typeface="微软雅黑" panose="020B0503020204020204" pitchFamily="34" charset="-122"/>
+                <a:ea typeface="微软雅黑" panose="020B0503020204020204" pitchFamily="34" charset="-122"/>
+                <a:cs typeface="微软雅黑" panose="020B0503020204020204" pitchFamily="34" charset="-120"/>
+              </a:rPr>
+              <a:t>•  </a:t>
+            </a:r>
+            <a:r>
               <a:rPr lang="en-US" sz="1800" dirty="0">
                 <a:solidFill>
                   <a:srgbClr val="000000"/>
                 </a:solidFill>
               </a:rPr>
-              <a:t>循环单链表：尾巴接回头，判空 L-&gt;next==L、遍历终止 p!=L；循环双链表判空要两个条件</a:t>
+              <a:t>选哪种看需求：找前驱用双链表，循环报数用循环链表，题目要数组用静态链表</a:t>
             </a:r>
             <a:endParaRPr lang="en-US" sz="1800" dirty="0"/>
           </a:p>
@@ -3966,148 +3944,35 @@
       </p:sp>
       <p:sp>
         <p:nvSpPr>
-          <p:cNvPr id="7" name="Text 5"/>
-          <p:cNvSpPr/>
-          <p:nvPr/>
-        </p:nvSpPr>
-        <p:spPr>
-          <a:xfrm>
-            <a:off x="896112" y="3680460"/>
-            <a:ext cx="10454335" cy="397764"/>
+          <p:cNvPr id="9" name="Text 7"/>
+          <p:cNvSpPr/>
+          <p:nvPr/>
+        </p:nvSpPr>
+        <p:spPr>
+          <a:xfrm>
+            <a:off x="822960" y="4713732"/>
+            <a:ext cx="10545775" cy="358902"/>
           </a:xfrm>
           <a:prstGeom prst="rect">
             <a:avLst/>
           </a:prstGeom>
           <a:noFill/>
-          <a:ln/>
         </p:spPr>
         <p:txBody>
           <a:bodyPr wrap="square" rtlCol="0" anchor="t"/>
           <a:lstStyle/>
           <a:p>
-            <a:pPr algn="l" indent="0" marL="0">
-              <a:lnSpc>
-                <a:spcPct val="115000"/>
-              </a:lnSpc>
+            <a:pPr marL="0" indent="0" algn="l">
               <a:buNone/>
             </a:pPr>
             <a:r>
-              <a:rPr lang="en-US" sz="1800" b="1" dirty="0">
-                <a:solidFill>
-                  <a:srgbClr val="1F4E9C"/>
-                </a:solidFill>
-                <a:latin typeface="微软雅黑" pitchFamily="34" charset="0"/>
-                <a:ea typeface="微软雅黑" pitchFamily="34" charset="-122"/>
-                <a:cs typeface="微软雅黑" pitchFamily="34" charset="-120"/>
-              </a:rPr>
-              <a:t>•  </a:t>
-            </a:r>
-            <a:pPr algn="l" indent="0" marL="0">
-              <a:lnSpc>
-                <a:spcPct val="115000"/>
-              </a:lnSpc>
-              <a:buNone/>
-            </a:pPr>
-            <a:r>
-              <a:rPr lang="en-US" sz="1800" dirty="0">
-                <a:solidFill>
-                  <a:srgbClr val="000000"/>
-                </a:solidFill>
-              </a:rPr>
-              <a:t>静态链表：数组加游标，next 存下标不存地址，插删只改游标</a:t>
-            </a:r>
-            <a:endParaRPr lang="en-US" sz="1800" dirty="0"/>
-          </a:p>
-        </p:txBody>
-      </p:sp>
-      <p:sp>
-        <p:nvSpPr>
-          <p:cNvPr id="8" name="Text 6"/>
-          <p:cNvSpPr/>
-          <p:nvPr/>
-        </p:nvSpPr>
-        <p:spPr>
-          <a:xfrm>
-            <a:off x="896112" y="4151376"/>
-            <a:ext cx="10454335" cy="397764"/>
-          </a:xfrm>
-          <a:prstGeom prst="rect">
-            <a:avLst/>
-          </a:prstGeom>
-          <a:noFill/>
-          <a:ln/>
-        </p:spPr>
-        <p:txBody>
-          <a:bodyPr wrap="square" rtlCol="0" anchor="t"/>
-          <a:lstStyle/>
-          <a:p>
-            <a:pPr algn="l" indent="0" marL="0">
-              <a:lnSpc>
-                <a:spcPct val="115000"/>
-              </a:lnSpc>
-              <a:buNone/>
-            </a:pPr>
-            <a:r>
-              <a:rPr lang="en-US" sz="1800" b="1" dirty="0">
-                <a:solidFill>
-                  <a:srgbClr val="1F4E9C"/>
-                </a:solidFill>
-                <a:latin typeface="微软雅黑" pitchFamily="34" charset="0"/>
-                <a:ea typeface="微软雅黑" pitchFamily="34" charset="-122"/>
-                <a:cs typeface="微软雅黑" pitchFamily="34" charset="-120"/>
-              </a:rPr>
-              <a:t>•  </a:t>
-            </a:r>
-            <a:pPr algn="l" indent="0" marL="0">
-              <a:lnSpc>
-                <a:spcPct val="115000"/>
-              </a:lnSpc>
-              <a:buNone/>
-            </a:pPr>
-            <a:r>
-              <a:rPr lang="en-US" sz="1800" dirty="0">
-                <a:solidFill>
-                  <a:srgbClr val="000000"/>
-                </a:solidFill>
-              </a:rPr>
-              <a:t>选哪种看需求：找前驱用双链表，循环报数用循环链表，题目要数组用静态链表</a:t>
-            </a:r>
-            <a:endParaRPr lang="en-US" sz="1800" dirty="0"/>
-          </a:p>
-        </p:txBody>
-      </p:sp>
-      <p:sp>
-        <p:nvSpPr>
-          <p:cNvPr id="9" name="Text 7"/>
-          <p:cNvSpPr/>
-          <p:nvPr/>
-        </p:nvSpPr>
-        <p:spPr>
-          <a:xfrm>
-            <a:off x="822960" y="4713732"/>
-            <a:ext cx="10545775" cy="358902"/>
-          </a:xfrm>
-          <a:prstGeom prst="rect">
-            <a:avLst/>
-          </a:prstGeom>
-          <a:noFill/>
-          <a:ln/>
-        </p:spPr>
-        <p:txBody>
-          <a:bodyPr wrap="square" rtlCol="0" anchor="t"/>
-          <a:lstStyle/>
-          <a:p>
-            <a:pPr algn="l" indent="0" marL="0">
-              <a:buNone/>
-            </a:pPr>
-            <a:r>
               <a:rPr lang="en-US" sz="1500" dirty="0">
                 <a:solidFill>
                   <a:srgbClr val="8A9099"/>
                 </a:solidFill>
-                <a:latin typeface="微软雅黑" pitchFamily="34" charset="0"/>
-                <a:ea typeface="微软雅黑" pitchFamily="34" charset="-122"/>
-                <a:cs typeface="微软雅黑" pitchFamily="34" charset="-120"/>
+                <a:latin typeface="微软雅黑" panose="020B0503020204020204" pitchFamily="34" charset="-122"/>
+                <a:ea typeface="微软雅黑" panose="020B0503020204020204" pitchFamily="34" charset="-122"/>
+                <a:cs typeface="微软雅黑" panose="020B0503020204020204" pitchFamily="34" charset="-120"/>
               </a:rPr>
               <a:t>2026 年约瑟夫环用循环单链表模拟，2020 年真题考双向循环链表的指针次序，都出自这一节</a:t>
             </a:r>
@@ -4125,7 +3990,7 @@
 
 <file path=ppt/slides/slide12.xml><?xml version="1.0" encoding="utf-8"?>
 <p:sld xmlns:a="http://schemas.openxmlformats.org/drawingml/2006/main" xmlns:r="http://schemas.openxmlformats.org/officeDocument/2006/relationships" xmlns:p="http://schemas.openxmlformats.org/presentationml/2006/main">
-  <p:cSld name="Slide 12">
+  <p:cSld>
     <p:bg>
       <p:bgPr>
         <a:blipFill dpi="0" rotWithShape="1">
@@ -4169,13 +4034,12 @@
             <a:avLst/>
           </a:prstGeom>
           <a:noFill/>
-          <a:ln/>
         </p:spPr>
         <p:txBody>
           <a:bodyPr wrap="square" rtlCol="0" anchor="ctr"/>
           <a:lstStyle/>
           <a:p>
-            <a:pPr algn="r" indent="0" marL="0">
+            <a:pPr marL="0" indent="0" algn="r">
               <a:buNone/>
             </a:pPr>
             <a:r>
@@ -4183,9 +4047,9 @@
                 <a:solidFill>
                   <a:srgbClr val="8A9099"/>
                 </a:solidFill>
-                <a:latin typeface="微软雅黑" pitchFamily="34" charset="0"/>
-                <a:ea typeface="微软雅黑" pitchFamily="34" charset="-122"/>
-                <a:cs typeface="微软雅黑" pitchFamily="34" charset="-120"/>
+                <a:latin typeface="微软雅黑" panose="020B0503020204020204" pitchFamily="34" charset="-122"/>
+                <a:ea typeface="微软雅黑" panose="020B0503020204020204" pitchFamily="34" charset="-122"/>
+                <a:cs typeface="微软雅黑" panose="020B0503020204020204" pitchFamily="34" charset="-120"/>
               </a:rPr>
               <a:t>12 / 14</a:t>
             </a:r>
@@ -4208,13 +4072,12 @@
             <a:avLst/>
           </a:prstGeom>
           <a:noFill/>
-          <a:ln/>
         </p:spPr>
         <p:txBody>
           <a:bodyPr wrap="square" rtlCol="0" anchor="ctr"/>
           <a:lstStyle/>
           <a:p>
-            <a:pPr algn="l" indent="0" marL="0">
+            <a:pPr marL="0" indent="0" algn="l">
               <a:buNone/>
             </a:pPr>
             <a:r>
@@ -4222,9 +4085,9 @@
                 <a:solidFill>
                   <a:srgbClr val="1F4E9C"/>
                 </a:solidFill>
-                <a:latin typeface="微软雅黑" pitchFamily="34" charset="0"/>
-                <a:ea typeface="微软雅黑" pitchFamily="34" charset="-122"/>
-                <a:cs typeface="微软雅黑" pitchFamily="34" charset="-120"/>
+                <a:latin typeface="微软雅黑" panose="020B0503020204020204" pitchFamily="34" charset="-122"/>
+                <a:ea typeface="微软雅黑" panose="020B0503020204020204" pitchFamily="34" charset="-122"/>
+                <a:cs typeface="微软雅黑" panose="020B0503020204020204" pitchFamily="34" charset="-120"/>
               </a:rPr>
               <a:t>课后任务</a:t>
             </a:r>
@@ -4247,13 +4110,12 @@
             <a:avLst/>
           </a:prstGeom>
           <a:noFill/>
-          <a:ln/>
         </p:spPr>
         <p:txBody>
           <a:bodyPr wrap="square" rtlCol="0" anchor="ctr"/>
           <a:lstStyle/>
           <a:p>
-            <a:pPr algn="l" indent="0" marL="0">
+            <a:pPr marL="0" indent="0" algn="l">
               <a:buNone/>
             </a:pPr>
             <a:r>
@@ -4261,9 +4123,9 @@
                 <a:solidFill>
                   <a:srgbClr val="1F2329"/>
                 </a:solidFill>
-                <a:latin typeface="微软雅黑" pitchFamily="34" charset="0"/>
-                <a:ea typeface="微软雅黑" pitchFamily="34" charset="-122"/>
-                <a:cs typeface="微软雅黑" pitchFamily="34" charset="-120"/>
+                <a:latin typeface="微软雅黑" panose="020B0503020204020204" pitchFamily="34" charset="-122"/>
+                <a:ea typeface="微软雅黑" panose="020B0503020204020204" pitchFamily="34" charset="-122"/>
+                <a:cs typeface="微软雅黑" panose="020B0503020204020204" pitchFamily="34" charset="-120"/>
               </a:rPr>
               <a:t>1道跟练 ＋ 1道模仿</a:t>
             </a:r>
@@ -4286,13 +4148,12 @@
             <a:avLst/>
           </a:prstGeom>
           <a:noFill/>
-          <a:ln/>
         </p:spPr>
         <p:txBody>
           <a:bodyPr wrap="square" rtlCol="0" anchor="t"/>
           <a:lstStyle/>
           <a:p>
-            <a:pPr algn="l" indent="0" marL="0">
+            <a:pPr marL="0" indent="0" algn="l">
               <a:lnSpc>
                 <a:spcPct val="115000"/>
               </a:lnSpc>
@@ -4303,13 +4164,53 @@
                 <a:solidFill>
                   <a:srgbClr val="1F4E9C"/>
                 </a:solidFill>
-                <a:latin typeface="微软雅黑" pitchFamily="34" charset="0"/>
-                <a:ea typeface="微软雅黑" pitchFamily="34" charset="-122"/>
-                <a:cs typeface="微软雅黑" pitchFamily="34" charset="-120"/>
+                <a:latin typeface="微软雅黑" panose="020B0503020204020204" pitchFamily="34" charset="-122"/>
+                <a:ea typeface="微软雅黑" panose="020B0503020204020204" pitchFamily="34" charset="-122"/>
+                <a:cs typeface="微软雅黑" panose="020B0503020204020204" pitchFamily="34" charset="-120"/>
               </a:rPr>
               <a:t>•  </a:t>
             </a:r>
-            <a:pPr algn="l" indent="0" marL="0">
+            <a:r>
+              <a:rPr lang="en-US" sz="1800" b="1" dirty="0">
+                <a:solidFill>
+                  <a:srgbClr val="000000"/>
+                </a:solidFill>
+              </a:rPr>
+              <a:t>跟练题</a:t>
+            </a:r>
+            <a:r>
+              <a:rPr lang="en-US" sz="1800" dirty="0">
+                <a:solidFill>
+                  <a:srgbClr val="000000"/>
+                </a:solidFill>
+              </a:rPr>
+              <a:t>：默写 DNode 定义、双链表的插入与删除，并在插入代码旁标出四条赋值的次序约束</a:t>
+            </a:r>
+            <a:endParaRPr lang="en-US" sz="1800" dirty="0"/>
+          </a:p>
+        </p:txBody>
+      </p:sp>
+      <p:sp>
+        <p:nvSpPr>
+          <p:cNvPr id="6" name="Text 4"/>
+          <p:cNvSpPr/>
+          <p:nvPr/>
+        </p:nvSpPr>
+        <p:spPr>
+          <a:xfrm>
+            <a:off x="896112" y="3209544"/>
+            <a:ext cx="10454335" cy="740664"/>
+          </a:xfrm>
+          <a:prstGeom prst="rect">
+            <a:avLst/>
+          </a:prstGeom>
+          <a:noFill/>
+        </p:spPr>
+        <p:txBody>
+          <a:bodyPr wrap="square" rtlCol="0" anchor="t"/>
+          <a:lstStyle/>
+          <a:p>
+            <a:pPr marL="0" indent="0" algn="l">
               <a:lnSpc>
                 <a:spcPct val="115000"/>
               </a:lnSpc>
@@ -4318,131 +4219,65 @@
             <a:r>
               <a:rPr lang="en-US" sz="1800" b="1" dirty="0">
                 <a:solidFill>
+                  <a:srgbClr val="1F4E9C"/>
+                </a:solidFill>
+                <a:latin typeface="微软雅黑" panose="020B0503020204020204" pitchFamily="34" charset="-122"/>
+                <a:ea typeface="微软雅黑" panose="020B0503020204020204" pitchFamily="34" charset="-122"/>
+                <a:cs typeface="微软雅黑" panose="020B0503020204020204" pitchFamily="34" charset="-120"/>
+              </a:rPr>
+              <a:t>•  </a:t>
+            </a:r>
+            <a:r>
+              <a:rPr lang="en-US" sz="1800" b="1" dirty="0">
+                <a:solidFill>
                   <a:srgbClr val="000000"/>
                 </a:solidFill>
               </a:rPr>
-              <a:t>跟练题</a:t>
-            </a:r>
-            <a:pPr algn="l" indent="0" marL="0">
-              <a:lnSpc>
-                <a:spcPct val="115000"/>
-              </a:lnSpc>
+              <a:t>模仿题</a:t>
+            </a:r>
+            <a:r>
+              <a:rPr lang="en-US" sz="1800" dirty="0">
+                <a:solidFill>
+                  <a:srgbClr val="000000"/>
+                </a:solidFill>
+              </a:rPr>
+              <a:t>：在双链表结点 p 之前插入新结点 s，写出四条赋值语句，并说明哪两条次序不能换、为什么（题集勾画 2答8 同类）</a:t>
+            </a:r>
+            <a:endParaRPr lang="en-US" sz="1800" dirty="0"/>
+          </a:p>
+        </p:txBody>
+      </p:sp>
+      <p:sp>
+        <p:nvSpPr>
+          <p:cNvPr id="7" name="Text 5"/>
+          <p:cNvSpPr/>
+          <p:nvPr/>
+        </p:nvSpPr>
+        <p:spPr>
+          <a:xfrm>
+            <a:off x="822960" y="4114800"/>
+            <a:ext cx="10545775" cy="358902"/>
+          </a:xfrm>
+          <a:prstGeom prst="rect">
+            <a:avLst/>
+          </a:prstGeom>
+          <a:noFill/>
+        </p:spPr>
+        <p:txBody>
+          <a:bodyPr wrap="square" rtlCol="0" anchor="t"/>
+          <a:lstStyle/>
+          <a:p>
+            <a:pPr marL="0" indent="0" algn="l">
               <a:buNone/>
             </a:pPr>
             <a:r>
-              <a:rPr lang="en-US" sz="1800" dirty="0">
-                <a:solidFill>
-                  <a:srgbClr val="000000"/>
-                </a:solidFill>
-              </a:rPr>
-              <a:t>：默写 DNode 定义、双链表的插入与删除，并在插入代码旁标出四条赋值的次序约束</a:t>
-            </a:r>
-            <a:endParaRPr lang="en-US" sz="1800" dirty="0"/>
-          </a:p>
-        </p:txBody>
-      </p:sp>
-      <p:sp>
-        <p:nvSpPr>
-          <p:cNvPr id="6" name="Text 4"/>
-          <p:cNvSpPr/>
-          <p:nvPr/>
-        </p:nvSpPr>
-        <p:spPr>
-          <a:xfrm>
-            <a:off x="896112" y="3209544"/>
-            <a:ext cx="10454335" cy="740664"/>
-          </a:xfrm>
-          <a:prstGeom prst="rect">
-            <a:avLst/>
-          </a:prstGeom>
-          <a:noFill/>
-          <a:ln/>
-        </p:spPr>
-        <p:txBody>
-          <a:bodyPr wrap="square" rtlCol="0" anchor="t"/>
-          <a:lstStyle/>
-          <a:p>
-            <a:pPr algn="l" indent="0" marL="0">
-              <a:lnSpc>
-                <a:spcPct val="115000"/>
-              </a:lnSpc>
-              <a:buNone/>
-            </a:pPr>
-            <a:r>
-              <a:rPr lang="en-US" sz="1800" b="1" dirty="0">
-                <a:solidFill>
-                  <a:srgbClr val="1F4E9C"/>
-                </a:solidFill>
-                <a:latin typeface="微软雅黑" pitchFamily="34" charset="0"/>
-                <a:ea typeface="微软雅黑" pitchFamily="34" charset="-122"/>
-                <a:cs typeface="微软雅黑" pitchFamily="34" charset="-120"/>
-              </a:rPr>
-              <a:t>•  </a:t>
-            </a:r>
-            <a:pPr algn="l" indent="0" marL="0">
-              <a:lnSpc>
-                <a:spcPct val="115000"/>
-              </a:lnSpc>
-              <a:buNone/>
-            </a:pPr>
-            <a:r>
-              <a:rPr lang="en-US" sz="1800" b="1" dirty="0">
-                <a:solidFill>
-                  <a:srgbClr val="000000"/>
-                </a:solidFill>
-              </a:rPr>
-              <a:t>模仿题</a:t>
-            </a:r>
-            <a:pPr algn="l" indent="0" marL="0">
-              <a:lnSpc>
-                <a:spcPct val="115000"/>
-              </a:lnSpc>
-              <a:buNone/>
-            </a:pPr>
-            <a:r>
-              <a:rPr lang="en-US" sz="1800" dirty="0">
-                <a:solidFill>
-                  <a:srgbClr val="000000"/>
-                </a:solidFill>
-              </a:rPr>
-              <a:t>：在双链表结点 p 之前插入新结点 s，写出四条赋值语句，并说明哪两条次序不能换、为什么（题集勾画 2答8 同类）</a:t>
-            </a:r>
-            <a:endParaRPr lang="en-US" sz="1800" dirty="0"/>
-          </a:p>
-        </p:txBody>
-      </p:sp>
-      <p:sp>
-        <p:nvSpPr>
-          <p:cNvPr id="7" name="Text 5"/>
-          <p:cNvSpPr/>
-          <p:nvPr/>
-        </p:nvSpPr>
-        <p:spPr>
-          <a:xfrm>
-            <a:off x="822960" y="4114800"/>
-            <a:ext cx="10545775" cy="358902"/>
-          </a:xfrm>
-          <a:prstGeom prst="rect">
-            <a:avLst/>
-          </a:prstGeom>
-          <a:noFill/>
-          <a:ln/>
-        </p:spPr>
-        <p:txBody>
-          <a:bodyPr wrap="square" rtlCol="0" anchor="t"/>
-          <a:lstStyle/>
-          <a:p>
-            <a:pPr algn="l" indent="0" marL="0">
-              <a:buNone/>
-            </a:pPr>
-            <a:r>
               <a:rPr lang="en-US" sz="1500" dirty="0">
                 <a:solidFill>
                   <a:srgbClr val="8A9099"/>
                 </a:solidFill>
-                <a:latin typeface="微软雅黑" pitchFamily="34" charset="0"/>
-                <a:ea typeface="微软雅黑" pitchFamily="34" charset="-122"/>
-                <a:cs typeface="微软雅黑" pitchFamily="34" charset="-120"/>
+                <a:latin typeface="微软雅黑" panose="020B0503020204020204" pitchFamily="34" charset="-122"/>
+                <a:ea typeface="微软雅黑" panose="020B0503020204020204" pitchFamily="34" charset="-122"/>
+                <a:cs typeface="微软雅黑" panose="020B0503020204020204" pitchFamily="34" charset="-120"/>
               </a:rPr>
               <a:t>默写要求：合上资料能写出双链表的插入删除、说清四条赋值次序；参考答案在本PPT最后两页，课后自行对照</a:t>
             </a:r>
@@ -4460,7 +4295,7 @@
 
 <file path=ppt/slides/slide13.xml><?xml version="1.0" encoding="utf-8"?>
 <p:sld xmlns:a="http://schemas.openxmlformats.org/drawingml/2006/main" xmlns:r="http://schemas.openxmlformats.org/officeDocument/2006/relationships" xmlns:p="http://schemas.openxmlformats.org/presentationml/2006/main">
-  <p:cSld name="Slide 13">
+  <p:cSld>
     <p:bg>
       <p:bgPr>
         <a:blipFill dpi="0" rotWithShape="1">
@@ -4504,13 +4339,12 @@
             <a:avLst/>
           </a:prstGeom>
           <a:noFill/>
-          <a:ln/>
         </p:spPr>
         <p:txBody>
           <a:bodyPr wrap="square" rtlCol="0" anchor="ctr"/>
           <a:lstStyle/>
           <a:p>
-            <a:pPr algn="r" indent="0" marL="0">
+            <a:pPr marL="0" indent="0" algn="r">
               <a:buNone/>
             </a:pPr>
             <a:r>
@@ -4518,9 +4352,9 @@
                 <a:solidFill>
                   <a:srgbClr val="8A9099"/>
                 </a:solidFill>
-                <a:latin typeface="微软雅黑" pitchFamily="34" charset="0"/>
-                <a:ea typeface="微软雅黑" pitchFamily="34" charset="-122"/>
-                <a:cs typeface="微软雅黑" pitchFamily="34" charset="-120"/>
+                <a:latin typeface="微软雅黑" panose="020B0503020204020204" pitchFamily="34" charset="-122"/>
+                <a:ea typeface="微软雅黑" panose="020B0503020204020204" pitchFamily="34" charset="-122"/>
+                <a:cs typeface="微软雅黑" panose="020B0503020204020204" pitchFamily="34" charset="-120"/>
               </a:rPr>
               <a:t>13 / 14</a:t>
             </a:r>
@@ -4543,13 +4377,12 @@
             <a:avLst/>
           </a:prstGeom>
           <a:noFill/>
-          <a:ln/>
         </p:spPr>
         <p:txBody>
           <a:bodyPr wrap="square" rtlCol="0" anchor="ctr"/>
           <a:lstStyle/>
           <a:p>
-            <a:pPr algn="l" indent="0" marL="0">
+            <a:pPr marL="0" indent="0" algn="l">
               <a:buNone/>
             </a:pPr>
             <a:r>
@@ -4557,9 +4390,9 @@
                 <a:solidFill>
                   <a:srgbClr val="1F4E9C"/>
                 </a:solidFill>
-                <a:latin typeface="微软雅黑" pitchFamily="34" charset="0"/>
-                <a:ea typeface="微软雅黑" pitchFamily="34" charset="-122"/>
-                <a:cs typeface="微软雅黑" pitchFamily="34" charset="-120"/>
+                <a:latin typeface="微软雅黑" panose="020B0503020204020204" pitchFamily="34" charset="-122"/>
+                <a:ea typeface="微软雅黑" panose="020B0503020204020204" pitchFamily="34" charset="-122"/>
+                <a:cs typeface="微软雅黑" panose="020B0503020204020204" pitchFamily="34" charset="-120"/>
               </a:rPr>
               <a:t>参考答案 · 跟练题</a:t>
             </a:r>
@@ -4582,13 +4415,12 @@
             <a:avLst/>
           </a:prstGeom>
           <a:noFill/>
-          <a:ln/>
         </p:spPr>
         <p:txBody>
           <a:bodyPr wrap="square" rtlCol="0" anchor="ctr"/>
           <a:lstStyle/>
           <a:p>
-            <a:pPr algn="l" indent="0" marL="0">
+            <a:pPr marL="0" indent="0" algn="l">
               <a:buNone/>
             </a:pPr>
             <a:r>
@@ -4596,9 +4428,9 @@
                 <a:solidFill>
                   <a:srgbClr val="1F2329"/>
                 </a:solidFill>
-                <a:latin typeface="微软雅黑" pitchFamily="34" charset="0"/>
-                <a:ea typeface="微软雅黑" pitchFamily="34" charset="-122"/>
-                <a:cs typeface="微软雅黑" pitchFamily="34" charset="-120"/>
+                <a:latin typeface="微软雅黑" panose="020B0503020204020204" pitchFamily="34" charset="-122"/>
+                <a:ea typeface="微软雅黑" panose="020B0503020204020204" pitchFamily="34" charset="-122"/>
+                <a:cs typeface="微软雅黑" panose="020B0503020204020204" pitchFamily="34" charset="-120"/>
               </a:rPr>
               <a:t>跟练题参考答案（自行对照）</a:t>
             </a:r>
@@ -4623,7 +4455,6 @@
           <a:solidFill>
             <a:srgbClr val="F7F9FC"/>
           </a:solidFill>
-          <a:ln/>
         </p:spPr>
       </p:sp>
       <p:sp>
@@ -4643,7 +4474,6 @@
           <a:solidFill>
             <a:srgbClr val="1F4E9C"/>
           </a:solidFill>
-          <a:ln/>
         </p:spPr>
       </p:sp>
       <p:sp>
@@ -4661,13 +4491,12 @@
             <a:avLst/>
           </a:prstGeom>
           <a:noFill/>
-          <a:ln/>
         </p:spPr>
         <p:txBody>
           <a:bodyPr wrap="square" rtlCol="0" anchor="t"/>
           <a:lstStyle/>
           <a:p>
-            <a:pPr algn="l" indent="0" marL="0">
+            <a:pPr marL="0" indent="0" algn="l">
               <a:lnSpc>
                 <a:spcPct val="125000"/>
               </a:lnSpc>
@@ -4678,58 +4507,52 @@
                 <a:solidFill>
                   <a:srgbClr val="1F2329"/>
                 </a:solidFill>
-                <a:latin typeface="Consolas" pitchFamily="34" charset="0"/>
-                <a:ea typeface="Consolas" pitchFamily="34" charset="-122"/>
-                <a:cs typeface="Consolas" pitchFamily="34" charset="-120"/>
+                <a:latin typeface="Consolas" panose="020B0609020204030204" pitchFamily="34" charset="0"/>
+                <a:ea typeface="Consolas" panose="020B0609020204030204" pitchFamily="34" charset="-122"/>
+                <a:cs typeface="Consolas" panose="020B0609020204030204" pitchFamily="34" charset="-120"/>
               </a:rPr>
               <a:t>typedef struct DNode{ int data; struct DNode *prior, *next; }DNode, *DLinkList;
 // 插入四条赋值的次序约束：
 s-&gt;next = p-&gt;next;                       // ①
-s-&gt;prior = p;                            // ②
-if(p-&gt;next != NULL) p-&gt;next-&gt;prior = s;  // ③ 必须在④前
+s-&gt;prior = p;                            // ② </a:t>
+            </a:r>
+            <a:r>
+              <a:rPr lang="en-US" sz="1400" dirty="0">
+                <a:solidFill>
+                  <a:srgbClr val="1F2329"/>
+                </a:solidFill>
+                <a:latin typeface="Consolas" panose="020B0609020204030204" pitchFamily="34" charset="0"/>
+                <a:ea typeface="Consolas" panose="020B0609020204030204" pitchFamily="34" charset="-122"/>
+                <a:cs typeface="Consolas" panose="020B0609020204030204" pitchFamily="34" charset="-120"/>
+                <a:sym typeface="+mn-ea"/>
+              </a:rPr>
+              <a:t>必须在④前</a:t>
+            </a:r>
+            <a:br>
+              <a:rPr lang="en-US" sz="1400" dirty="0">
+                <a:solidFill>
+                  <a:srgbClr val="1F2329"/>
+                </a:solidFill>
+                <a:latin typeface="Consolas" panose="020B0609020204030204" pitchFamily="34" charset="0"/>
+                <a:ea typeface="Consolas" panose="020B0609020204030204" pitchFamily="34" charset="-122"/>
+                <a:cs typeface="Consolas" panose="020B0609020204030204" pitchFamily="34" charset="-120"/>
+                <a:sym typeface="+mn-ea"/>
+              </a:rPr>
+            </a:br>
+            <a:r>
+              <a:rPr lang="en-US" sz="1400" dirty="0">
+                <a:solidFill>
+                  <a:srgbClr val="1F2329"/>
+                </a:solidFill>
+                <a:latin typeface="Consolas" panose="020B0609020204030204" pitchFamily="34" charset="0"/>
+                <a:ea typeface="Consolas" panose="020B0609020204030204" pitchFamily="34" charset="-122"/>
+                <a:cs typeface="Consolas" panose="020B0609020204030204" pitchFamily="34" charset="-120"/>
+              </a:rPr>
+              <a:t>if(p-&gt;next != NULL) p-&gt;next-&gt;prior = s;  // ③ 
 p-&gt;next = s;                             // ④
 </a:t>
             </a:r>
             <a:endParaRPr lang="en-US" sz="1400" dirty="0"/>
-          </a:p>
-        </p:txBody>
-      </p:sp>
-      <p:sp>
-        <p:nvSpPr>
-          <p:cNvPr id="8" name="Text 6"/>
-          <p:cNvSpPr/>
-          <p:nvPr/>
-        </p:nvSpPr>
-        <p:spPr>
-          <a:xfrm>
-            <a:off x="822960" y="4581144"/>
-            <a:ext cx="10545775" cy="644652"/>
-          </a:xfrm>
-          <a:prstGeom prst="rect">
-            <a:avLst/>
-          </a:prstGeom>
-          <a:noFill/>
-          <a:ln/>
-        </p:spPr>
-        <p:txBody>
-          <a:bodyPr wrap="square" rtlCol="0" anchor="t"/>
-          <a:lstStyle/>
-          <a:p>
-            <a:pPr algn="l" indent="0" marL="0">
-              <a:buNone/>
-            </a:pPr>
-            <a:r>
-              <a:rPr lang="en-US" sz="1500" dirty="0">
-                <a:solidFill>
-                  <a:srgbClr val="8A9099"/>
-                </a:solidFill>
-                <a:latin typeface="微软雅黑" pitchFamily="34" charset="0"/>
-                <a:ea typeface="微软雅黑" pitchFamily="34" charset="-122"/>
-                <a:cs typeface="微软雅黑" pitchFamily="34" charset="-120"/>
-              </a:rPr>
-              <a:t>③必须在④前：④一执行 p-&gt;next 就变成 s，③再写就改到 s 自己，原后继的 prior 丢了；删除见本节代码合集</a:t>
-            </a:r>
-            <a:endParaRPr lang="en-US" sz="1500" dirty="0"/>
           </a:p>
         </p:txBody>
       </p:sp>
@@ -4743,7 +4566,7 @@
 
 <file path=ppt/slides/slide14.xml><?xml version="1.0" encoding="utf-8"?>
 <p:sld xmlns:a="http://schemas.openxmlformats.org/drawingml/2006/main" xmlns:r="http://schemas.openxmlformats.org/officeDocument/2006/relationships" xmlns:p="http://schemas.openxmlformats.org/presentationml/2006/main">
-  <p:cSld name="Slide 14">
+  <p:cSld>
     <p:bg>
       <p:bgPr>
         <a:blipFill dpi="0" rotWithShape="1">
@@ -4787,13 +4610,12 @@
             <a:avLst/>
           </a:prstGeom>
           <a:noFill/>
-          <a:ln/>
         </p:spPr>
         <p:txBody>
           <a:bodyPr wrap="square" rtlCol="0" anchor="ctr"/>
           <a:lstStyle/>
           <a:p>
-            <a:pPr algn="r" indent="0" marL="0">
+            <a:pPr marL="0" indent="0" algn="r">
               <a:buNone/>
             </a:pPr>
             <a:r>
@@ -4801,9 +4623,9 @@
                 <a:solidFill>
                   <a:srgbClr val="8A9099"/>
                 </a:solidFill>
-                <a:latin typeface="微软雅黑" pitchFamily="34" charset="0"/>
-                <a:ea typeface="微软雅黑" pitchFamily="34" charset="-122"/>
-                <a:cs typeface="微软雅黑" pitchFamily="34" charset="-120"/>
+                <a:latin typeface="微软雅黑" panose="020B0503020204020204" pitchFamily="34" charset="-122"/>
+                <a:ea typeface="微软雅黑" panose="020B0503020204020204" pitchFamily="34" charset="-122"/>
+                <a:cs typeface="微软雅黑" panose="020B0503020204020204" pitchFamily="34" charset="-120"/>
               </a:rPr>
               <a:t>14 / 14</a:t>
             </a:r>
@@ -4826,13 +4648,12 @@
             <a:avLst/>
           </a:prstGeom>
           <a:noFill/>
-          <a:ln/>
         </p:spPr>
         <p:txBody>
           <a:bodyPr wrap="square" rtlCol="0" anchor="ctr"/>
           <a:lstStyle/>
           <a:p>
-            <a:pPr algn="l" indent="0" marL="0">
+            <a:pPr marL="0" indent="0" algn="l">
               <a:buNone/>
             </a:pPr>
             <a:r>
@@ -4840,9 +4661,9 @@
                 <a:solidFill>
                   <a:srgbClr val="1F4E9C"/>
                 </a:solidFill>
-                <a:latin typeface="微软雅黑" pitchFamily="34" charset="0"/>
-                <a:ea typeface="微软雅黑" pitchFamily="34" charset="-122"/>
-                <a:cs typeface="微软雅黑" pitchFamily="34" charset="-120"/>
+                <a:latin typeface="微软雅黑" panose="020B0503020204020204" pitchFamily="34" charset="-122"/>
+                <a:ea typeface="微软雅黑" panose="020B0503020204020204" pitchFamily="34" charset="-122"/>
+                <a:cs typeface="微软雅黑" panose="020B0503020204020204" pitchFamily="34" charset="-120"/>
               </a:rPr>
               <a:t>参考答案 · 模仿题</a:t>
             </a:r>
@@ -4865,13 +4686,12 @@
             <a:avLst/>
           </a:prstGeom>
           <a:noFill/>
-          <a:ln/>
         </p:spPr>
         <p:txBody>
           <a:bodyPr wrap="square" rtlCol="0" anchor="ctr"/>
           <a:lstStyle/>
           <a:p>
-            <a:pPr algn="l" indent="0" marL="0">
+            <a:pPr marL="0" indent="0" algn="l">
               <a:buNone/>
             </a:pPr>
             <a:r>
@@ -4879,9 +4699,9 @@
                 <a:solidFill>
                   <a:srgbClr val="1F2329"/>
                 </a:solidFill>
-                <a:latin typeface="微软雅黑" pitchFamily="34" charset="0"/>
-                <a:ea typeface="微软雅黑" pitchFamily="34" charset="-122"/>
-                <a:cs typeface="微软雅黑" pitchFamily="34" charset="-120"/>
+                <a:latin typeface="微软雅黑" panose="020B0503020204020204" pitchFamily="34" charset="-122"/>
+                <a:ea typeface="微软雅黑" panose="020B0503020204020204" pitchFamily="34" charset="-122"/>
+                <a:cs typeface="微软雅黑" panose="020B0503020204020204" pitchFamily="34" charset="-120"/>
               </a:rPr>
               <a:t>模仿题参考答案（自行对照）</a:t>
             </a:r>
@@ -4906,7 +4726,6 @@
           <a:solidFill>
             <a:srgbClr val="F7F9FC"/>
           </a:solidFill>
-          <a:ln/>
         </p:spPr>
       </p:sp>
       <p:sp>
@@ -4926,7 +4745,6 @@
           <a:solidFill>
             <a:srgbClr val="1F4E9C"/>
           </a:solidFill>
-          <a:ln/>
         </p:spPr>
       </p:sp>
       <p:sp>
@@ -4944,13 +4762,12 @@
             <a:avLst/>
           </a:prstGeom>
           <a:noFill/>
-          <a:ln/>
         </p:spPr>
         <p:txBody>
           <a:bodyPr wrap="square" rtlCol="0" anchor="t"/>
           <a:lstStyle/>
           <a:p>
-            <a:pPr algn="l" indent="0" marL="0">
+            <a:pPr marL="0" indent="0" algn="l">
               <a:lnSpc>
                 <a:spcPct val="125000"/>
               </a:lnSpc>
@@ -4961,9 +4778,9 @@
                 <a:solidFill>
                   <a:srgbClr val="1F2329"/>
                 </a:solidFill>
-                <a:latin typeface="Consolas" pitchFamily="34" charset="0"/>
-                <a:ea typeface="Consolas" pitchFamily="34" charset="-122"/>
-                <a:cs typeface="Consolas" pitchFamily="34" charset="-120"/>
+                <a:latin typeface="Consolas" panose="020B0609020204030204" pitchFamily="34" charset="0"/>
+                <a:ea typeface="Consolas" panose="020B0609020204030204" pitchFamily="34" charset="-122"/>
+                <a:cs typeface="Consolas" panose="020B0609020204030204" pitchFamily="34" charset="-120"/>
               </a:rPr>
               <a:t>// 在双链表结点 p 之前插入 s（p 已知，不用找前驱）
 s-&gt;next = p;                 // s 的后继是 p
@@ -4973,118 +4790,6 @@
 </a:t>
             </a:r>
             <a:endParaRPr lang="en-US" sz="1400" dirty="0"/>
-          </a:p>
-        </p:txBody>
-      </p:sp>
-      <p:sp>
-        <p:nvSpPr>
-          <p:cNvPr id="8" name="Text 6"/>
-          <p:cNvSpPr/>
-          <p:nvPr/>
-        </p:nvSpPr>
-        <p:spPr>
-          <a:xfrm>
-            <a:off x="896112" y="4343400"/>
-            <a:ext cx="10454335" cy="740664"/>
-          </a:xfrm>
-          <a:prstGeom prst="rect">
-            <a:avLst/>
-          </a:prstGeom>
-          <a:noFill/>
-          <a:ln/>
-        </p:spPr>
-        <p:txBody>
-          <a:bodyPr wrap="square" rtlCol="0" anchor="t"/>
-          <a:lstStyle/>
-          <a:p>
-            <a:pPr algn="l" indent="0" marL="0">
-              <a:lnSpc>
-                <a:spcPct val="115000"/>
-              </a:lnSpc>
-              <a:buNone/>
-            </a:pPr>
-            <a:r>
-              <a:rPr lang="en-US" sz="1800" b="1" dirty="0">
-                <a:solidFill>
-                  <a:srgbClr val="1F4E9C"/>
-                </a:solidFill>
-                <a:latin typeface="微软雅黑" pitchFamily="34" charset="0"/>
-                <a:ea typeface="微软雅黑" pitchFamily="34" charset="-122"/>
-                <a:cs typeface="微软雅黑" pitchFamily="34" charset="-120"/>
-              </a:rPr>
-              <a:t>•  </a:t>
-            </a:r>
-            <a:pPr algn="l" indent="0" marL="0">
-              <a:lnSpc>
-                <a:spcPct val="115000"/>
-              </a:lnSpc>
-              <a:buNone/>
-            </a:pPr>
-            <a:r>
-              <a:rPr lang="en-US" sz="1800" dirty="0">
-                <a:solidFill>
-                  <a:srgbClr val="000000"/>
-                </a:solidFill>
-              </a:rPr>
-              <a:t>不能换的是'p-&gt;prior-&gt;next = s'与'p-&gt;prior = s'：必须先让原前驱接住 s，再改 p-&gt;prior，否则原前驱找不到了</a:t>
-            </a:r>
-            <a:endParaRPr lang="en-US" sz="1800" dirty="0"/>
-          </a:p>
-        </p:txBody>
-      </p:sp>
-      <p:sp>
-        <p:nvSpPr>
-          <p:cNvPr id="9" name="Text 7"/>
-          <p:cNvSpPr/>
-          <p:nvPr/>
-        </p:nvSpPr>
-        <p:spPr>
-          <a:xfrm>
-            <a:off x="896112" y="5157216"/>
-            <a:ext cx="10454335" cy="740664"/>
-          </a:xfrm>
-          <a:prstGeom prst="rect">
-            <a:avLst/>
-          </a:prstGeom>
-          <a:noFill/>
-          <a:ln/>
-        </p:spPr>
-        <p:txBody>
-          <a:bodyPr wrap="square" rtlCol="0" anchor="t"/>
-          <a:lstStyle/>
-          <a:p>
-            <a:pPr algn="l" indent="0" marL="0">
-              <a:lnSpc>
-                <a:spcPct val="115000"/>
-              </a:lnSpc>
-              <a:buNone/>
-            </a:pPr>
-            <a:r>
-              <a:rPr lang="en-US" sz="1800" b="1" dirty="0">
-                <a:solidFill>
-                  <a:srgbClr val="1F4E9C"/>
-                </a:solidFill>
-                <a:latin typeface="微软雅黑" pitchFamily="34" charset="0"/>
-                <a:ea typeface="微软雅黑" pitchFamily="34" charset="-122"/>
-                <a:cs typeface="微软雅黑" pitchFamily="34" charset="-120"/>
-              </a:rPr>
-              <a:t>•  </a:t>
-            </a:r>
-            <a:pPr algn="l" indent="0" marL="0">
-              <a:lnSpc>
-                <a:spcPct val="115000"/>
-              </a:lnSpc>
-              <a:buNone/>
-            </a:pPr>
-            <a:r>
-              <a:rPr lang="en-US" sz="1800" dirty="0">
-                <a:solidFill>
-                  <a:srgbClr val="000000"/>
-                </a:solidFill>
-              </a:rPr>
-              <a:t>在 p 之前插入正好用上 prior：不用像单链表那样从头找前驱，这就是双链表的价值</a:t>
-            </a:r>
-            <a:endParaRPr lang="en-US" sz="1800" dirty="0"/>
           </a:p>
         </p:txBody>
       </p:sp>
@@ -5098,7 +4803,7 @@
 
 <file path=ppt/slides/slide2.xml><?xml version="1.0" encoding="utf-8"?>
 <p:sld xmlns:a="http://schemas.openxmlformats.org/drawingml/2006/main" xmlns:r="http://schemas.openxmlformats.org/officeDocument/2006/relationships" xmlns:p="http://schemas.openxmlformats.org/presentationml/2006/main">
-  <p:cSld name="Slide 2">
+  <p:cSld>
     <p:bg>
       <p:bgPr>
         <a:blipFill dpi="0" rotWithShape="1">
@@ -5142,13 +4847,12 @@
             <a:avLst/>
           </a:prstGeom>
           <a:noFill/>
-          <a:ln/>
         </p:spPr>
         <p:txBody>
           <a:bodyPr wrap="square" rtlCol="0" anchor="ctr"/>
           <a:lstStyle/>
           <a:p>
-            <a:pPr algn="r" indent="0" marL="0">
+            <a:pPr marL="0" indent="0" algn="r">
               <a:buNone/>
             </a:pPr>
             <a:r>
@@ -5156,9 +4860,9 @@
                 <a:solidFill>
                   <a:srgbClr val="8A9099"/>
                 </a:solidFill>
-                <a:latin typeface="微软雅黑" pitchFamily="34" charset="0"/>
-                <a:ea typeface="微软雅黑" pitchFamily="34" charset="-122"/>
-                <a:cs typeface="微软雅黑" pitchFamily="34" charset="-120"/>
+                <a:latin typeface="微软雅黑" panose="020B0503020204020204" pitchFamily="34" charset="-122"/>
+                <a:ea typeface="微软雅黑" panose="020B0503020204020204" pitchFamily="34" charset="-122"/>
+                <a:cs typeface="微软雅黑" panose="020B0503020204020204" pitchFamily="34" charset="-120"/>
               </a:rPr>
               <a:t>2 / 14</a:t>
             </a:r>
@@ -5181,13 +4885,12 @@
             <a:avLst/>
           </a:prstGeom>
           <a:noFill/>
-          <a:ln/>
         </p:spPr>
         <p:txBody>
           <a:bodyPr wrap="square" rtlCol="0" anchor="ctr"/>
           <a:lstStyle/>
           <a:p>
-            <a:pPr algn="l" indent="0" marL="0">
+            <a:pPr marL="0" indent="0" algn="l">
               <a:buNone/>
             </a:pPr>
             <a:r>
@@ -5195,9 +4898,9 @@
                 <a:solidFill>
                   <a:srgbClr val="1F4E9C"/>
                 </a:solidFill>
-                <a:latin typeface="微软雅黑" pitchFamily="34" charset="0"/>
-                <a:ea typeface="微软雅黑" pitchFamily="34" charset="-122"/>
-                <a:cs typeface="微软雅黑" pitchFamily="34" charset="-120"/>
+                <a:latin typeface="微软雅黑" panose="020B0503020204020204" pitchFamily="34" charset="-122"/>
+                <a:ea typeface="微软雅黑" panose="020B0503020204020204" pitchFamily="34" charset="-122"/>
+                <a:cs typeface="微软雅黑" panose="020B0503020204020204" pitchFamily="34" charset="-120"/>
               </a:rPr>
               <a:t>引题</a:t>
             </a:r>
@@ -5220,13 +4923,12 @@
             <a:avLst/>
           </a:prstGeom>
           <a:noFill/>
-          <a:ln/>
         </p:spPr>
         <p:txBody>
           <a:bodyPr wrap="square" rtlCol="0" anchor="ctr"/>
           <a:lstStyle/>
           <a:p>
-            <a:pPr algn="l" indent="0" marL="0">
+            <a:pPr marL="0" indent="0" algn="l">
               <a:buNone/>
             </a:pPr>
             <a:r>
@@ -5234,9 +4936,9 @@
                 <a:solidFill>
                   <a:srgbClr val="1F2329"/>
                 </a:solidFill>
-                <a:latin typeface="微软雅黑" pitchFamily="34" charset="0"/>
-                <a:ea typeface="微软雅黑" pitchFamily="34" charset="-122"/>
-                <a:cs typeface="微软雅黑" pitchFamily="34" charset="-120"/>
+                <a:latin typeface="微软雅黑" panose="020B0503020204020204" pitchFamily="34" charset="-122"/>
+                <a:ea typeface="微软雅黑" panose="020B0503020204020204" pitchFamily="34" charset="-122"/>
+                <a:cs typeface="微软雅黑" panose="020B0503020204020204" pitchFamily="34" charset="-120"/>
               </a:rPr>
               <a:t>单链表有两个不方便，这一节来补</a:t>
             </a:r>
@@ -5259,13 +4961,12 @@
             <a:avLst/>
           </a:prstGeom>
           <a:noFill/>
-          <a:ln/>
         </p:spPr>
         <p:txBody>
           <a:bodyPr wrap="square" rtlCol="0" anchor="t"/>
           <a:lstStyle/>
           <a:p>
-            <a:pPr algn="l" indent="0" marL="0">
+            <a:pPr marL="0" indent="0" algn="l">
               <a:lnSpc>
                 <a:spcPct val="115000"/>
               </a:lnSpc>
@@ -5276,25 +4977,68 @@
                 <a:solidFill>
                   <a:srgbClr val="1F4E9C"/>
                 </a:solidFill>
-                <a:latin typeface="微软雅黑" pitchFamily="34" charset="0"/>
-                <a:ea typeface="微软雅黑" pitchFamily="34" charset="-122"/>
-                <a:cs typeface="微软雅黑" pitchFamily="34" charset="-120"/>
+                <a:latin typeface="微软雅黑" panose="020B0503020204020204" pitchFamily="34" charset="-122"/>
+                <a:ea typeface="微软雅黑" panose="020B0503020204020204" pitchFamily="34" charset="-122"/>
+                <a:cs typeface="微软雅黑" panose="020B0503020204020204" pitchFamily="34" charset="-120"/>
               </a:rPr>
               <a:t>•  </a:t>
             </a:r>
-            <a:pPr algn="l" indent="0" marL="0">
+            <a:r>
+              <a:rPr lang="en-US" sz="1800" dirty="0">
+                <a:solidFill>
+                  <a:srgbClr val="000000"/>
+                </a:solidFill>
+              </a:rPr>
+              <a:t>不方便一：单链表只能顺着 next 往前走，不能回头，想找某个结点的前驱，只能从头走一遍，O(i)</a:t>
+            </a:r>
+            <a:endParaRPr lang="en-US" sz="1800" dirty="0"/>
+          </a:p>
+        </p:txBody>
+      </p:sp>
+      <p:sp>
+        <p:nvSpPr>
+          <p:cNvPr id="6" name="Text 4"/>
+          <p:cNvSpPr/>
+          <p:nvPr/>
+        </p:nvSpPr>
+        <p:spPr>
+          <a:xfrm>
+            <a:off x="896112" y="3209544"/>
+            <a:ext cx="10454335" cy="397764"/>
+          </a:xfrm>
+          <a:prstGeom prst="rect">
+            <a:avLst/>
+          </a:prstGeom>
+          <a:noFill/>
+        </p:spPr>
+        <p:txBody>
+          <a:bodyPr wrap="square" rtlCol="0" anchor="t"/>
+          <a:lstStyle/>
+          <a:p>
+            <a:pPr marL="0" indent="0" algn="l">
               <a:lnSpc>
                 <a:spcPct val="115000"/>
               </a:lnSpc>
               <a:buNone/>
             </a:pPr>
             <a:r>
+              <a:rPr lang="en-US" sz="1800" b="1" dirty="0">
+                <a:solidFill>
+                  <a:srgbClr val="1F4E9C"/>
+                </a:solidFill>
+                <a:latin typeface="微软雅黑" panose="020B0503020204020204" pitchFamily="34" charset="-122"/>
+                <a:ea typeface="微软雅黑" panose="020B0503020204020204" pitchFamily="34" charset="-122"/>
+                <a:cs typeface="微软雅黑" panose="020B0503020204020204" pitchFamily="34" charset="-120"/>
+              </a:rPr>
+              <a:t>•  </a:t>
+            </a:r>
+            <a:r>
               <a:rPr lang="en-US" sz="1800" dirty="0">
                 <a:solidFill>
                   <a:srgbClr val="000000"/>
                 </a:solidFill>
               </a:rPr>
-              <a:t>不方便一：单链表只能顺着 next 往前走，不能回头，想找某个结点的前驱，只能从头走一遍，O(i)</a:t>
+              <a:t>不方便二：要在结点 p 前面插入，必须先从头走到 p 的前驱，很费事</a:t>
             </a:r>
             <a:endParaRPr lang="en-US" sz="1800" dirty="0"/>
           </a:p>
@@ -5302,26 +5046,25 @@
       </p:sp>
       <p:sp>
         <p:nvSpPr>
-          <p:cNvPr id="6" name="Text 4"/>
-          <p:cNvSpPr/>
-          <p:nvPr/>
-        </p:nvSpPr>
-        <p:spPr>
-          <a:xfrm>
-            <a:off x="896112" y="3209544"/>
-            <a:ext cx="10454335" cy="397764"/>
+          <p:cNvPr id="7" name="Text 5"/>
+          <p:cNvSpPr/>
+          <p:nvPr/>
+        </p:nvSpPr>
+        <p:spPr>
+          <a:xfrm>
+            <a:off x="896112" y="3680460"/>
+            <a:ext cx="10454335" cy="740664"/>
           </a:xfrm>
           <a:prstGeom prst="rect">
             <a:avLst/>
           </a:prstGeom>
           <a:noFill/>
-          <a:ln/>
         </p:spPr>
         <p:txBody>
           <a:bodyPr wrap="square" rtlCol="0" anchor="t"/>
           <a:lstStyle/>
           <a:p>
-            <a:pPr algn="l" indent="0" marL="0">
+            <a:pPr marL="0" indent="0" algn="l">
               <a:lnSpc>
                 <a:spcPct val="115000"/>
               </a:lnSpc>
@@ -5332,118 +5075,87 @@
                 <a:solidFill>
                   <a:srgbClr val="1F4E9C"/>
                 </a:solidFill>
-                <a:latin typeface="微软雅黑" pitchFamily="34" charset="0"/>
-                <a:ea typeface="微软雅黑" pitchFamily="34" charset="-122"/>
-                <a:cs typeface="微软雅黑" pitchFamily="34" charset="-120"/>
+                <a:latin typeface="微软雅黑" panose="020B0503020204020204" pitchFamily="34" charset="-122"/>
+                <a:ea typeface="微软雅黑" panose="020B0503020204020204" pitchFamily="34" charset="-122"/>
+                <a:cs typeface="微软雅黑" panose="020B0503020204020204" pitchFamily="34" charset="-120"/>
               </a:rPr>
               <a:t>•  </a:t>
             </a:r>
-            <a:pPr algn="l" indent="0" marL="0">
-              <a:lnSpc>
-                <a:spcPct val="115000"/>
-              </a:lnSpc>
+            <a:r>
+              <a:rPr lang="en-US" sz="1800" dirty="0">
+                <a:solidFill>
+                  <a:srgbClr val="000000"/>
+                </a:solidFill>
+              </a:rPr>
+              <a:t>补的办法有</a:t>
+            </a:r>
+            <a:r>
+              <a:rPr lang="zh-CN" altLang="en-US" sz="1800" dirty="0">
+                <a:solidFill>
+                  <a:srgbClr val="000000"/>
+                </a:solidFill>
+              </a:rPr>
+              <a:t>两</a:t>
+            </a:r>
+            <a:r>
+              <a:rPr lang="en-US" sz="1800" dirty="0">
+                <a:solidFill>
+                  <a:srgbClr val="000000"/>
+                </a:solidFill>
+              </a:rPr>
+              <a:t>种：多一根指向前驱的指针（双链表）</a:t>
+            </a:r>
+            <a:r>
+              <a:rPr lang="zh-CN" altLang="en-US" sz="1800" dirty="0">
+                <a:solidFill>
+                  <a:srgbClr val="000000"/>
+                </a:solidFill>
+              </a:rPr>
+              <a:t>以及</a:t>
+            </a:r>
+            <a:r>
+              <a:rPr lang="en-US" sz="1800" dirty="0">
+                <a:solidFill>
+                  <a:srgbClr val="000000"/>
+                </a:solidFill>
+              </a:rPr>
+              <a:t>让尾巴接回头（循环链表）</a:t>
+            </a:r>
+            <a:endParaRPr lang="en-US" sz="1800" dirty="0"/>
+          </a:p>
+        </p:txBody>
+      </p:sp>
+      <p:sp>
+        <p:nvSpPr>
+          <p:cNvPr id="8" name="Text 6"/>
+          <p:cNvSpPr/>
+          <p:nvPr/>
+        </p:nvSpPr>
+        <p:spPr>
+          <a:xfrm>
+            <a:off x="822960" y="4585716"/>
+            <a:ext cx="10545775" cy="358902"/>
+          </a:xfrm>
+          <a:prstGeom prst="rect">
+            <a:avLst/>
+          </a:prstGeom>
+          <a:noFill/>
+        </p:spPr>
+        <p:txBody>
+          <a:bodyPr wrap="square" rtlCol="0" anchor="t"/>
+          <a:lstStyle/>
+          <a:p>
+            <a:pPr marL="0" indent="0" algn="l">
               <a:buNone/>
             </a:pPr>
             <a:r>
-              <a:rPr lang="en-US" sz="1800" dirty="0">
-                <a:solidFill>
-                  <a:srgbClr val="000000"/>
-                </a:solidFill>
-              </a:rPr>
-              <a:t>不方便二：要在结点 p 前面插入，必须先从头走到 p 的前驱，很费事</a:t>
-            </a:r>
-            <a:endParaRPr lang="en-US" sz="1800" dirty="0"/>
-          </a:p>
-        </p:txBody>
-      </p:sp>
-      <p:sp>
-        <p:nvSpPr>
-          <p:cNvPr id="7" name="Text 5"/>
-          <p:cNvSpPr/>
-          <p:nvPr/>
-        </p:nvSpPr>
-        <p:spPr>
-          <a:xfrm>
-            <a:off x="896112" y="3680460"/>
-            <a:ext cx="10454335" cy="740664"/>
-          </a:xfrm>
-          <a:prstGeom prst="rect">
-            <a:avLst/>
-          </a:prstGeom>
-          <a:noFill/>
-          <a:ln/>
-        </p:spPr>
-        <p:txBody>
-          <a:bodyPr wrap="square" rtlCol="0" anchor="t"/>
-          <a:lstStyle/>
-          <a:p>
-            <a:pPr algn="l" indent="0" marL="0">
-              <a:lnSpc>
-                <a:spcPct val="115000"/>
-              </a:lnSpc>
-              <a:buNone/>
-            </a:pPr>
-            <a:r>
-              <a:rPr lang="en-US" sz="1800" b="1" dirty="0">
-                <a:solidFill>
-                  <a:srgbClr val="1F4E9C"/>
-                </a:solidFill>
-                <a:latin typeface="微软雅黑" pitchFamily="34" charset="0"/>
-                <a:ea typeface="微软雅黑" pitchFamily="34" charset="-122"/>
-                <a:cs typeface="微软雅黑" pitchFamily="34" charset="-120"/>
-              </a:rPr>
-              <a:t>•  </a:t>
-            </a:r>
-            <a:pPr algn="l" indent="0" marL="0">
-              <a:lnSpc>
-                <a:spcPct val="115000"/>
-              </a:lnSpc>
-              <a:buNone/>
-            </a:pPr>
-            <a:r>
-              <a:rPr lang="en-US" sz="1800" dirty="0">
-                <a:solidFill>
-                  <a:srgbClr val="000000"/>
-                </a:solidFill>
-              </a:rPr>
-              <a:t>补的办法有三种：多一根指向前驱的指针（双链表）、让尾巴接回头（循环链表）、用数组加游标（静态链表）</a:t>
-            </a:r>
-            <a:endParaRPr lang="en-US" sz="1800" dirty="0"/>
-          </a:p>
-        </p:txBody>
-      </p:sp>
-      <p:sp>
-        <p:nvSpPr>
-          <p:cNvPr id="8" name="Text 6"/>
-          <p:cNvSpPr/>
-          <p:nvPr/>
-        </p:nvSpPr>
-        <p:spPr>
-          <a:xfrm>
-            <a:off x="822960" y="4585716"/>
-            <a:ext cx="10545775" cy="358902"/>
-          </a:xfrm>
-          <a:prstGeom prst="rect">
-            <a:avLst/>
-          </a:prstGeom>
-          <a:noFill/>
-          <a:ln/>
-        </p:spPr>
-        <p:txBody>
-          <a:bodyPr wrap="square" rtlCol="0" anchor="t"/>
-          <a:lstStyle/>
-          <a:p>
-            <a:pPr algn="l" indent="0" marL="0">
-              <a:buNone/>
-            </a:pPr>
-            <a:r>
               <a:rPr lang="en-US" sz="1500" dirty="0">
                 <a:solidFill>
                   <a:srgbClr val="8A9099"/>
                 </a:solidFill>
-                <a:latin typeface="微软雅黑" pitchFamily="34" charset="0"/>
-                <a:ea typeface="微软雅黑" pitchFamily="34" charset="-122"/>
-                <a:cs typeface="微软雅黑" pitchFamily="34" charset="-120"/>
+                <a:latin typeface="微软雅黑" panose="020B0503020204020204" pitchFamily="34" charset="-122"/>
+                <a:ea typeface="微软雅黑" panose="020B0503020204020204" pitchFamily="34" charset="-122"/>
+                <a:cs typeface="微软雅黑" panose="020B0503020204020204" pitchFamily="34" charset="-120"/>
               </a:rPr>
               <a:t>这一节讲三种单链表的变体，重点在双链表的指针次序，它是 2020 年真题考过的</a:t>
             </a:r>
@@ -5461,7 +5173,7 @@
 
 <file path=ppt/slides/slide3.xml><?xml version="1.0" encoding="utf-8"?>
 <p:sld xmlns:a="http://schemas.openxmlformats.org/drawingml/2006/main" xmlns:r="http://schemas.openxmlformats.org/officeDocument/2006/relationships" xmlns:p="http://schemas.openxmlformats.org/presentationml/2006/main">
-  <p:cSld name="Slide 3">
+  <p:cSld>
     <p:bg>
       <p:bgPr>
         <a:blipFill dpi="0" rotWithShape="1">
@@ -5505,13 +5217,12 @@
             <a:avLst/>
           </a:prstGeom>
           <a:noFill/>
-          <a:ln/>
         </p:spPr>
         <p:txBody>
           <a:bodyPr wrap="square" rtlCol="0" anchor="ctr"/>
           <a:lstStyle/>
           <a:p>
-            <a:pPr algn="r" indent="0" marL="0">
+            <a:pPr marL="0" indent="0" algn="r">
               <a:buNone/>
             </a:pPr>
             <a:r>
@@ -5519,9 +5230,9 @@
                 <a:solidFill>
                   <a:srgbClr val="8A9099"/>
                 </a:solidFill>
-                <a:latin typeface="微软雅黑" pitchFamily="34" charset="0"/>
-                <a:ea typeface="微软雅黑" pitchFamily="34" charset="-122"/>
-                <a:cs typeface="微软雅黑" pitchFamily="34" charset="-120"/>
+                <a:latin typeface="微软雅黑" panose="020B0503020204020204" pitchFamily="34" charset="-122"/>
+                <a:ea typeface="微软雅黑" panose="020B0503020204020204" pitchFamily="34" charset="-122"/>
+                <a:cs typeface="微软雅黑" panose="020B0503020204020204" pitchFamily="34" charset="-120"/>
               </a:rPr>
               <a:t>3 / 14</a:t>
             </a:r>
@@ -5544,13 +5255,12 @@
             <a:avLst/>
           </a:prstGeom>
           <a:noFill/>
-          <a:ln/>
         </p:spPr>
         <p:txBody>
           <a:bodyPr wrap="square" rtlCol="0" anchor="ctr"/>
           <a:lstStyle/>
           <a:p>
-            <a:pPr algn="l" indent="0" marL="0">
+            <a:pPr marL="0" indent="0" algn="l">
               <a:buNone/>
             </a:pPr>
             <a:r>
@@ -5558,9 +5268,9 @@
                 <a:solidFill>
                   <a:srgbClr val="1F4E9C"/>
                 </a:solidFill>
-                <a:latin typeface="微软雅黑" pitchFamily="34" charset="0"/>
-                <a:ea typeface="微软雅黑" pitchFamily="34" charset="-122"/>
-                <a:cs typeface="微软雅黑" pitchFamily="34" charset="-120"/>
+                <a:latin typeface="微软雅黑" panose="020B0503020204020204" pitchFamily="34" charset="-122"/>
+                <a:ea typeface="微软雅黑" panose="020B0503020204020204" pitchFamily="34" charset="-122"/>
+                <a:cs typeface="微软雅黑" panose="020B0503020204020204" pitchFamily="34" charset="-120"/>
               </a:rPr>
               <a:t>双链表 · 定义</a:t>
             </a:r>
@@ -5583,13 +5293,12 @@
             <a:avLst/>
           </a:prstGeom>
           <a:noFill/>
-          <a:ln/>
         </p:spPr>
         <p:txBody>
           <a:bodyPr wrap="square" rtlCol="0" anchor="ctr"/>
           <a:lstStyle/>
           <a:p>
-            <a:pPr algn="l" indent="0" marL="0">
+            <a:pPr marL="0" indent="0" algn="l">
               <a:buNone/>
             </a:pPr>
             <a:r>
@@ -5597,9 +5306,9 @@
                 <a:solidFill>
                   <a:srgbClr val="1F2329"/>
                 </a:solidFill>
-                <a:latin typeface="微软雅黑" pitchFamily="34" charset="0"/>
-                <a:ea typeface="微软雅黑" pitchFamily="34" charset="-122"/>
-                <a:cs typeface="微软雅黑" pitchFamily="34" charset="-120"/>
+                <a:latin typeface="微软雅黑" panose="020B0503020204020204" pitchFamily="34" charset="-122"/>
+                <a:ea typeface="微软雅黑" panose="020B0503020204020204" pitchFamily="34" charset="-122"/>
+                <a:cs typeface="微软雅黑" panose="020B0503020204020204" pitchFamily="34" charset="-120"/>
               </a:rPr>
               <a:t>双链表：每个结点多一根 prior 指针</a:t>
             </a:r>
@@ -5624,7 +5333,6 @@
           <a:solidFill>
             <a:srgbClr val="F7F9FC"/>
           </a:solidFill>
-          <a:ln/>
         </p:spPr>
       </p:sp>
       <p:sp>
@@ -5644,7 +5352,6 @@
           <a:solidFill>
             <a:srgbClr val="1F4E9C"/>
           </a:solidFill>
-          <a:ln/>
         </p:spPr>
       </p:sp>
       <p:sp>
@@ -5662,13 +5369,12 @@
             <a:avLst/>
           </a:prstGeom>
           <a:noFill/>
-          <a:ln/>
         </p:spPr>
         <p:txBody>
           <a:bodyPr wrap="square" rtlCol="0" anchor="t"/>
           <a:lstStyle/>
           <a:p>
-            <a:pPr algn="l" indent="0" marL="0">
+            <a:pPr marL="0" indent="0" algn="l">
               <a:lnSpc>
                 <a:spcPct val="125000"/>
               </a:lnSpc>
@@ -5679,9 +5385,9 @@
                 <a:solidFill>
                   <a:srgbClr val="1F2329"/>
                 </a:solidFill>
-                <a:latin typeface="Consolas" pitchFamily="34" charset="0"/>
-                <a:ea typeface="Consolas" pitchFamily="34" charset="-122"/>
-                <a:cs typeface="Consolas" pitchFamily="34" charset="-120"/>
+                <a:latin typeface="Consolas" panose="020B0609020204030204" pitchFamily="34" charset="0"/>
+                <a:ea typeface="Consolas" panose="020B0609020204030204" pitchFamily="34" charset="-122"/>
+                <a:cs typeface="Consolas" panose="020B0609020204030204" pitchFamily="34" charset="-120"/>
               </a:rPr>
               <a:t>typedef struct DNode{
     int data;
@@ -5708,13 +5414,12 @@
             <a:avLst/>
           </a:prstGeom>
           <a:noFill/>
-          <a:ln/>
         </p:spPr>
         <p:txBody>
           <a:bodyPr wrap="square" rtlCol="0" anchor="t"/>
           <a:lstStyle/>
           <a:p>
-            <a:pPr algn="l" indent="0" marL="0">
+            <a:pPr marL="0" indent="0" algn="l">
               <a:lnSpc>
                 <a:spcPct val="115000"/>
               </a:lnSpc>
@@ -5725,25 +5430,68 @@
                 <a:solidFill>
                   <a:srgbClr val="1F4E9C"/>
                 </a:solidFill>
-                <a:latin typeface="微软雅黑" pitchFamily="34" charset="0"/>
-                <a:ea typeface="微软雅黑" pitchFamily="34" charset="-122"/>
-                <a:cs typeface="微软雅黑" pitchFamily="34" charset="-120"/>
+                <a:latin typeface="微软雅黑" panose="020B0503020204020204" pitchFamily="34" charset="-122"/>
+                <a:ea typeface="微软雅黑" panose="020B0503020204020204" pitchFamily="34" charset="-122"/>
+                <a:cs typeface="微软雅黑" panose="020B0503020204020204" pitchFamily="34" charset="-120"/>
               </a:rPr>
               <a:t>•  </a:t>
             </a:r>
-            <a:pPr algn="l" indent="0" marL="0">
+            <a:r>
+              <a:rPr lang="en-US" sz="1800" dirty="0">
+                <a:solidFill>
+                  <a:srgbClr val="000000"/>
+                </a:solidFill>
+              </a:rPr>
+              <a:t>比单链表多了一个 prior，指向前一个结点；这样从任一结点既能往后走也能往前走</a:t>
+            </a:r>
+            <a:endParaRPr lang="en-US" sz="1800" dirty="0"/>
+          </a:p>
+        </p:txBody>
+      </p:sp>
+      <p:sp>
+        <p:nvSpPr>
+          <p:cNvPr id="9" name="Text 7"/>
+          <p:cNvSpPr/>
+          <p:nvPr/>
+        </p:nvSpPr>
+        <p:spPr>
+          <a:xfrm>
+            <a:off x="896112" y="4576572"/>
+            <a:ext cx="10454335" cy="740664"/>
+          </a:xfrm>
+          <a:prstGeom prst="rect">
+            <a:avLst/>
+          </a:prstGeom>
+          <a:noFill/>
+        </p:spPr>
+        <p:txBody>
+          <a:bodyPr wrap="square" rtlCol="0" anchor="t"/>
+          <a:lstStyle/>
+          <a:p>
+            <a:pPr marL="0" indent="0" algn="l">
               <a:lnSpc>
                 <a:spcPct val="115000"/>
               </a:lnSpc>
               <a:buNone/>
             </a:pPr>
             <a:r>
+              <a:rPr lang="en-US" sz="1800" b="1" dirty="0">
+                <a:solidFill>
+                  <a:srgbClr val="1F4E9C"/>
+                </a:solidFill>
+                <a:latin typeface="微软雅黑" panose="020B0503020204020204" pitchFamily="34" charset="-122"/>
+                <a:ea typeface="微软雅黑" panose="020B0503020204020204" pitchFamily="34" charset="-122"/>
+                <a:cs typeface="微软雅黑" panose="020B0503020204020204" pitchFamily="34" charset="-120"/>
+              </a:rPr>
+              <a:t>•  </a:t>
+            </a:r>
+            <a:r>
               <a:rPr lang="en-US" sz="1800" dirty="0">
                 <a:solidFill>
                   <a:srgbClr val="000000"/>
                 </a:solidFill>
               </a:rPr>
-              <a:t>比单链表多了一个 prior，指向前一个结点；这样从任一结点既能往后走也能往前走</a:t>
+              <a:t>有了 prior，在 p 前面插入、找 p 的前驱，都不用再从头走，直接 p-&gt;prior 就拿到了</a:t>
             </a:r>
             <a:endParaRPr lang="en-US" sz="1800" dirty="0"/>
           </a:p>
@@ -5751,26 +5499,25 @@
       </p:sp>
       <p:sp>
         <p:nvSpPr>
-          <p:cNvPr id="9" name="Text 7"/>
-          <p:cNvSpPr/>
-          <p:nvPr/>
-        </p:nvSpPr>
-        <p:spPr>
-          <a:xfrm>
-            <a:off x="896112" y="4576572"/>
-            <a:ext cx="10454335" cy="740664"/>
+          <p:cNvPr id="10" name="Text 8"/>
+          <p:cNvSpPr/>
+          <p:nvPr/>
+        </p:nvSpPr>
+        <p:spPr>
+          <a:xfrm>
+            <a:off x="896112" y="5390388"/>
+            <a:ext cx="10454335" cy="397764"/>
           </a:xfrm>
           <a:prstGeom prst="rect">
             <a:avLst/>
           </a:prstGeom>
           <a:noFill/>
-          <a:ln/>
         </p:spPr>
         <p:txBody>
           <a:bodyPr wrap="square" rtlCol="0" anchor="t"/>
           <a:lstStyle/>
           <a:p>
-            <a:pPr algn="l" indent="0" marL="0">
+            <a:pPr marL="0" indent="0" algn="l">
               <a:lnSpc>
                 <a:spcPct val="115000"/>
               </a:lnSpc>
@@ -5781,74 +5528,12 @@
                 <a:solidFill>
                   <a:srgbClr val="1F4E9C"/>
                 </a:solidFill>
-                <a:latin typeface="微软雅黑" pitchFamily="34" charset="0"/>
-                <a:ea typeface="微软雅黑" pitchFamily="34" charset="-122"/>
-                <a:cs typeface="微软雅黑" pitchFamily="34" charset="-120"/>
+                <a:latin typeface="微软雅黑" panose="020B0503020204020204" pitchFamily="34" charset="-122"/>
+                <a:ea typeface="微软雅黑" panose="020B0503020204020204" pitchFamily="34" charset="-122"/>
+                <a:cs typeface="微软雅黑" panose="020B0503020204020204" pitchFamily="34" charset="-120"/>
               </a:rPr>
               <a:t>•  </a:t>
             </a:r>
-            <a:pPr algn="l" indent="0" marL="0">
-              <a:lnSpc>
-                <a:spcPct val="115000"/>
-              </a:lnSpc>
-              <a:buNone/>
-            </a:pPr>
-            <a:r>
-              <a:rPr lang="en-US" sz="1800" dirty="0">
-                <a:solidFill>
-                  <a:srgbClr val="000000"/>
-                </a:solidFill>
-              </a:rPr>
-              <a:t>有了 prior，在 p 前面插入、找 p 的前驱，都不用再从头走，直接 p-&gt;prior 就拿到了</a:t>
-            </a:r>
-            <a:endParaRPr lang="en-US" sz="1800" dirty="0"/>
-          </a:p>
-        </p:txBody>
-      </p:sp>
-      <p:sp>
-        <p:nvSpPr>
-          <p:cNvPr id="10" name="Text 8"/>
-          <p:cNvSpPr/>
-          <p:nvPr/>
-        </p:nvSpPr>
-        <p:spPr>
-          <a:xfrm>
-            <a:off x="896112" y="5390388"/>
-            <a:ext cx="10454335" cy="397764"/>
-          </a:xfrm>
-          <a:prstGeom prst="rect">
-            <a:avLst/>
-          </a:prstGeom>
-          <a:noFill/>
-          <a:ln/>
-        </p:spPr>
-        <p:txBody>
-          <a:bodyPr wrap="square" rtlCol="0" anchor="t"/>
-          <a:lstStyle/>
-          <a:p>
-            <a:pPr algn="l" indent="0" marL="0">
-              <a:lnSpc>
-                <a:spcPct val="115000"/>
-              </a:lnSpc>
-              <a:buNone/>
-            </a:pPr>
-            <a:r>
-              <a:rPr lang="en-US" sz="1800" b="1" dirty="0">
-                <a:solidFill>
-                  <a:srgbClr val="1F4E9C"/>
-                </a:solidFill>
-                <a:latin typeface="微软雅黑" pitchFamily="34" charset="0"/>
-                <a:ea typeface="微软雅黑" pitchFamily="34" charset="-122"/>
-                <a:cs typeface="微软雅黑" pitchFamily="34" charset="-120"/>
-              </a:rPr>
-              <a:t>•  </a:t>
-            </a:r>
-            <a:pPr algn="l" indent="0" marL="0">
-              <a:lnSpc>
-                <a:spcPct val="115000"/>
-              </a:lnSpc>
-              <a:buNone/>
-            </a:pPr>
             <a:r>
               <a:rPr lang="en-US" sz="1800" dirty="0">
                 <a:solidFill>
@@ -5871,7 +5556,7 @@
 
 <file path=ppt/slides/slide4.xml><?xml version="1.0" encoding="utf-8"?>
 <p:sld xmlns:a="http://schemas.openxmlformats.org/drawingml/2006/main" xmlns:r="http://schemas.openxmlformats.org/officeDocument/2006/relationships" xmlns:p="http://schemas.openxmlformats.org/presentationml/2006/main">
-  <p:cSld name="Slide 4">
+  <p:cSld>
     <p:bg>
       <p:bgPr>
         <a:blipFill dpi="0" rotWithShape="1">
@@ -5915,13 +5600,12 @@
             <a:avLst/>
           </a:prstGeom>
           <a:noFill/>
-          <a:ln/>
         </p:spPr>
         <p:txBody>
           <a:bodyPr wrap="square" rtlCol="0" anchor="ctr"/>
           <a:lstStyle/>
           <a:p>
-            <a:pPr algn="r" indent="0" marL="0">
+            <a:pPr marL="0" indent="0" algn="r">
               <a:buNone/>
             </a:pPr>
             <a:r>
@@ -5929,9 +5613,9 @@
                 <a:solidFill>
                   <a:srgbClr val="8A9099"/>
                 </a:solidFill>
-                <a:latin typeface="微软雅黑" pitchFamily="34" charset="0"/>
-                <a:ea typeface="微软雅黑" pitchFamily="34" charset="-122"/>
-                <a:cs typeface="微软雅黑" pitchFamily="34" charset="-120"/>
+                <a:latin typeface="微软雅黑" panose="020B0503020204020204" pitchFamily="34" charset="-122"/>
+                <a:ea typeface="微软雅黑" panose="020B0503020204020204" pitchFamily="34" charset="-122"/>
+                <a:cs typeface="微软雅黑" panose="020B0503020204020204" pitchFamily="34" charset="-120"/>
               </a:rPr>
               <a:t>4 / 14</a:t>
             </a:r>
@@ -5954,13 +5638,12 @@
             <a:avLst/>
           </a:prstGeom>
           <a:noFill/>
-          <a:ln/>
         </p:spPr>
         <p:txBody>
           <a:bodyPr wrap="square" rtlCol="0" anchor="ctr"/>
           <a:lstStyle/>
           <a:p>
-            <a:pPr algn="l" indent="0" marL="0">
+            <a:pPr marL="0" indent="0" algn="l">
               <a:buNone/>
             </a:pPr>
             <a:r>
@@ -5968,9 +5651,9 @@
                 <a:solidFill>
                   <a:srgbClr val="1F4E9C"/>
                 </a:solidFill>
-                <a:latin typeface="微软雅黑" pitchFamily="34" charset="0"/>
-                <a:ea typeface="微软雅黑" pitchFamily="34" charset="-122"/>
-                <a:cs typeface="微软雅黑" pitchFamily="34" charset="-120"/>
+                <a:latin typeface="微软雅黑" panose="020B0503020204020204" pitchFamily="34" charset="-122"/>
+                <a:ea typeface="微软雅黑" panose="020B0503020204020204" pitchFamily="34" charset="-122"/>
+                <a:cs typeface="微软雅黑" panose="020B0503020204020204" pitchFamily="34" charset="-120"/>
               </a:rPr>
               <a:t>双链表 · 插入</a:t>
             </a:r>
@@ -5993,13 +5676,12 @@
             <a:avLst/>
           </a:prstGeom>
           <a:noFill/>
-          <a:ln/>
         </p:spPr>
         <p:txBody>
           <a:bodyPr wrap="square" rtlCol="0" anchor="ctr"/>
           <a:lstStyle/>
           <a:p>
-            <a:pPr algn="l" indent="0" marL="0">
+            <a:pPr marL="0" indent="0" algn="l">
               <a:buNone/>
             </a:pPr>
             <a:r>
@@ -6007,9 +5689,9 @@
                 <a:solidFill>
                   <a:srgbClr val="1F2329"/>
                 </a:solidFill>
-                <a:latin typeface="微软雅黑" pitchFamily="34" charset="0"/>
-                <a:ea typeface="微软雅黑" pitchFamily="34" charset="-122"/>
-                <a:cs typeface="微软雅黑" pitchFamily="34" charset="-120"/>
+                <a:latin typeface="微软雅黑" panose="020B0503020204020204" pitchFamily="34" charset="-122"/>
+                <a:ea typeface="微软雅黑" panose="020B0503020204020204" pitchFamily="34" charset="-122"/>
+                <a:cs typeface="微软雅黑" panose="020B0503020204020204" pitchFamily="34" charset="-120"/>
               </a:rPr>
               <a:t>双链表插入：四条赋值，次序有讲究</a:t>
             </a:r>
@@ -6034,7 +5716,6 @@
           <a:solidFill>
             <a:srgbClr val="F7F9FC"/>
           </a:solidFill>
-          <a:ln/>
         </p:spPr>
       </p:sp>
       <p:sp>
@@ -6054,7 +5735,6 @@
           <a:solidFill>
             <a:srgbClr val="1F4E9C"/>
           </a:solidFill>
-          <a:ln/>
         </p:spPr>
       </p:sp>
       <p:sp>
@@ -6072,13 +5752,12 @@
             <a:avLst/>
           </a:prstGeom>
           <a:noFill/>
-          <a:ln/>
         </p:spPr>
         <p:txBody>
           <a:bodyPr wrap="square" rtlCol="0" anchor="t"/>
           <a:lstStyle/>
           <a:p>
-            <a:pPr algn="l" indent="0" marL="0">
+            <a:pPr marL="0" indent="0" algn="l">
               <a:lnSpc>
                 <a:spcPct val="125000"/>
               </a:lnSpc>
@@ -6089,9 +5768,9 @@
                 <a:solidFill>
                   <a:srgbClr val="1F2329"/>
                 </a:solidFill>
-                <a:latin typeface="Consolas" pitchFamily="34" charset="0"/>
-                <a:ea typeface="Consolas" pitchFamily="34" charset="-122"/>
-                <a:cs typeface="Consolas" pitchFamily="34" charset="-120"/>
+                <a:latin typeface="Consolas" panose="020B0609020204030204" pitchFamily="34" charset="0"/>
+                <a:ea typeface="Consolas" panose="020B0609020204030204" pitchFamily="34" charset="-122"/>
+                <a:cs typeface="Consolas" panose="020B0609020204030204" pitchFamily="34" charset="-120"/>
               </a:rPr>
               <a:t>bool ListInsert(DLinkList &amp;L, int i, int elem){
     DNode *p = GetElem(L, i - 1);          // 找前驱
@@ -6126,13 +5805,12 @@
             <a:avLst/>
           </a:prstGeom>
           <a:noFill/>
-          <a:ln/>
         </p:spPr>
         <p:txBody>
           <a:bodyPr wrap="square" rtlCol="0" anchor="t"/>
           <a:lstStyle/>
           <a:p>
-            <a:pPr algn="l" indent="0" marL="0">
+            <a:pPr marL="0" indent="0" algn="l">
               <a:buNone/>
             </a:pPr>
             <a:r>
@@ -6140,11 +5818,11 @@
                 <a:solidFill>
                   <a:srgbClr val="8A9099"/>
                 </a:solidFill>
-                <a:latin typeface="微软雅黑" pitchFamily="34" charset="0"/>
-                <a:ea typeface="微软雅黑" pitchFamily="34" charset="-122"/>
-                <a:cs typeface="微软雅黑" pitchFamily="34" charset="-120"/>
-              </a:rPr>
-              <a:t>①②是安置新结点自己，先后无所谓；关键是③必须在④之前，下一页画图看为什么</a:t>
+                <a:latin typeface="微软雅黑" panose="020B0503020204020204" pitchFamily="34" charset="-122"/>
+                <a:ea typeface="微软雅黑" panose="020B0503020204020204" pitchFamily="34" charset="-122"/>
+                <a:cs typeface="微软雅黑" panose="020B0503020204020204" pitchFamily="34" charset="-120"/>
+              </a:rPr>
+              <a:t>①②是安置新结点自己，先后无所谓；关键是1必须在4之前，下一页画图看为什么</a:t>
             </a:r>
             <a:endParaRPr lang="en-US" sz="1300" dirty="0"/>
           </a:p>
@@ -6160,7 +5838,7 @@
 
 <file path=ppt/slides/slide5.xml><?xml version="1.0" encoding="utf-8"?>
 <p:sld xmlns:a="http://schemas.openxmlformats.org/drawingml/2006/main" xmlns:r="http://schemas.openxmlformats.org/officeDocument/2006/relationships" xmlns:p="http://schemas.openxmlformats.org/presentationml/2006/main">
-  <p:cSld name="Slide 5">
+  <p:cSld>
     <p:bg>
       <p:bgPr>
         <a:blipFill dpi="0" rotWithShape="1">
@@ -6204,13 +5882,12 @@
             <a:avLst/>
           </a:prstGeom>
           <a:noFill/>
-          <a:ln/>
         </p:spPr>
         <p:txBody>
           <a:bodyPr wrap="square" rtlCol="0" anchor="ctr"/>
           <a:lstStyle/>
           <a:p>
-            <a:pPr algn="r" indent="0" marL="0">
+            <a:pPr marL="0" indent="0" algn="r">
               <a:buNone/>
             </a:pPr>
             <a:r>
@@ -6218,9 +5895,9 @@
                 <a:solidFill>
                   <a:srgbClr val="8A9099"/>
                 </a:solidFill>
-                <a:latin typeface="微软雅黑" pitchFamily="34" charset="0"/>
-                <a:ea typeface="微软雅黑" pitchFamily="34" charset="-122"/>
-                <a:cs typeface="微软雅黑" pitchFamily="34" charset="-120"/>
+                <a:latin typeface="微软雅黑" panose="020B0503020204020204" pitchFamily="34" charset="-122"/>
+                <a:ea typeface="微软雅黑" panose="020B0503020204020204" pitchFamily="34" charset="-122"/>
+                <a:cs typeface="微软雅黑" panose="020B0503020204020204" pitchFamily="34" charset="-120"/>
               </a:rPr>
               <a:t>5 / 14</a:t>
             </a:r>
@@ -6243,13 +5920,12 @@
             <a:avLst/>
           </a:prstGeom>
           <a:noFill/>
-          <a:ln/>
         </p:spPr>
         <p:txBody>
           <a:bodyPr wrap="square" rtlCol="0" anchor="ctr"/>
           <a:lstStyle/>
           <a:p>
-            <a:pPr algn="l" indent="0" marL="0">
+            <a:pPr marL="0" indent="0" algn="l">
               <a:buNone/>
             </a:pPr>
             <a:r>
@@ -6257,9 +5933,9 @@
                 <a:solidFill>
                   <a:srgbClr val="1F4E9C"/>
                 </a:solidFill>
-                <a:latin typeface="微软雅黑" pitchFamily="34" charset="0"/>
-                <a:ea typeface="微软雅黑" pitchFamily="34" charset="-122"/>
-                <a:cs typeface="微软雅黑" pitchFamily="34" charset="-120"/>
+                <a:latin typeface="微软雅黑" panose="020B0503020204020204" pitchFamily="34" charset="-122"/>
+                <a:ea typeface="微软雅黑" panose="020B0503020204020204" pitchFamily="34" charset="-122"/>
+                <a:cs typeface="微软雅黑" panose="020B0503020204020204" pitchFamily="34" charset="-120"/>
               </a:rPr>
               <a:t>双链表插入 · 过程页</a:t>
             </a:r>
@@ -6282,13 +5958,12 @@
             <a:avLst/>
           </a:prstGeom>
           <a:noFill/>
-          <a:ln/>
         </p:spPr>
         <p:txBody>
           <a:bodyPr wrap="square" rtlCol="0" anchor="ctr"/>
           <a:lstStyle/>
           <a:p>
-            <a:pPr algn="l" indent="0" marL="0">
+            <a:pPr marL="0" indent="0" algn="l">
               <a:buNone/>
             </a:pPr>
             <a:r>
@@ -6296,9 +5971,9 @@
                 <a:solidFill>
                   <a:srgbClr val="1F2329"/>
                 </a:solidFill>
-                <a:latin typeface="微软雅黑" pitchFamily="34" charset="0"/>
-                <a:ea typeface="微软雅黑" pitchFamily="34" charset="-122"/>
-                <a:cs typeface="微软雅黑" pitchFamily="34" charset="-120"/>
+                <a:latin typeface="微软雅黑" panose="020B0503020204020204" pitchFamily="34" charset="-122"/>
+                <a:ea typeface="微软雅黑" panose="020B0503020204020204" pitchFamily="34" charset="-122"/>
+                <a:cs typeface="微软雅黑" panose="020B0503020204020204" pitchFamily="34" charset="-120"/>
               </a:rPr>
               <a:t>四条赋值一步步画，换次序会怎样（拿纸跟着画）</a:t>
             </a:r>
@@ -6392,13 +6067,12 @@
             <a:avLst/>
           </a:prstGeom>
           <a:noFill/>
-          <a:ln/>
         </p:spPr>
         <p:txBody>
           <a:bodyPr wrap="square" rtlCol="0" anchor="ctr"/>
           <a:lstStyle/>
           <a:p>
-            <a:pPr algn="ctr" indent="0" marL="0">
+            <a:pPr marL="0" indent="0" algn="ctr">
               <a:buNone/>
             </a:pPr>
             <a:r>
@@ -6406,9 +6080,9 @@
                 <a:solidFill>
                   <a:srgbClr val="8A9099"/>
                 </a:solidFill>
-                <a:latin typeface="微软雅黑" pitchFamily="34" charset="0"/>
-                <a:ea typeface="微软雅黑" pitchFamily="34" charset="-122"/>
-                <a:cs typeface="微软雅黑" pitchFamily="34" charset="-120"/>
+                <a:latin typeface="微软雅黑" panose="020B0503020204020204" pitchFamily="34" charset="-122"/>
+                <a:ea typeface="微软雅黑" panose="020B0503020204020204" pitchFamily="34" charset="-122"/>
+                <a:cs typeface="微软雅黑" panose="020B0503020204020204" pitchFamily="34" charset="-120"/>
               </a:rPr>
               <a:t>∧</a:t>
             </a:r>
@@ -6431,13 +6105,12 @@
             <a:avLst/>
           </a:prstGeom>
           <a:noFill/>
-          <a:ln/>
         </p:spPr>
         <p:txBody>
           <a:bodyPr wrap="square" rtlCol="0" anchor="ctr"/>
           <a:lstStyle/>
           <a:p>
-            <a:pPr algn="ctr" indent="0" marL="0">
+            <a:pPr marL="0" indent="0" algn="ctr">
               <a:buNone/>
             </a:pPr>
             <a:r>
@@ -6445,9 +6118,9 @@
                 <a:solidFill>
                   <a:srgbClr val="1F2329"/>
                 </a:solidFill>
-                <a:latin typeface="微软雅黑" pitchFamily="34" charset="0"/>
-                <a:ea typeface="微软雅黑" pitchFamily="34" charset="-122"/>
-                <a:cs typeface="微软雅黑" pitchFamily="34" charset="-120"/>
+                <a:latin typeface="微软雅黑" panose="020B0503020204020204" pitchFamily="34" charset="-122"/>
+                <a:ea typeface="微软雅黑" panose="020B0503020204020204" pitchFamily="34" charset="-122"/>
+                <a:cs typeface="微软雅黑" panose="020B0503020204020204" pitchFamily="34" charset="-120"/>
               </a:rPr>
               <a:t>p</a:t>
             </a:r>
@@ -6470,13 +6143,12 @@
             <a:avLst/>
           </a:prstGeom>
           <a:noFill/>
-          <a:ln/>
         </p:spPr>
         <p:txBody>
           <a:bodyPr wrap="square" rtlCol="0" anchor="ctr"/>
           <a:lstStyle/>
           <a:p>
-            <a:pPr algn="ctr" indent="0" marL="0">
+            <a:pPr marL="0" indent="0" algn="ctr">
               <a:buNone/>
             </a:pPr>
             <a:r>
@@ -6484,9 +6156,9 @@
                 <a:solidFill>
                   <a:srgbClr val="1F4E9C"/>
                 </a:solidFill>
-                <a:latin typeface="微软雅黑" pitchFamily="34" charset="0"/>
-                <a:ea typeface="微软雅黑" pitchFamily="34" charset="-122"/>
-                <a:cs typeface="微软雅黑" pitchFamily="34" charset="-120"/>
+                <a:latin typeface="微软雅黑" panose="020B0503020204020204" pitchFamily="34" charset="-122"/>
+                <a:ea typeface="微软雅黑" panose="020B0503020204020204" pitchFamily="34" charset="-122"/>
+                <a:cs typeface="微软雅黑" panose="020B0503020204020204" pitchFamily="34" charset="-120"/>
               </a:rPr>
               <a:t>→</a:t>
             </a:r>
@@ -6496,13 +6168,13 @@
       </p:sp>
       <p:sp>
         <p:nvSpPr>
-          <p:cNvPr id="11" name="Shape 9"/>
-          <p:cNvSpPr/>
-          <p:nvPr/>
-        </p:nvSpPr>
-        <p:spPr>
-          <a:xfrm>
-            <a:off x="5029048" y="2395728"/>
+          <p:cNvPr id="17" name="Shape 15"/>
+          <p:cNvSpPr/>
+          <p:nvPr/>
+        </p:nvSpPr>
+        <p:spPr>
+          <a:xfrm>
+            <a:off x="7162648" y="2395728"/>
             <a:ext cx="2133600" cy="713232"/>
           </a:xfrm>
           <a:prstGeom prst="rect">
@@ -6521,13 +6193,13 @@
       </p:sp>
       <p:sp>
         <p:nvSpPr>
-          <p:cNvPr id="12" name="Shape 10"/>
-          <p:cNvSpPr/>
-          <p:nvPr/>
-        </p:nvSpPr>
-        <p:spPr>
-          <a:xfrm>
-            <a:off x="5562448" y="2395728"/>
+          <p:cNvPr id="18" name="Shape 16"/>
+          <p:cNvSpPr/>
+          <p:nvPr/>
+        </p:nvSpPr>
+        <p:spPr>
+          <a:xfrm>
+            <a:off x="7696048" y="2395728"/>
             <a:ext cx="0" cy="713232"/>
           </a:xfrm>
           <a:prstGeom prst="line">
@@ -6544,13 +6216,13 @@
       </p:sp>
       <p:sp>
         <p:nvSpPr>
-          <p:cNvPr id="13" name="Shape 11"/>
-          <p:cNvSpPr/>
-          <p:nvPr/>
-        </p:nvSpPr>
-        <p:spPr>
-          <a:xfrm>
-            <a:off x="6629248" y="2395728"/>
+          <p:cNvPr id="19" name="Shape 17"/>
+          <p:cNvSpPr/>
+          <p:nvPr/>
+        </p:nvSpPr>
+        <p:spPr>
+          <a:xfrm>
+            <a:off x="8762848" y="2395728"/>
             <a:ext cx="0" cy="713232"/>
           </a:xfrm>
           <a:prstGeom prst="line">
@@ -6567,26 +6239,25 @@
       </p:sp>
       <p:sp>
         <p:nvSpPr>
-          <p:cNvPr id="14" name="Text 12"/>
-          <p:cNvSpPr/>
-          <p:nvPr/>
-        </p:nvSpPr>
-        <p:spPr>
-          <a:xfrm>
-            <a:off x="5029048" y="2395728"/>
+          <p:cNvPr id="20" name="Text 18"/>
+          <p:cNvSpPr/>
+          <p:nvPr/>
+        </p:nvSpPr>
+        <p:spPr>
+          <a:xfrm>
+            <a:off x="7162648" y="2395728"/>
             <a:ext cx="533400" cy="713232"/>
           </a:xfrm>
           <a:prstGeom prst="rect">
             <a:avLst/>
           </a:prstGeom>
           <a:noFill/>
-          <a:ln/>
         </p:spPr>
         <p:txBody>
           <a:bodyPr wrap="square" rtlCol="0" anchor="ctr"/>
           <a:lstStyle/>
           <a:p>
-            <a:pPr algn="ctr" indent="0" marL="0">
+            <a:pPr marL="0" indent="0" algn="ctr">
               <a:buNone/>
             </a:pPr>
             <a:r>
@@ -6594,9 +6265,9 @@
                 <a:solidFill>
                   <a:srgbClr val="1F4E9C"/>
                 </a:solidFill>
-                <a:latin typeface="微软雅黑" pitchFamily="34" charset="0"/>
-                <a:ea typeface="微软雅黑" pitchFamily="34" charset="-122"/>
-                <a:cs typeface="微软雅黑" pitchFamily="34" charset="-120"/>
+                <a:latin typeface="微软雅黑" panose="020B0503020204020204" pitchFamily="34" charset="-122"/>
+                <a:ea typeface="微软雅黑" panose="020B0503020204020204" pitchFamily="34" charset="-122"/>
+                <a:cs typeface="微软雅黑" panose="020B0503020204020204" pitchFamily="34" charset="-120"/>
               </a:rPr>
               <a:t>←</a:t>
             </a:r>
@@ -6606,26 +6277,25 @@
       </p:sp>
       <p:sp>
         <p:nvSpPr>
-          <p:cNvPr id="15" name="Text 13"/>
-          <p:cNvSpPr/>
-          <p:nvPr/>
-        </p:nvSpPr>
-        <p:spPr>
-          <a:xfrm>
-            <a:off x="5562448" y="2395728"/>
+          <p:cNvPr id="21" name="Text 19"/>
+          <p:cNvSpPr/>
+          <p:nvPr/>
+        </p:nvSpPr>
+        <p:spPr>
+          <a:xfrm>
+            <a:off x="7696048" y="2395728"/>
             <a:ext cx="1066800" cy="713232"/>
           </a:xfrm>
           <a:prstGeom prst="rect">
             <a:avLst/>
           </a:prstGeom>
           <a:noFill/>
-          <a:ln/>
         </p:spPr>
         <p:txBody>
           <a:bodyPr wrap="square" rtlCol="0" anchor="ctr"/>
           <a:lstStyle/>
           <a:p>
-            <a:pPr algn="ctr" indent="0" marL="0">
+            <a:pPr marL="0" indent="0" algn="ctr">
               <a:buNone/>
             </a:pPr>
             <a:r>
@@ -6633,11 +6303,11 @@
                 <a:solidFill>
                   <a:srgbClr val="1F2329"/>
                 </a:solidFill>
-                <a:latin typeface="微软雅黑" pitchFamily="34" charset="0"/>
-                <a:ea typeface="微软雅黑" pitchFamily="34" charset="-122"/>
-                <a:cs typeface="微软雅黑" pitchFamily="34" charset="-120"/>
-              </a:rPr>
-              <a:t>s</a:t>
+                <a:latin typeface="微软雅黑" panose="020B0503020204020204" pitchFamily="34" charset="-122"/>
+                <a:ea typeface="微软雅黑" panose="020B0503020204020204" pitchFamily="34" charset="-122"/>
+                <a:cs typeface="微软雅黑" panose="020B0503020204020204" pitchFamily="34" charset="-120"/>
+              </a:rPr>
+              <a:t>后</a:t>
             </a:r>
             <a:endParaRPr lang="en-US" sz="1000" dirty="0"/>
           </a:p>
@@ -6645,224 +6315,35 @@
       </p:sp>
       <p:sp>
         <p:nvSpPr>
-          <p:cNvPr id="16" name="Text 14"/>
-          <p:cNvSpPr/>
-          <p:nvPr/>
-        </p:nvSpPr>
-        <p:spPr>
-          <a:xfrm>
-            <a:off x="6629248" y="2395728"/>
+          <p:cNvPr id="22" name="Text 20"/>
+          <p:cNvSpPr/>
+          <p:nvPr/>
+        </p:nvSpPr>
+        <p:spPr>
+          <a:xfrm>
+            <a:off x="8762848" y="2395728"/>
             <a:ext cx="533400" cy="713232"/>
           </a:xfrm>
           <a:prstGeom prst="rect">
             <a:avLst/>
           </a:prstGeom>
           <a:noFill/>
-          <a:ln/>
         </p:spPr>
         <p:txBody>
           <a:bodyPr wrap="square" rtlCol="0" anchor="ctr"/>
           <a:lstStyle/>
           <a:p>
-            <a:pPr algn="ctr" indent="0" marL="0">
+            <a:pPr marL="0" indent="0" algn="ctr">
               <a:buNone/>
             </a:pPr>
             <a:r>
               <a:rPr lang="en-US" sz="1000" dirty="0">
                 <a:solidFill>
-                  <a:srgbClr val="1F4E9C"/>
-                </a:solidFill>
-                <a:latin typeface="微软雅黑" pitchFamily="34" charset="0"/>
-                <a:ea typeface="微软雅黑" pitchFamily="34" charset="-122"/>
-                <a:cs typeface="微软雅黑" pitchFamily="34" charset="-120"/>
-              </a:rPr>
-              <a:t>→</a:t>
-            </a:r>
-            <a:endParaRPr lang="en-US" sz="1000" dirty="0"/>
-          </a:p>
-        </p:txBody>
-      </p:sp>
-      <p:sp>
-        <p:nvSpPr>
-          <p:cNvPr id="17" name="Shape 15"/>
-          <p:cNvSpPr/>
-          <p:nvPr/>
-        </p:nvSpPr>
-        <p:spPr>
-          <a:xfrm>
-            <a:off x="7162648" y="2395728"/>
-            <a:ext cx="2133600" cy="713232"/>
-          </a:xfrm>
-          <a:prstGeom prst="rect">
-            <a:avLst/>
-          </a:prstGeom>
-          <a:solidFill>
-            <a:srgbClr val="FFFFFF"/>
-          </a:solidFill>
-          <a:ln w="12700">
-            <a:solidFill>
-              <a:srgbClr val="D8DBE0"/>
-            </a:solidFill>
-            <a:prstDash val="solid"/>
-          </a:ln>
-        </p:spPr>
-      </p:sp>
-      <p:sp>
-        <p:nvSpPr>
-          <p:cNvPr id="18" name="Shape 16"/>
-          <p:cNvSpPr/>
-          <p:nvPr/>
-        </p:nvSpPr>
-        <p:spPr>
-          <a:xfrm>
-            <a:off x="7696048" y="2395728"/>
-            <a:ext cx="0" cy="713232"/>
-          </a:xfrm>
-          <a:prstGeom prst="line">
-            <a:avLst/>
-          </a:prstGeom>
-          <a:noFill/>
-          <a:ln w="12700">
-            <a:solidFill>
-              <a:srgbClr val="D8DBE0"/>
-            </a:solidFill>
-            <a:prstDash val="solid"/>
-          </a:ln>
-        </p:spPr>
-      </p:sp>
-      <p:sp>
-        <p:nvSpPr>
-          <p:cNvPr id="19" name="Shape 17"/>
-          <p:cNvSpPr/>
-          <p:nvPr/>
-        </p:nvSpPr>
-        <p:spPr>
-          <a:xfrm>
-            <a:off x="8762848" y="2395728"/>
-            <a:ext cx="0" cy="713232"/>
-          </a:xfrm>
-          <a:prstGeom prst="line">
-            <a:avLst/>
-          </a:prstGeom>
-          <a:noFill/>
-          <a:ln w="12700">
-            <a:solidFill>
-              <a:srgbClr val="D8DBE0"/>
-            </a:solidFill>
-            <a:prstDash val="solid"/>
-          </a:ln>
-        </p:spPr>
-      </p:sp>
-      <p:sp>
-        <p:nvSpPr>
-          <p:cNvPr id="20" name="Text 18"/>
-          <p:cNvSpPr/>
-          <p:nvPr/>
-        </p:nvSpPr>
-        <p:spPr>
-          <a:xfrm>
-            <a:off x="7162648" y="2395728"/>
-            <a:ext cx="533400" cy="713232"/>
-          </a:xfrm>
-          <a:prstGeom prst="rect">
-            <a:avLst/>
-          </a:prstGeom>
-          <a:noFill/>
-          <a:ln/>
-        </p:spPr>
-        <p:txBody>
-          <a:bodyPr wrap="square" rtlCol="0" anchor="ctr"/>
-          <a:lstStyle/>
-          <a:p>
-            <a:pPr algn="ctr" indent="0" marL="0">
-              <a:buNone/>
-            </a:pPr>
-            <a:r>
-              <a:rPr lang="en-US" sz="1000" dirty="0">
-                <a:solidFill>
-                  <a:srgbClr val="1F4E9C"/>
-                </a:solidFill>
-                <a:latin typeface="微软雅黑" pitchFamily="34" charset="0"/>
-                <a:ea typeface="微软雅黑" pitchFamily="34" charset="-122"/>
-                <a:cs typeface="微软雅黑" pitchFamily="34" charset="-120"/>
-              </a:rPr>
-              <a:t>←</a:t>
-            </a:r>
-            <a:endParaRPr lang="en-US" sz="1000" dirty="0"/>
-          </a:p>
-        </p:txBody>
-      </p:sp>
-      <p:sp>
-        <p:nvSpPr>
-          <p:cNvPr id="21" name="Text 19"/>
-          <p:cNvSpPr/>
-          <p:nvPr/>
-        </p:nvSpPr>
-        <p:spPr>
-          <a:xfrm>
-            <a:off x="7696048" y="2395728"/>
-            <a:ext cx="1066800" cy="713232"/>
-          </a:xfrm>
-          <a:prstGeom prst="rect">
-            <a:avLst/>
-          </a:prstGeom>
-          <a:noFill/>
-          <a:ln/>
-        </p:spPr>
-        <p:txBody>
-          <a:bodyPr wrap="square" rtlCol="0" anchor="ctr"/>
-          <a:lstStyle/>
-          <a:p>
-            <a:pPr algn="ctr" indent="0" marL="0">
-              <a:buNone/>
-            </a:pPr>
-            <a:r>
-              <a:rPr lang="en-US" sz="1000" dirty="0">
-                <a:solidFill>
-                  <a:srgbClr val="1F2329"/>
-                </a:solidFill>
-                <a:latin typeface="微软雅黑" pitchFamily="34" charset="0"/>
-                <a:ea typeface="微软雅黑" pitchFamily="34" charset="-122"/>
-                <a:cs typeface="微软雅黑" pitchFamily="34" charset="-120"/>
-              </a:rPr>
-              <a:t>后</a:t>
-            </a:r>
-            <a:endParaRPr lang="en-US" sz="1000" dirty="0"/>
-          </a:p>
-        </p:txBody>
-      </p:sp>
-      <p:sp>
-        <p:nvSpPr>
-          <p:cNvPr id="22" name="Text 20"/>
-          <p:cNvSpPr/>
-          <p:nvPr/>
-        </p:nvSpPr>
-        <p:spPr>
-          <a:xfrm>
-            <a:off x="8762848" y="2395728"/>
-            <a:ext cx="533400" cy="713232"/>
-          </a:xfrm>
-          <a:prstGeom prst="rect">
-            <a:avLst/>
-          </a:prstGeom>
-          <a:noFill/>
-          <a:ln/>
-        </p:spPr>
-        <p:txBody>
-          <a:bodyPr wrap="square" rtlCol="0" anchor="ctr"/>
-          <a:lstStyle/>
-          <a:p>
-            <a:pPr algn="ctr" indent="0" marL="0">
-              <a:buNone/>
-            </a:pPr>
-            <a:r>
-              <a:rPr lang="en-US" sz="1000" dirty="0">
-                <a:solidFill>
                   <a:srgbClr val="8A9099"/>
                 </a:solidFill>
-                <a:latin typeface="微软雅黑" pitchFamily="34" charset="0"/>
-                <a:ea typeface="微软雅黑" pitchFamily="34" charset="-122"/>
-                <a:cs typeface="微软雅黑" pitchFamily="34" charset="-120"/>
+                <a:latin typeface="微软雅黑" panose="020B0503020204020204" pitchFamily="34" charset="-122"/>
+                <a:ea typeface="微软雅黑" panose="020B0503020204020204" pitchFamily="34" charset="-122"/>
+                <a:cs typeface="微软雅黑" panose="020B0503020204020204" pitchFamily="34" charset="-120"/>
               </a:rPr>
               <a:t>∧</a:t>
             </a:r>
@@ -6885,13 +6366,12 @@
             <a:avLst/>
           </a:prstGeom>
           <a:noFill/>
-          <a:ln/>
         </p:spPr>
         <p:txBody>
           <a:bodyPr wrap="square" rtlCol="0" anchor="t"/>
           <a:lstStyle/>
           <a:p>
-            <a:pPr algn="l" indent="0" marL="0">
+            <a:pPr marL="0" indent="0" algn="l">
               <a:lnSpc>
                 <a:spcPct val="115000"/>
               </a:lnSpc>
@@ -6902,25 +6382,68 @@
                 <a:solidFill>
                   <a:srgbClr val="1F4E9C"/>
                 </a:solidFill>
-                <a:latin typeface="微软雅黑" pitchFamily="34" charset="0"/>
-                <a:ea typeface="微软雅黑" pitchFamily="34" charset="-122"/>
-                <a:cs typeface="微软雅黑" pitchFamily="34" charset="-120"/>
+                <a:latin typeface="微软雅黑" panose="020B0503020204020204" pitchFamily="34" charset="-122"/>
+                <a:ea typeface="微软雅黑" panose="020B0503020204020204" pitchFamily="34" charset="-122"/>
+                <a:cs typeface="微软雅黑" panose="020B0503020204020204" pitchFamily="34" charset="-120"/>
               </a:rPr>
               <a:t>•  </a:t>
             </a:r>
-            <a:pPr algn="l" indent="0" marL="0">
+            <a:r>
+              <a:rPr lang="en-US" sz="1400" dirty="0">
+                <a:solidFill>
+                  <a:srgbClr val="000000"/>
+                </a:solidFill>
+              </a:rPr>
+              <a:t>① s-&gt;next = p-&gt;next：新结点 s 的 next 指向 p 原来的后继</a:t>
+            </a:r>
+            <a:endParaRPr lang="en-US" sz="1400" dirty="0"/>
+          </a:p>
+        </p:txBody>
+      </p:sp>
+      <p:sp>
+        <p:nvSpPr>
+          <p:cNvPr id="24" name="Text 22"/>
+          <p:cNvSpPr/>
+          <p:nvPr/>
+        </p:nvSpPr>
+        <p:spPr>
+          <a:xfrm>
+            <a:off x="896112" y="4162044"/>
+            <a:ext cx="10454335" cy="321564"/>
+          </a:xfrm>
+          <a:prstGeom prst="rect">
+            <a:avLst/>
+          </a:prstGeom>
+          <a:noFill/>
+        </p:spPr>
+        <p:txBody>
+          <a:bodyPr wrap="square" rtlCol="0" anchor="t"/>
+          <a:lstStyle/>
+          <a:p>
+            <a:pPr marL="0" indent="0" algn="l">
               <a:lnSpc>
                 <a:spcPct val="115000"/>
               </a:lnSpc>
               <a:buNone/>
             </a:pPr>
             <a:r>
+              <a:rPr lang="en-US" sz="1400" b="1" dirty="0">
+                <a:solidFill>
+                  <a:srgbClr val="1F4E9C"/>
+                </a:solidFill>
+                <a:latin typeface="微软雅黑" panose="020B0503020204020204" pitchFamily="34" charset="-122"/>
+                <a:ea typeface="微软雅黑" panose="020B0503020204020204" pitchFamily="34" charset="-122"/>
+                <a:cs typeface="微软雅黑" panose="020B0503020204020204" pitchFamily="34" charset="-120"/>
+              </a:rPr>
+              <a:t>•  </a:t>
+            </a:r>
+            <a:r>
               <a:rPr lang="en-US" sz="1400" dirty="0">
                 <a:solidFill>
                   <a:srgbClr val="000000"/>
                 </a:solidFill>
               </a:rPr>
-              <a:t>① s-&gt;next = p-&gt;next：新结点 s 的 next 指向 p 原来的后继</a:t>
+              <a:t>② s-&gt;prior = p：s 的 prior 指回 p</a:t>
             </a:r>
             <a:endParaRPr lang="en-US" sz="1400" dirty="0"/>
           </a:p>
@@ -6928,26 +6451,25 @@
       </p:sp>
       <p:sp>
         <p:nvSpPr>
-          <p:cNvPr id="24" name="Text 22"/>
-          <p:cNvSpPr/>
-          <p:nvPr/>
-        </p:nvSpPr>
-        <p:spPr>
-          <a:xfrm>
-            <a:off x="896112" y="4162044"/>
+          <p:cNvPr id="25" name="Text 23"/>
+          <p:cNvSpPr/>
+          <p:nvPr/>
+        </p:nvSpPr>
+        <p:spPr>
+          <a:xfrm>
+            <a:off x="896112" y="4556760"/>
             <a:ext cx="10454335" cy="321564"/>
           </a:xfrm>
           <a:prstGeom prst="rect">
             <a:avLst/>
           </a:prstGeom>
           <a:noFill/>
-          <a:ln/>
         </p:spPr>
         <p:txBody>
           <a:bodyPr wrap="square" rtlCol="0" anchor="t"/>
           <a:lstStyle/>
           <a:p>
-            <a:pPr algn="l" indent="0" marL="0">
+            <a:pPr marL="0" indent="0" algn="l">
               <a:lnSpc>
                 <a:spcPct val="115000"/>
               </a:lnSpc>
@@ -6958,178 +6480,70 @@
                 <a:solidFill>
                   <a:srgbClr val="1F4E9C"/>
                 </a:solidFill>
-                <a:latin typeface="微软雅黑" pitchFamily="34" charset="0"/>
-                <a:ea typeface="微软雅黑" pitchFamily="34" charset="-122"/>
-                <a:cs typeface="微软雅黑" pitchFamily="34" charset="-120"/>
+                <a:latin typeface="微软雅黑" panose="020B0503020204020204" pitchFamily="34" charset="-122"/>
+                <a:ea typeface="微软雅黑" panose="020B0503020204020204" pitchFamily="34" charset="-122"/>
+                <a:cs typeface="微软雅黑" panose="020B0503020204020204" pitchFamily="34" charset="-120"/>
               </a:rPr>
               <a:t>•  </a:t>
             </a:r>
-            <a:pPr algn="l" indent="0" marL="0">
+            <a:r>
+              <a:rPr lang="en-US" sz="1400" dirty="0">
+                <a:solidFill>
+                  <a:srgbClr val="000000"/>
+                </a:solidFill>
+              </a:rPr>
+              <a:t>③ p-&gt;next-&gt;prior = s：p 的原后继，把它的 prior 改成指向 s</a:t>
+            </a:r>
+            <a:endParaRPr lang="en-US" sz="1400" dirty="0"/>
+          </a:p>
+        </p:txBody>
+      </p:sp>
+      <p:sp>
+        <p:nvSpPr>
+          <p:cNvPr id="26" name="Text 24"/>
+          <p:cNvSpPr/>
+          <p:nvPr/>
+        </p:nvSpPr>
+        <p:spPr>
+          <a:xfrm>
+            <a:off x="896112" y="4951476"/>
+            <a:ext cx="10454335" cy="321564"/>
+          </a:xfrm>
+          <a:prstGeom prst="rect">
+            <a:avLst/>
+          </a:prstGeom>
+          <a:noFill/>
+        </p:spPr>
+        <p:txBody>
+          <a:bodyPr wrap="square" rtlCol="0" anchor="t"/>
+          <a:lstStyle/>
+          <a:p>
+            <a:pPr marL="0" indent="0" algn="l">
               <a:lnSpc>
                 <a:spcPct val="115000"/>
               </a:lnSpc>
               <a:buNone/>
             </a:pPr>
             <a:r>
+              <a:rPr lang="en-US" sz="1400" b="1" dirty="0">
+                <a:solidFill>
+                  <a:srgbClr val="1F4E9C"/>
+                </a:solidFill>
+                <a:latin typeface="微软雅黑" panose="020B0503020204020204" pitchFamily="34" charset="-122"/>
+                <a:ea typeface="微软雅黑" panose="020B0503020204020204" pitchFamily="34" charset="-122"/>
+                <a:cs typeface="微软雅黑" panose="020B0503020204020204" pitchFamily="34" charset="-120"/>
+              </a:rPr>
+              <a:t>•  </a:t>
+            </a:r>
+            <a:r>
               <a:rPr lang="en-US" sz="1400" dirty="0">
                 <a:solidFill>
                   <a:srgbClr val="000000"/>
                 </a:solidFill>
               </a:rPr>
-              <a:t>② s-&gt;prior = p：s 的 prior 指回 p</a:t>
+              <a:t>④ p-&gt;next = s：p 的 next 改指 s，插入完成</a:t>
             </a:r>
             <a:endParaRPr lang="en-US" sz="1400" dirty="0"/>
-          </a:p>
-        </p:txBody>
-      </p:sp>
-      <p:sp>
-        <p:nvSpPr>
-          <p:cNvPr id="25" name="Text 23"/>
-          <p:cNvSpPr/>
-          <p:nvPr/>
-        </p:nvSpPr>
-        <p:spPr>
-          <a:xfrm>
-            <a:off x="896112" y="4556760"/>
-            <a:ext cx="10454335" cy="321564"/>
-          </a:xfrm>
-          <a:prstGeom prst="rect">
-            <a:avLst/>
-          </a:prstGeom>
-          <a:noFill/>
-          <a:ln/>
-        </p:spPr>
-        <p:txBody>
-          <a:bodyPr wrap="square" rtlCol="0" anchor="t"/>
-          <a:lstStyle/>
-          <a:p>
-            <a:pPr algn="l" indent="0" marL="0">
-              <a:lnSpc>
-                <a:spcPct val="115000"/>
-              </a:lnSpc>
-              <a:buNone/>
-            </a:pPr>
-            <a:r>
-              <a:rPr lang="en-US" sz="1400" b="1" dirty="0">
-                <a:solidFill>
-                  <a:srgbClr val="1F4E9C"/>
-                </a:solidFill>
-                <a:latin typeface="微软雅黑" pitchFamily="34" charset="0"/>
-                <a:ea typeface="微软雅黑" pitchFamily="34" charset="-122"/>
-                <a:cs typeface="微软雅黑" pitchFamily="34" charset="-120"/>
-              </a:rPr>
-              <a:t>•  </a:t>
-            </a:r>
-            <a:pPr algn="l" indent="0" marL="0">
-              <a:lnSpc>
-                <a:spcPct val="115000"/>
-              </a:lnSpc>
-              <a:buNone/>
-            </a:pPr>
-            <a:r>
-              <a:rPr lang="en-US" sz="1400" dirty="0">
-                <a:solidFill>
-                  <a:srgbClr val="000000"/>
-                </a:solidFill>
-              </a:rPr>
-              <a:t>③ p-&gt;next-&gt;prior = s：p 的原后继，把它的 prior 改成指向 s</a:t>
-            </a:r>
-            <a:endParaRPr lang="en-US" sz="1400" dirty="0"/>
-          </a:p>
-        </p:txBody>
-      </p:sp>
-      <p:sp>
-        <p:nvSpPr>
-          <p:cNvPr id="26" name="Text 24"/>
-          <p:cNvSpPr/>
-          <p:nvPr/>
-        </p:nvSpPr>
-        <p:spPr>
-          <a:xfrm>
-            <a:off x="896112" y="4951476"/>
-            <a:ext cx="10454335" cy="321564"/>
-          </a:xfrm>
-          <a:prstGeom prst="rect">
-            <a:avLst/>
-          </a:prstGeom>
-          <a:noFill/>
-          <a:ln/>
-        </p:spPr>
-        <p:txBody>
-          <a:bodyPr wrap="square" rtlCol="0" anchor="t"/>
-          <a:lstStyle/>
-          <a:p>
-            <a:pPr algn="l" indent="0" marL="0">
-              <a:lnSpc>
-                <a:spcPct val="115000"/>
-              </a:lnSpc>
-              <a:buNone/>
-            </a:pPr>
-            <a:r>
-              <a:rPr lang="en-US" sz="1400" b="1" dirty="0">
-                <a:solidFill>
-                  <a:srgbClr val="1F4E9C"/>
-                </a:solidFill>
-                <a:latin typeface="微软雅黑" pitchFamily="34" charset="0"/>
-                <a:ea typeface="微软雅黑" pitchFamily="34" charset="-122"/>
-                <a:cs typeface="微软雅黑" pitchFamily="34" charset="-120"/>
-              </a:rPr>
-              <a:t>•  </a:t>
-            </a:r>
-            <a:pPr algn="l" indent="0" marL="0">
-              <a:lnSpc>
-                <a:spcPct val="115000"/>
-              </a:lnSpc>
-              <a:buNone/>
-            </a:pPr>
-            <a:r>
-              <a:rPr lang="en-US" sz="1400" dirty="0">
-                <a:solidFill>
-                  <a:srgbClr val="000000"/>
-                </a:solidFill>
-              </a:rPr>
-              <a:t>④ p-&gt;next = s：p 的 next 改指 s，插入完成</a:t>
-            </a:r>
-            <a:endParaRPr lang="en-US" sz="1400" dirty="0"/>
-          </a:p>
-        </p:txBody>
-      </p:sp>
-      <p:sp>
-        <p:nvSpPr>
-          <p:cNvPr id="27" name="Text 25"/>
-          <p:cNvSpPr/>
-          <p:nvPr/>
-        </p:nvSpPr>
-        <p:spPr>
-          <a:xfrm>
-            <a:off x="822960" y="5437632"/>
-            <a:ext cx="10545775" cy="530352"/>
-          </a:xfrm>
-          <a:prstGeom prst="rect">
-            <a:avLst/>
-          </a:prstGeom>
-          <a:noFill/>
-          <a:ln/>
-        </p:spPr>
-        <p:txBody>
-          <a:bodyPr wrap="square" rtlCol="0" anchor="t"/>
-          <a:lstStyle/>
-          <a:p>
-            <a:pPr algn="l" indent="0" marL="0">
-              <a:buNone/>
-            </a:pPr>
-            <a:r>
-              <a:rPr lang="en-US" sz="1200" dirty="0">
-                <a:solidFill>
-                  <a:srgbClr val="8A9099"/>
-                </a:solidFill>
-                <a:latin typeface="微软雅黑" pitchFamily="34" charset="0"/>
-                <a:ea typeface="微软雅黑" pitchFamily="34" charset="-122"/>
-                <a:cs typeface="微软雅黑" pitchFamily="34" charset="-120"/>
-              </a:rPr>
-              <a:t>若先做④再做③：p-&gt;next 已经变成 s，③ 就写成 s-&gt;prior=s，改了 s 自己，原后继的 prior 永远改不到，双向就断了</a:t>
-            </a:r>
-            <a:endParaRPr lang="en-US" sz="1200" dirty="0"/>
           </a:p>
         </p:txBody>
       </p:sp>
@@ -7143,7 +6557,7 @@
 
 <file path=ppt/slides/slide6.xml><?xml version="1.0" encoding="utf-8"?>
 <p:sld xmlns:a="http://schemas.openxmlformats.org/drawingml/2006/main" xmlns:r="http://schemas.openxmlformats.org/officeDocument/2006/relationships" xmlns:p="http://schemas.openxmlformats.org/presentationml/2006/main">
-  <p:cSld name="Slide 6">
+  <p:cSld>
     <p:bg>
       <p:bgPr>
         <a:blipFill dpi="0" rotWithShape="1">
@@ -7187,13 +6601,12 @@
             <a:avLst/>
           </a:prstGeom>
           <a:noFill/>
-          <a:ln/>
         </p:spPr>
         <p:txBody>
           <a:bodyPr wrap="square" rtlCol="0" anchor="ctr"/>
           <a:lstStyle/>
           <a:p>
-            <a:pPr algn="r" indent="0" marL="0">
+            <a:pPr marL="0" indent="0" algn="r">
               <a:buNone/>
             </a:pPr>
             <a:r>
@@ -7201,9 +6614,9 @@
                 <a:solidFill>
                   <a:srgbClr val="8A9099"/>
                 </a:solidFill>
-                <a:latin typeface="微软雅黑" pitchFamily="34" charset="0"/>
-                <a:ea typeface="微软雅黑" pitchFamily="34" charset="-122"/>
-                <a:cs typeface="微软雅黑" pitchFamily="34" charset="-120"/>
+                <a:latin typeface="微软雅黑" panose="020B0503020204020204" pitchFamily="34" charset="-122"/>
+                <a:ea typeface="微软雅黑" panose="020B0503020204020204" pitchFamily="34" charset="-122"/>
+                <a:cs typeface="微软雅黑" panose="020B0503020204020204" pitchFamily="34" charset="-120"/>
               </a:rPr>
               <a:t>6 / 14</a:t>
             </a:r>
@@ -7226,13 +6639,12 @@
             <a:avLst/>
           </a:prstGeom>
           <a:noFill/>
-          <a:ln/>
         </p:spPr>
         <p:txBody>
           <a:bodyPr wrap="square" rtlCol="0" anchor="ctr"/>
           <a:lstStyle/>
           <a:p>
-            <a:pPr algn="l" indent="0" marL="0">
+            <a:pPr marL="0" indent="0" algn="l">
               <a:buNone/>
             </a:pPr>
             <a:r>
@@ -7240,9 +6652,9 @@
                 <a:solidFill>
                   <a:srgbClr val="1F4E9C"/>
                 </a:solidFill>
-                <a:latin typeface="微软雅黑" pitchFamily="34" charset="0"/>
-                <a:ea typeface="微软雅黑" pitchFamily="34" charset="-122"/>
-                <a:cs typeface="微软雅黑" pitchFamily="34" charset="-120"/>
+                <a:latin typeface="微软雅黑" panose="020B0503020204020204" pitchFamily="34" charset="-122"/>
+                <a:ea typeface="微软雅黑" panose="020B0503020204020204" pitchFamily="34" charset="-122"/>
+                <a:cs typeface="微软雅黑" panose="020B0503020204020204" pitchFamily="34" charset="-120"/>
               </a:rPr>
               <a:t>双链表 · 删除</a:t>
             </a:r>
@@ -7265,13 +6677,12 @@
             <a:avLst/>
           </a:prstGeom>
           <a:noFill/>
-          <a:ln/>
         </p:spPr>
         <p:txBody>
           <a:bodyPr wrap="square" rtlCol="0" anchor="ctr"/>
           <a:lstStyle/>
           <a:p>
-            <a:pPr algn="l" indent="0" marL="0">
+            <a:pPr marL="0" indent="0" algn="l">
               <a:buNone/>
             </a:pPr>
             <a:r>
@@ -7279,9 +6690,9 @@
                 <a:solidFill>
                   <a:srgbClr val="1F2329"/>
                 </a:solidFill>
-                <a:latin typeface="微软雅黑" pitchFamily="34" charset="0"/>
-                <a:ea typeface="微软雅黑" pitchFamily="34" charset="-122"/>
-                <a:cs typeface="微软雅黑" pitchFamily="34" charset="-120"/>
+                <a:latin typeface="微软雅黑" panose="020B0503020204020204" pitchFamily="34" charset="-122"/>
+                <a:ea typeface="微软雅黑" panose="020B0503020204020204" pitchFamily="34" charset="-122"/>
+                <a:cs typeface="微软雅黑" panose="020B0503020204020204" pitchFamily="34" charset="-120"/>
               </a:rPr>
               <a:t>双链表删除：跨过 s，两边都要接好</a:t>
             </a:r>
@@ -7306,7 +6717,6 @@
           <a:solidFill>
             <a:srgbClr val="F7F9FC"/>
           </a:solidFill>
-          <a:ln/>
         </p:spPr>
       </p:sp>
       <p:sp>
@@ -7326,7 +6736,6 @@
           <a:solidFill>
             <a:srgbClr val="1F4E9C"/>
           </a:solidFill>
-          <a:ln/>
         </p:spPr>
       </p:sp>
       <p:sp>
@@ -7344,13 +6753,12 @@
             <a:avLst/>
           </a:prstGeom>
           <a:noFill/>
-          <a:ln/>
         </p:spPr>
         <p:txBody>
           <a:bodyPr wrap="square" rtlCol="0" anchor="t"/>
           <a:lstStyle/>
           <a:p>
-            <a:pPr algn="l" indent="0" marL="0">
+            <a:pPr marL="0" indent="0" algn="l">
               <a:lnSpc>
                 <a:spcPct val="125000"/>
               </a:lnSpc>
@@ -7361,9 +6769,9 @@
                 <a:solidFill>
                   <a:srgbClr val="1F2329"/>
                 </a:solidFill>
-                <a:latin typeface="Consolas" pitchFamily="34" charset="0"/>
-                <a:ea typeface="Consolas" pitchFamily="34" charset="-122"/>
-                <a:cs typeface="Consolas" pitchFamily="34" charset="-120"/>
+                <a:latin typeface="Consolas" panose="020B0609020204030204" pitchFamily="34" charset="0"/>
+                <a:ea typeface="Consolas" panose="020B0609020204030204" pitchFamily="34" charset="-122"/>
+                <a:cs typeface="Consolas" panose="020B0609020204030204" pitchFamily="34" charset="-120"/>
               </a:rPr>
               <a:t>bool ListDelete(DLinkList &amp;L, int i, int &amp;elem){
     DNode *p = GetElem(L, i - 1);          // 找前驱
@@ -7397,13 +6805,12 @@
             <a:avLst/>
           </a:prstGeom>
           <a:noFill/>
-          <a:ln/>
         </p:spPr>
         <p:txBody>
           <a:bodyPr wrap="square" rtlCol="0" anchor="t"/>
           <a:lstStyle/>
           <a:p>
-            <a:pPr algn="l" indent="0" marL="0">
+            <a:pPr marL="0" indent="0" algn="l">
               <a:buNone/>
             </a:pPr>
             <a:r>
@@ -7411,9 +6818,9 @@
                 <a:solidFill>
                   <a:srgbClr val="8A9099"/>
                 </a:solidFill>
-                <a:latin typeface="微软雅黑" pitchFamily="34" charset="0"/>
-                <a:ea typeface="微软雅黑" pitchFamily="34" charset="-122"/>
-                <a:cs typeface="微软雅黑" pitchFamily="34" charset="-120"/>
+                <a:latin typeface="微软雅黑" panose="020B0503020204020204" pitchFamily="34" charset="-122"/>
+                <a:ea typeface="微软雅黑" panose="020B0503020204020204" pitchFamily="34" charset="-122"/>
+                <a:cs typeface="微软雅黑" panose="020B0503020204020204" pitchFamily="34" charset="-120"/>
               </a:rPr>
               <a:t>比单链表删除多一句：后继的 prior 要改指 p；删的是尾结点时没有后继，所以要判 s-&gt;next != NULL</a:t>
             </a:r>
@@ -7431,7 +6838,7 @@
 
 <file path=ppt/slides/slide7.xml><?xml version="1.0" encoding="utf-8"?>
 <p:sld xmlns:a="http://schemas.openxmlformats.org/drawingml/2006/main" xmlns:r="http://schemas.openxmlformats.org/officeDocument/2006/relationships" xmlns:p="http://schemas.openxmlformats.org/presentationml/2006/main">
-  <p:cSld name="Slide 7">
+  <p:cSld>
     <p:bg>
       <p:bgPr>
         <a:blipFill dpi="0" rotWithShape="1">
@@ -7475,13 +6882,12 @@
             <a:avLst/>
           </a:prstGeom>
           <a:noFill/>
-          <a:ln/>
         </p:spPr>
         <p:txBody>
           <a:bodyPr wrap="square" rtlCol="0" anchor="ctr"/>
           <a:lstStyle/>
           <a:p>
-            <a:pPr algn="r" indent="0" marL="0">
+            <a:pPr marL="0" indent="0" algn="r">
               <a:buNone/>
             </a:pPr>
             <a:r>
@@ -7489,9 +6895,9 @@
                 <a:solidFill>
                   <a:srgbClr val="8A9099"/>
                 </a:solidFill>
-                <a:latin typeface="微软雅黑" pitchFamily="34" charset="0"/>
-                <a:ea typeface="微软雅黑" pitchFamily="34" charset="-122"/>
-                <a:cs typeface="微软雅黑" pitchFamily="34" charset="-120"/>
+                <a:latin typeface="微软雅黑" panose="020B0503020204020204" pitchFamily="34" charset="-122"/>
+                <a:ea typeface="微软雅黑" panose="020B0503020204020204" pitchFamily="34" charset="-122"/>
+                <a:cs typeface="微软雅黑" panose="020B0503020204020204" pitchFamily="34" charset="-120"/>
               </a:rPr>
               <a:t>7 / 14</a:t>
             </a:r>
@@ -7514,13 +6920,12 @@
             <a:avLst/>
           </a:prstGeom>
           <a:noFill/>
-          <a:ln/>
         </p:spPr>
         <p:txBody>
           <a:bodyPr wrap="square" rtlCol="0" anchor="ctr"/>
           <a:lstStyle/>
           <a:p>
-            <a:pPr algn="l" indent="0" marL="0">
+            <a:pPr marL="0" indent="0" algn="l">
               <a:buNone/>
             </a:pPr>
             <a:r>
@@ -7528,9 +6933,9 @@
                 <a:solidFill>
                   <a:srgbClr val="1F4E9C"/>
                 </a:solidFill>
-                <a:latin typeface="微软雅黑" pitchFamily="34" charset="0"/>
-                <a:ea typeface="微软雅黑" pitchFamily="34" charset="-122"/>
-                <a:cs typeface="微软雅黑" pitchFamily="34" charset="-120"/>
+                <a:latin typeface="微软雅黑" panose="020B0503020204020204" pitchFamily="34" charset="-122"/>
+                <a:ea typeface="微软雅黑" panose="020B0503020204020204" pitchFamily="34" charset="-122"/>
+                <a:cs typeface="微软雅黑" panose="020B0503020204020204" pitchFamily="34" charset="-120"/>
               </a:rPr>
               <a:t>循环单链表</a:t>
             </a:r>
@@ -7553,13 +6958,12 @@
             <a:avLst/>
           </a:prstGeom>
           <a:noFill/>
-          <a:ln/>
         </p:spPr>
         <p:txBody>
           <a:bodyPr wrap="square" rtlCol="0" anchor="ctr"/>
           <a:lstStyle/>
           <a:p>
-            <a:pPr algn="l" indent="0" marL="0">
+            <a:pPr marL="0" indent="0" algn="l">
               <a:buNone/>
             </a:pPr>
             <a:r>
@@ -7567,9 +6971,9 @@
                 <a:solidFill>
                   <a:srgbClr val="1F2329"/>
                 </a:solidFill>
-                <a:latin typeface="微软雅黑" pitchFamily="34" charset="0"/>
-                <a:ea typeface="微软雅黑" pitchFamily="34" charset="-122"/>
-                <a:cs typeface="微软雅黑" pitchFamily="34" charset="-120"/>
+                <a:latin typeface="微软雅黑" panose="020B0503020204020204" pitchFamily="34" charset="-122"/>
+                <a:ea typeface="微软雅黑" panose="020B0503020204020204" pitchFamily="34" charset="-122"/>
+                <a:cs typeface="微软雅黑" panose="020B0503020204020204" pitchFamily="34" charset="-120"/>
               </a:rPr>
               <a:t>循环单链表：尾巴接回头，三处变了</a:t>
             </a:r>
@@ -7583,17 +6987,11 @@
           <p:cNvGraphicFramePr>
             <a:graphicFrameLocks noGrp="1"/>
           </p:cNvGraphicFramePr>
-          <p:nvPr>
-            <p:extLst>
-              <p:ext uri="{D42A27DB-BD31-4B8C-83A1-F6EECF244321}">
-                <p14:modId xmlns:p14="http://schemas.microsoft.com/office/powerpoint/2010/main" val="1579011935"/>
-              </p:ext>
-            </p:extLst>
-          </p:nvPr>
+          <p:nvPr/>
         </p:nvGraphicFramePr>
         <p:xfrm>
           <a:off x="822960" y="2395728"/>
-          <a:ext cx="10545775" cy="914400"/>
+          <a:ext cx="10545775" cy="1682496"/>
         </p:xfrm>
         <a:graphic>
           <a:graphicData uri="http://schemas.openxmlformats.org/drawingml/2006/table">
@@ -7610,7 +7008,7 @@
                     <a:bodyPr/>
                     <a:lstStyle/>
                     <a:p>
-                      <a:pPr algn="ctr" indent="0" marL="0">
+                      <a:pPr marL="0" indent="0" algn="ctr">
                         <a:buNone/>
                       </a:pPr>
                       <a:r>
@@ -7618,20 +7016,20 @@
                           <a:solidFill>
                             <a:srgbClr val="1F4E9C"/>
                           </a:solidFill>
-                          <a:latin typeface="微软雅黑" pitchFamily="34" charset="0"/>
-                          <a:ea typeface="微软雅黑" pitchFamily="34" charset="-122"/>
-                          <a:cs typeface="微软雅黑" pitchFamily="34" charset="-120"/>
+                          <a:latin typeface="微软雅黑" panose="020B0503020204020204" pitchFamily="34" charset="-122"/>
+                          <a:ea typeface="微软雅黑" panose="020B0503020204020204" pitchFamily="34" charset="-122"/>
+                          <a:cs typeface="微软雅黑" panose="020B0503020204020204" pitchFamily="34" charset="-120"/>
                         </a:rPr>
                         <a:t>动作</a:t>
                       </a:r>
                       <a:endParaRPr lang="en-US" sz="1500" dirty="0">
-                        <a:latin typeface="微软雅黑" charset="0"/>
-                        <a:ea typeface="微软雅黑" charset="0"/>
-                        <a:cs typeface="微软雅黑" charset="0"/>
+                        <a:latin typeface="微软雅黑" panose="020B0503020204020204" pitchFamily="34" charset="-122"/>
+                        <a:ea typeface="微软雅黑" panose="020B0503020204020204" pitchFamily="34" charset="-122"/>
+                        <a:cs typeface="微软雅黑" panose="020B0503020204020204" pitchFamily="34" charset="-122"/>
                       </a:endParaRPr>
                     </a:p>
                   </a:txBody>
-                  <a:tcPr marL="91440" marR="91440" marT="45720" marB="45720" anchor="ctr">
+                  <a:tcPr anchor="ctr">
                     <a:lnL w="9525" cap="flat" cmpd="sng" algn="ctr">
                       <a:solidFill>
                         <a:srgbClr val="D8DBE0"/>
@@ -7678,7 +7076,7 @@
                     <a:bodyPr/>
                     <a:lstStyle/>
                     <a:p>
-                      <a:pPr algn="ctr" indent="0" marL="0">
+                      <a:pPr marL="0" indent="0" algn="ctr">
                         <a:buNone/>
                       </a:pPr>
                       <a:r>
@@ -7686,20 +7084,20 @@
                           <a:solidFill>
                             <a:srgbClr val="1F4E9C"/>
                           </a:solidFill>
-                          <a:latin typeface="微软雅黑" pitchFamily="34" charset="0"/>
-                          <a:ea typeface="微软雅黑" pitchFamily="34" charset="-122"/>
-                          <a:cs typeface="微软雅黑" pitchFamily="34" charset="-120"/>
+                          <a:latin typeface="微软雅黑" panose="020B0503020204020204" pitchFamily="34" charset="-122"/>
+                          <a:ea typeface="微软雅黑" panose="020B0503020204020204" pitchFamily="34" charset="-122"/>
+                          <a:cs typeface="微软雅黑" panose="020B0503020204020204" pitchFamily="34" charset="-120"/>
                         </a:rPr>
                         <a:t>单链表</a:t>
                       </a:r>
                       <a:endParaRPr lang="en-US" sz="1500" dirty="0">
-                        <a:latin typeface="微软雅黑" charset="0"/>
-                        <a:ea typeface="微软雅黑" charset="0"/>
-                        <a:cs typeface="微软雅黑" charset="0"/>
+                        <a:latin typeface="微软雅黑" panose="020B0503020204020204" pitchFamily="34" charset="-122"/>
+                        <a:ea typeface="微软雅黑" panose="020B0503020204020204" pitchFamily="34" charset="-122"/>
+                        <a:cs typeface="微软雅黑" panose="020B0503020204020204" pitchFamily="34" charset="-122"/>
                       </a:endParaRPr>
                     </a:p>
                   </a:txBody>
-                  <a:tcPr marL="91440" marR="91440" marT="45720" marB="45720" anchor="ctr">
+                  <a:tcPr anchor="ctr">
                     <a:lnL w="9525" cap="flat" cmpd="sng" algn="ctr">
                       <a:solidFill>
                         <a:srgbClr val="D8DBE0"/>
@@ -7746,7 +7144,7 @@
                     <a:bodyPr/>
                     <a:lstStyle/>
                     <a:p>
-                      <a:pPr algn="ctr" indent="0" marL="0">
+                      <a:pPr marL="0" indent="0" algn="ctr">
                         <a:buNone/>
                       </a:pPr>
                       <a:r>
@@ -7754,20 +7152,20 @@
                           <a:solidFill>
                             <a:srgbClr val="1F4E9C"/>
                           </a:solidFill>
-                          <a:latin typeface="微软雅黑" pitchFamily="34" charset="0"/>
-                          <a:ea typeface="微软雅黑" pitchFamily="34" charset="-122"/>
-                          <a:cs typeface="微软雅黑" pitchFamily="34" charset="-120"/>
+                          <a:latin typeface="微软雅黑" panose="020B0503020204020204" pitchFamily="34" charset="-122"/>
+                          <a:ea typeface="微软雅黑" panose="020B0503020204020204" pitchFamily="34" charset="-122"/>
+                          <a:cs typeface="微软雅黑" panose="020B0503020204020204" pitchFamily="34" charset="-120"/>
                         </a:rPr>
                         <a:t>循环单链表</a:t>
                       </a:r>
                       <a:endParaRPr lang="en-US" sz="1500" dirty="0">
-                        <a:latin typeface="微软雅黑" charset="0"/>
-                        <a:ea typeface="微软雅黑" charset="0"/>
-                        <a:cs typeface="微软雅黑" charset="0"/>
+                        <a:latin typeface="微软雅黑" panose="020B0503020204020204" pitchFamily="34" charset="-122"/>
+                        <a:ea typeface="微软雅黑" panose="020B0503020204020204" pitchFamily="34" charset="-122"/>
+                        <a:cs typeface="微软雅黑" panose="020B0503020204020204" pitchFamily="34" charset="-122"/>
                       </a:endParaRPr>
                     </a:p>
                   </a:txBody>
-                  <a:tcPr marL="91440" marR="91440" marT="45720" marB="45720" anchor="ctr">
+                  <a:tcPr anchor="ctr">
                     <a:lnL w="9525" cap="flat" cmpd="sng" algn="ctr">
                       <a:solidFill>
                         <a:srgbClr val="D8DBE0"/>
@@ -7816,7 +7214,7 @@
                     <a:bodyPr/>
                     <a:lstStyle/>
                     <a:p>
-                      <a:pPr algn="ctr" indent="0" marL="0">
+                      <a:pPr marL="0" indent="0" algn="ctr">
                         <a:buNone/>
                       </a:pPr>
                       <a:r>
@@ -7824,20 +7222,20 @@
                           <a:solidFill>
                             <a:srgbClr val="1F2329"/>
                           </a:solidFill>
-                          <a:latin typeface="微软雅黑" pitchFamily="34" charset="0"/>
-                          <a:ea typeface="微软雅黑" pitchFamily="34" charset="-122"/>
-                          <a:cs typeface="微软雅黑" pitchFamily="34" charset="-120"/>
+                          <a:latin typeface="微软雅黑" panose="020B0503020204020204" pitchFamily="34" charset="-122"/>
+                          <a:ea typeface="微软雅黑" panose="020B0503020204020204" pitchFamily="34" charset="-122"/>
+                          <a:cs typeface="微软雅黑" panose="020B0503020204020204" pitchFamily="34" charset="-120"/>
                         </a:rPr>
                         <a:t>建表结束</a:t>
                       </a:r>
                       <a:endParaRPr lang="en-US" sz="1500" dirty="0">
-                        <a:latin typeface="微软雅黑" charset="0"/>
-                        <a:ea typeface="微软雅黑" charset="0"/>
-                        <a:cs typeface="微软雅黑" charset="0"/>
+                        <a:latin typeface="微软雅黑" panose="020B0503020204020204" pitchFamily="34" charset="-122"/>
+                        <a:ea typeface="微软雅黑" panose="020B0503020204020204" pitchFamily="34" charset="-122"/>
+                        <a:cs typeface="微软雅黑" panose="020B0503020204020204" pitchFamily="34" charset="-122"/>
                       </a:endParaRPr>
                     </a:p>
                   </a:txBody>
-                  <a:tcPr marL="91440" marR="91440" marT="45720" marB="45720" anchor="ctr">
+                  <a:tcPr anchor="ctr">
                     <a:lnL w="9525" cap="flat" cmpd="sng" algn="ctr">
                       <a:solidFill>
                         <a:srgbClr val="D8DBE0"/>
@@ -7884,7 +7282,7 @@
                     <a:bodyPr/>
                     <a:lstStyle/>
                     <a:p>
-                      <a:pPr algn="ctr" indent="0" marL="0">
+                      <a:pPr marL="0" indent="0" algn="ctr">
                         <a:buNone/>
                       </a:pPr>
                       <a:r>
@@ -7892,20 +7290,20 @@
                           <a:solidFill>
                             <a:srgbClr val="1F2329"/>
                           </a:solidFill>
-                          <a:latin typeface="微软雅黑" pitchFamily="34" charset="0"/>
-                          <a:ea typeface="微软雅黑" pitchFamily="34" charset="-122"/>
-                          <a:cs typeface="微软雅黑" pitchFamily="34" charset="-120"/>
+                          <a:latin typeface="微软雅黑" panose="020B0503020204020204" pitchFamily="34" charset="-122"/>
+                          <a:ea typeface="微软雅黑" panose="020B0503020204020204" pitchFamily="34" charset="-122"/>
+                          <a:cs typeface="微软雅黑" panose="020B0503020204020204" pitchFamily="34" charset="-120"/>
                         </a:rPr>
                         <a:t>r-&gt;next = NULL</a:t>
                       </a:r>
                       <a:endParaRPr lang="en-US" sz="1500" dirty="0">
-                        <a:latin typeface="微软雅黑" charset="0"/>
-                        <a:ea typeface="微软雅黑" charset="0"/>
-                        <a:cs typeface="微软雅黑" charset="0"/>
+                        <a:latin typeface="微软雅黑" panose="020B0503020204020204" pitchFamily="34" charset="-122"/>
+                        <a:ea typeface="微软雅黑" panose="020B0503020204020204" pitchFamily="34" charset="-122"/>
+                        <a:cs typeface="微软雅黑" panose="020B0503020204020204" pitchFamily="34" charset="-122"/>
                       </a:endParaRPr>
                     </a:p>
                   </a:txBody>
-                  <a:tcPr marL="91440" marR="91440" marT="45720" marB="45720" anchor="ctr">
+                  <a:tcPr anchor="ctr">
                     <a:lnL w="9525" cap="flat" cmpd="sng" algn="ctr">
                       <a:solidFill>
                         <a:srgbClr val="D8DBE0"/>
@@ -7952,7 +7350,7 @@
                     <a:bodyPr/>
                     <a:lstStyle/>
                     <a:p>
-                      <a:pPr algn="ctr" indent="0" marL="0">
+                      <a:pPr marL="0" indent="0" algn="ctr">
                         <a:buNone/>
                       </a:pPr>
                       <a:r>
@@ -7960,20 +7358,20 @@
                           <a:solidFill>
                             <a:srgbClr val="1F2329"/>
                           </a:solidFill>
-                          <a:latin typeface="微软雅黑" pitchFamily="34" charset="0"/>
-                          <a:ea typeface="微软雅黑" pitchFamily="34" charset="-122"/>
-                          <a:cs typeface="微软雅黑" pitchFamily="34" charset="-120"/>
+                          <a:latin typeface="微软雅黑" panose="020B0503020204020204" pitchFamily="34" charset="-122"/>
+                          <a:ea typeface="微软雅黑" panose="020B0503020204020204" pitchFamily="34" charset="-122"/>
+                          <a:cs typeface="微软雅黑" panose="020B0503020204020204" pitchFamily="34" charset="-120"/>
                         </a:rPr>
                         <a:t>r-&gt;next = L（指回头结点）</a:t>
                       </a:r>
                       <a:endParaRPr lang="en-US" sz="1500" dirty="0">
-                        <a:latin typeface="微软雅黑" charset="0"/>
-                        <a:ea typeface="微软雅黑" charset="0"/>
-                        <a:cs typeface="微软雅黑" charset="0"/>
+                        <a:latin typeface="微软雅黑" panose="020B0503020204020204" pitchFamily="34" charset="-122"/>
+                        <a:ea typeface="微软雅黑" panose="020B0503020204020204" pitchFamily="34" charset="-122"/>
+                        <a:cs typeface="微软雅黑" panose="020B0503020204020204" pitchFamily="34" charset="-122"/>
                       </a:endParaRPr>
                     </a:p>
                   </a:txBody>
-                  <a:tcPr marL="91440" marR="91440" marT="45720" marB="45720" anchor="ctr">
+                  <a:tcPr anchor="ctr">
                     <a:lnL w="9525" cap="flat" cmpd="sng" algn="ctr">
                       <a:solidFill>
                         <a:srgbClr val="D8DBE0"/>
@@ -8022,7 +7420,7 @@
                     <a:bodyPr/>
                     <a:lstStyle/>
                     <a:p>
-                      <a:pPr algn="ctr" indent="0" marL="0">
+                      <a:pPr marL="0" indent="0" algn="ctr">
                         <a:buNone/>
                       </a:pPr>
                       <a:r>
@@ -8030,20 +7428,20 @@
                           <a:solidFill>
                             <a:srgbClr val="1F2329"/>
                           </a:solidFill>
-                          <a:latin typeface="微软雅黑" pitchFamily="34" charset="0"/>
-                          <a:ea typeface="微软雅黑" pitchFamily="34" charset="-122"/>
-                          <a:cs typeface="微软雅黑" pitchFamily="34" charset="-120"/>
+                          <a:latin typeface="微软雅黑" panose="020B0503020204020204" pitchFamily="34" charset="-122"/>
+                          <a:ea typeface="微软雅黑" panose="020B0503020204020204" pitchFamily="34" charset="-122"/>
+                          <a:cs typeface="微软雅黑" panose="020B0503020204020204" pitchFamily="34" charset="-120"/>
                         </a:rPr>
                         <a:t>判空</a:t>
                       </a:r>
                       <a:endParaRPr lang="en-US" sz="1500" dirty="0">
-                        <a:latin typeface="微软雅黑" charset="0"/>
-                        <a:ea typeface="微软雅黑" charset="0"/>
-                        <a:cs typeface="微软雅黑" charset="0"/>
+                        <a:latin typeface="微软雅黑" panose="020B0503020204020204" pitchFamily="34" charset="-122"/>
+                        <a:ea typeface="微软雅黑" panose="020B0503020204020204" pitchFamily="34" charset="-122"/>
+                        <a:cs typeface="微软雅黑" panose="020B0503020204020204" pitchFamily="34" charset="-122"/>
                       </a:endParaRPr>
                     </a:p>
                   </a:txBody>
-                  <a:tcPr marL="91440" marR="91440" marT="45720" marB="45720" anchor="ctr">
+                  <a:tcPr anchor="ctr">
                     <a:lnL w="9525" cap="flat" cmpd="sng" algn="ctr">
                       <a:solidFill>
                         <a:srgbClr val="D8DBE0"/>
@@ -8090,7 +7488,7 @@
                     <a:bodyPr/>
                     <a:lstStyle/>
                     <a:p>
-                      <a:pPr algn="ctr" indent="0" marL="0">
+                      <a:pPr marL="0" indent="0" algn="ctr">
                         <a:buNone/>
                       </a:pPr>
                       <a:r>
@@ -8098,20 +7496,20 @@
                           <a:solidFill>
                             <a:srgbClr val="1F2329"/>
                           </a:solidFill>
-                          <a:latin typeface="微软雅黑" pitchFamily="34" charset="0"/>
-                          <a:ea typeface="微软雅黑" pitchFamily="34" charset="-122"/>
-                          <a:cs typeface="微软雅黑" pitchFamily="34" charset="-120"/>
+                          <a:latin typeface="微软雅黑" panose="020B0503020204020204" pitchFamily="34" charset="-122"/>
+                          <a:ea typeface="微软雅黑" panose="020B0503020204020204" pitchFamily="34" charset="-122"/>
+                          <a:cs typeface="微软雅黑" panose="020B0503020204020204" pitchFamily="34" charset="-120"/>
                         </a:rPr>
                         <a:t>L-&gt;next == NULL</a:t>
                       </a:r>
                       <a:endParaRPr lang="en-US" sz="1500" dirty="0">
-                        <a:latin typeface="微软雅黑" charset="0"/>
-                        <a:ea typeface="微软雅黑" charset="0"/>
-                        <a:cs typeface="微软雅黑" charset="0"/>
+                        <a:latin typeface="微软雅黑" panose="020B0503020204020204" pitchFamily="34" charset="-122"/>
+                        <a:ea typeface="微软雅黑" panose="020B0503020204020204" pitchFamily="34" charset="-122"/>
+                        <a:cs typeface="微软雅黑" panose="020B0503020204020204" pitchFamily="34" charset="-122"/>
                       </a:endParaRPr>
                     </a:p>
                   </a:txBody>
-                  <a:tcPr marL="91440" marR="91440" marT="45720" marB="45720" anchor="ctr">
+                  <a:tcPr anchor="ctr">
                     <a:lnL w="9525" cap="flat" cmpd="sng" algn="ctr">
                       <a:solidFill>
                         <a:srgbClr val="D8DBE0"/>
@@ -8158,7 +7556,7 @@
                     <a:bodyPr/>
                     <a:lstStyle/>
                     <a:p>
-                      <a:pPr algn="ctr" indent="0" marL="0">
+                      <a:pPr marL="0" indent="0" algn="ctr">
                         <a:buNone/>
                       </a:pPr>
                       <a:r>
@@ -8166,20 +7564,20 @@
                           <a:solidFill>
                             <a:srgbClr val="1F2329"/>
                           </a:solidFill>
-                          <a:latin typeface="微软雅黑" pitchFamily="34" charset="0"/>
-                          <a:ea typeface="微软雅黑" pitchFamily="34" charset="-122"/>
-                          <a:cs typeface="微软雅黑" pitchFamily="34" charset="-120"/>
+                          <a:latin typeface="微软雅黑" panose="020B0503020204020204" pitchFamily="34" charset="-122"/>
+                          <a:ea typeface="微软雅黑" panose="020B0503020204020204" pitchFamily="34" charset="-122"/>
+                          <a:cs typeface="微软雅黑" panose="020B0503020204020204" pitchFamily="34" charset="-120"/>
                         </a:rPr>
                         <a:t>L-&gt;next == L</a:t>
                       </a:r>
                       <a:endParaRPr lang="en-US" sz="1500" dirty="0">
-                        <a:latin typeface="微软雅黑" charset="0"/>
-                        <a:ea typeface="微软雅黑" charset="0"/>
-                        <a:cs typeface="微软雅黑" charset="0"/>
+                        <a:latin typeface="微软雅黑" panose="020B0503020204020204" pitchFamily="34" charset="-122"/>
+                        <a:ea typeface="微软雅黑" panose="020B0503020204020204" pitchFamily="34" charset="-122"/>
+                        <a:cs typeface="微软雅黑" panose="020B0503020204020204" pitchFamily="34" charset="-122"/>
                       </a:endParaRPr>
                     </a:p>
                   </a:txBody>
-                  <a:tcPr marL="91440" marR="91440" marT="45720" marB="45720" anchor="ctr">
+                  <a:tcPr anchor="ctr">
                     <a:lnL w="9525" cap="flat" cmpd="sng" algn="ctr">
                       <a:solidFill>
                         <a:srgbClr val="D8DBE0"/>
@@ -8228,7 +7626,7 @@
                     <a:bodyPr/>
                     <a:lstStyle/>
                     <a:p>
-                      <a:pPr algn="ctr" indent="0" marL="0">
+                      <a:pPr marL="0" indent="0" algn="ctr">
                         <a:buNone/>
                       </a:pPr>
                       <a:r>
@@ -8236,20 +7634,20 @@
                           <a:solidFill>
                             <a:srgbClr val="1F2329"/>
                           </a:solidFill>
-                          <a:latin typeface="微软雅黑" pitchFamily="34" charset="0"/>
-                          <a:ea typeface="微软雅黑" pitchFamily="34" charset="-122"/>
-                          <a:cs typeface="微软雅黑" pitchFamily="34" charset="-120"/>
+                          <a:latin typeface="微软雅黑" panose="020B0503020204020204" pitchFamily="34" charset="-122"/>
+                          <a:ea typeface="微软雅黑" panose="020B0503020204020204" pitchFamily="34" charset="-122"/>
+                          <a:cs typeface="微软雅黑" panose="020B0503020204020204" pitchFamily="34" charset="-120"/>
                         </a:rPr>
                         <a:t>遍历终止</a:t>
                       </a:r>
                       <a:endParaRPr lang="en-US" sz="1500" dirty="0">
-                        <a:latin typeface="微软雅黑" charset="0"/>
-                        <a:ea typeface="微软雅黑" charset="0"/>
-                        <a:cs typeface="微软雅黑" charset="0"/>
+                        <a:latin typeface="微软雅黑" panose="020B0503020204020204" pitchFamily="34" charset="-122"/>
+                        <a:ea typeface="微软雅黑" panose="020B0503020204020204" pitchFamily="34" charset="-122"/>
+                        <a:cs typeface="微软雅黑" panose="020B0503020204020204" pitchFamily="34" charset="-122"/>
                       </a:endParaRPr>
                     </a:p>
                   </a:txBody>
-                  <a:tcPr marL="91440" marR="91440" marT="45720" marB="45720" anchor="ctr">
+                  <a:tcPr anchor="ctr">
                     <a:lnL w="9525" cap="flat" cmpd="sng" algn="ctr">
                       <a:solidFill>
                         <a:srgbClr val="D8DBE0"/>
@@ -8296,7 +7694,7 @@
                     <a:bodyPr/>
                     <a:lstStyle/>
                     <a:p>
-                      <a:pPr algn="ctr" indent="0" marL="0">
+                      <a:pPr marL="0" indent="0" algn="ctr">
                         <a:buNone/>
                       </a:pPr>
                       <a:r>
@@ -8304,20 +7702,20 @@
                           <a:solidFill>
                             <a:srgbClr val="1F2329"/>
                           </a:solidFill>
-                          <a:latin typeface="微软雅黑" pitchFamily="34" charset="0"/>
-                          <a:ea typeface="微软雅黑" pitchFamily="34" charset="-122"/>
-                          <a:cs typeface="微软雅黑" pitchFamily="34" charset="-120"/>
+                          <a:latin typeface="微软雅黑" panose="020B0503020204020204" pitchFamily="34" charset="-122"/>
+                          <a:ea typeface="微软雅黑" panose="020B0503020204020204" pitchFamily="34" charset="-122"/>
+                          <a:cs typeface="微软雅黑" panose="020B0503020204020204" pitchFamily="34" charset="-120"/>
                         </a:rPr>
                         <a:t>p != NULL</a:t>
                       </a:r>
                       <a:endParaRPr lang="en-US" sz="1500" dirty="0">
-                        <a:latin typeface="微软雅黑" charset="0"/>
-                        <a:ea typeface="微软雅黑" charset="0"/>
-                        <a:cs typeface="微软雅黑" charset="0"/>
+                        <a:latin typeface="微软雅黑" panose="020B0503020204020204" pitchFamily="34" charset="-122"/>
+                        <a:ea typeface="微软雅黑" panose="020B0503020204020204" pitchFamily="34" charset="-122"/>
+                        <a:cs typeface="微软雅黑" panose="020B0503020204020204" pitchFamily="34" charset="-122"/>
                       </a:endParaRPr>
                     </a:p>
                   </a:txBody>
-                  <a:tcPr marL="91440" marR="91440" marT="45720" marB="45720" anchor="ctr">
+                  <a:tcPr anchor="ctr">
                     <a:lnL w="9525" cap="flat" cmpd="sng" algn="ctr">
                       <a:solidFill>
                         <a:srgbClr val="D8DBE0"/>
@@ -8364,7 +7762,7 @@
                     <a:bodyPr/>
                     <a:lstStyle/>
                     <a:p>
-                      <a:pPr algn="ctr" indent="0" marL="0">
+                      <a:pPr marL="0" indent="0" algn="ctr">
                         <a:buNone/>
                       </a:pPr>
                       <a:r>
@@ -8372,20 +7770,20 @@
                           <a:solidFill>
                             <a:srgbClr val="1F2329"/>
                           </a:solidFill>
-                          <a:latin typeface="微软雅黑" pitchFamily="34" charset="0"/>
-                          <a:ea typeface="微软雅黑" pitchFamily="34" charset="-122"/>
-                          <a:cs typeface="微软雅黑" pitchFamily="34" charset="-120"/>
+                          <a:latin typeface="微软雅黑" panose="020B0503020204020204" pitchFamily="34" charset="-122"/>
+                          <a:ea typeface="微软雅黑" panose="020B0503020204020204" pitchFamily="34" charset="-122"/>
+                          <a:cs typeface="微软雅黑" panose="020B0503020204020204" pitchFamily="34" charset="-120"/>
                         </a:rPr>
                         <a:t>p != L</a:t>
                       </a:r>
                       <a:endParaRPr lang="en-US" sz="1500" dirty="0">
-                        <a:latin typeface="微软雅黑" charset="0"/>
-                        <a:ea typeface="微软雅黑" charset="0"/>
-                        <a:cs typeface="微软雅黑" charset="0"/>
+                        <a:latin typeface="微软雅黑" panose="020B0503020204020204" pitchFamily="34" charset="-122"/>
+                        <a:ea typeface="微软雅黑" panose="020B0503020204020204" pitchFamily="34" charset="-122"/>
+                        <a:cs typeface="微软雅黑" panose="020B0503020204020204" pitchFamily="34" charset="-122"/>
                       </a:endParaRPr>
                     </a:p>
                   </a:txBody>
-                  <a:tcPr marL="91440" marR="91440" marT="45720" marB="45720" anchor="ctr">
+                  <a:tcPr anchor="ctr">
                     <a:lnL w="9525" cap="flat" cmpd="sng" algn="ctr">
                       <a:solidFill>
                         <a:srgbClr val="D8DBE0"/>
@@ -8447,13 +7845,12 @@
             <a:avLst/>
           </a:prstGeom>
           <a:noFill/>
-          <a:ln/>
         </p:spPr>
         <p:txBody>
           <a:bodyPr wrap="square" rtlCol="0" anchor="t"/>
           <a:lstStyle/>
           <a:p>
-            <a:pPr algn="l" indent="0" marL="0">
+            <a:pPr marL="0" indent="0" algn="l">
               <a:lnSpc>
                 <a:spcPct val="115000"/>
               </a:lnSpc>
@@ -8464,74 +7861,61 @@
                 <a:solidFill>
                   <a:srgbClr val="1F4E9C"/>
                 </a:solidFill>
-                <a:latin typeface="微软雅黑" pitchFamily="34" charset="0"/>
-                <a:ea typeface="微软雅黑" pitchFamily="34" charset="-122"/>
-                <a:cs typeface="微软雅黑" pitchFamily="34" charset="-120"/>
+                <a:latin typeface="微软雅黑" panose="020B0503020204020204" pitchFamily="34" charset="-122"/>
+                <a:ea typeface="微软雅黑" panose="020B0503020204020204" pitchFamily="34" charset="-122"/>
+                <a:cs typeface="微软雅黑" panose="020B0503020204020204" pitchFamily="34" charset="-120"/>
               </a:rPr>
               <a:t>•  </a:t>
             </a:r>
-            <a:pPr algn="l" indent="0" marL="0">
+            <a:r>
+              <a:rPr lang="en-US" sz="1800" dirty="0">
+                <a:solidFill>
+                  <a:srgbClr val="000000"/>
+                </a:solidFill>
+              </a:rPr>
+              <a:t>循环链表没有 NULL 结尾，走到尾巴会自动绕回头结点，所以终止条件从'遇到 NULL'改成'绕回 L'</a:t>
+            </a:r>
+            <a:endParaRPr lang="en-US" sz="1800" dirty="0"/>
+          </a:p>
+        </p:txBody>
+      </p:sp>
+      <p:sp>
+        <p:nvSpPr>
+          <p:cNvPr id="7" name="Text 4"/>
+          <p:cNvSpPr/>
+          <p:nvPr/>
+        </p:nvSpPr>
+        <p:spPr>
+          <a:xfrm>
+            <a:off x="896112" y="5120640"/>
+            <a:ext cx="10454335" cy="397764"/>
+          </a:xfrm>
+          <a:prstGeom prst="rect">
+            <a:avLst/>
+          </a:prstGeom>
+          <a:noFill/>
+        </p:spPr>
+        <p:txBody>
+          <a:bodyPr wrap="square" rtlCol="0" anchor="t"/>
+          <a:lstStyle/>
+          <a:p>
+            <a:pPr marL="0" indent="0" algn="l">
               <a:lnSpc>
                 <a:spcPct val="115000"/>
               </a:lnSpc>
               <a:buNone/>
             </a:pPr>
             <a:r>
-              <a:rPr lang="en-US" sz="1800" dirty="0">
-                <a:solidFill>
-                  <a:srgbClr val="000000"/>
-                </a:solidFill>
-              </a:rPr>
-              <a:t>循环链表没有 NULL 结尾，走到尾巴会自动绕回头结点，所以终止条件从'遇到 NULL'改成'绕回 L'</a:t>
-            </a:r>
-            <a:endParaRPr lang="en-US" sz="1800" dirty="0"/>
-          </a:p>
-        </p:txBody>
-      </p:sp>
-      <p:sp>
-        <p:nvSpPr>
-          <p:cNvPr id="7" name="Text 4"/>
-          <p:cNvSpPr/>
-          <p:nvPr/>
-        </p:nvSpPr>
-        <p:spPr>
-          <a:xfrm>
-            <a:off x="896112" y="5120640"/>
-            <a:ext cx="10454335" cy="397764"/>
-          </a:xfrm>
-          <a:prstGeom prst="rect">
-            <a:avLst/>
-          </a:prstGeom>
-          <a:noFill/>
-          <a:ln/>
-        </p:spPr>
-        <p:txBody>
-          <a:bodyPr wrap="square" rtlCol="0" anchor="t"/>
-          <a:lstStyle/>
-          <a:p>
-            <a:pPr algn="l" indent="0" marL="0">
-              <a:lnSpc>
-                <a:spcPct val="115000"/>
-              </a:lnSpc>
-              <a:buNone/>
-            </a:pPr>
-            <a:r>
               <a:rPr lang="en-US" sz="1800" b="1" dirty="0">
                 <a:solidFill>
                   <a:srgbClr val="1F4E9C"/>
                 </a:solidFill>
-                <a:latin typeface="微软雅黑" pitchFamily="34" charset="0"/>
-                <a:ea typeface="微软雅黑" pitchFamily="34" charset="-122"/>
-                <a:cs typeface="微软雅黑" pitchFamily="34" charset="-120"/>
+                <a:latin typeface="微软雅黑" panose="020B0503020204020204" pitchFamily="34" charset="-122"/>
+                <a:ea typeface="微软雅黑" panose="020B0503020204020204" pitchFamily="34" charset="-122"/>
+                <a:cs typeface="微软雅黑" panose="020B0503020204020204" pitchFamily="34" charset="-120"/>
               </a:rPr>
               <a:t>•  </a:t>
             </a:r>
-            <a:pPr algn="l" indent="0" marL="0">
-              <a:lnSpc>
-                <a:spcPct val="115000"/>
-              </a:lnSpc>
-              <a:buNone/>
-            </a:pPr>
             <a:r>
               <a:rPr lang="en-US" sz="1800" dirty="0">
                 <a:solidFill>
@@ -8554,7 +7938,7 @@
 
 <file path=ppt/slides/slide8.xml><?xml version="1.0" encoding="utf-8"?>
 <p:sld xmlns:a="http://schemas.openxmlformats.org/drawingml/2006/main" xmlns:r="http://schemas.openxmlformats.org/officeDocument/2006/relationships" xmlns:p="http://schemas.openxmlformats.org/presentationml/2006/main">
-  <p:cSld name="Slide 8">
+  <p:cSld>
     <p:bg>
       <p:bgPr>
         <a:blipFill dpi="0" rotWithShape="1">
@@ -8598,13 +7982,12 @@
             <a:avLst/>
           </a:prstGeom>
           <a:noFill/>
-          <a:ln/>
         </p:spPr>
         <p:txBody>
           <a:bodyPr wrap="square" rtlCol="0" anchor="ctr"/>
           <a:lstStyle/>
           <a:p>
-            <a:pPr algn="r" indent="0" marL="0">
+            <a:pPr marL="0" indent="0" algn="r">
               <a:buNone/>
             </a:pPr>
             <a:r>
@@ -8612,9 +7995,9 @@
                 <a:solidFill>
                   <a:srgbClr val="8A9099"/>
                 </a:solidFill>
-                <a:latin typeface="微软雅黑" pitchFamily="34" charset="0"/>
-                <a:ea typeface="微软雅黑" pitchFamily="34" charset="-122"/>
-                <a:cs typeface="微软雅黑" pitchFamily="34" charset="-120"/>
+                <a:latin typeface="微软雅黑" panose="020B0503020204020204" pitchFamily="34" charset="-122"/>
+                <a:ea typeface="微软雅黑" panose="020B0503020204020204" pitchFamily="34" charset="-122"/>
+                <a:cs typeface="微软雅黑" panose="020B0503020204020204" pitchFamily="34" charset="-120"/>
               </a:rPr>
               <a:t>8 / 14</a:t>
             </a:r>
@@ -8637,13 +8020,12 @@
             <a:avLst/>
           </a:prstGeom>
           <a:noFill/>
-          <a:ln/>
         </p:spPr>
         <p:txBody>
           <a:bodyPr wrap="square" rtlCol="0" anchor="ctr"/>
           <a:lstStyle/>
           <a:p>
-            <a:pPr algn="l" indent="0" marL="0">
+            <a:pPr marL="0" indent="0" algn="l">
               <a:buNone/>
             </a:pPr>
             <a:r>
@@ -8651,9 +8033,9 @@
                 <a:solidFill>
                   <a:srgbClr val="1F4E9C"/>
                 </a:solidFill>
-                <a:latin typeface="微软雅黑" pitchFamily="34" charset="0"/>
-                <a:ea typeface="微软雅黑" pitchFamily="34" charset="-122"/>
-                <a:cs typeface="微软雅黑" pitchFamily="34" charset="-120"/>
+                <a:latin typeface="微软雅黑" panose="020B0503020204020204" pitchFamily="34" charset="-122"/>
+                <a:ea typeface="微软雅黑" panose="020B0503020204020204" pitchFamily="34" charset="-122"/>
+                <a:cs typeface="微软雅黑" panose="020B0503020204020204" pitchFamily="34" charset="-120"/>
               </a:rPr>
               <a:t>循环双链表</a:t>
             </a:r>
@@ -8676,13 +8058,12 @@
             <a:avLst/>
           </a:prstGeom>
           <a:noFill/>
-          <a:ln/>
         </p:spPr>
         <p:txBody>
           <a:bodyPr wrap="square" rtlCol="0" anchor="ctr"/>
           <a:lstStyle/>
           <a:p>
-            <a:pPr algn="l" indent="0" marL="0">
+            <a:pPr marL="0" indent="0" algn="l">
               <a:buNone/>
             </a:pPr>
             <a:r>
@@ -8690,9 +8071,9 @@
                 <a:solidFill>
                   <a:srgbClr val="1F2329"/>
                 </a:solidFill>
-                <a:latin typeface="微软雅黑" pitchFamily="34" charset="0"/>
-                <a:ea typeface="微软雅黑" pitchFamily="34" charset="-122"/>
-                <a:cs typeface="微软雅黑" pitchFamily="34" charset="-120"/>
+                <a:latin typeface="微软雅黑" panose="020B0503020204020204" pitchFamily="34" charset="-122"/>
+                <a:ea typeface="微软雅黑" panose="020B0503020204020204" pitchFamily="34" charset="-122"/>
+                <a:cs typeface="微软雅黑" panose="020B0503020204020204" pitchFamily="34" charset="-120"/>
               </a:rPr>
               <a:t>循环双链表：判空要两个条件</a:t>
             </a:r>
@@ -8717,7 +8098,6 @@
           <a:solidFill>
             <a:srgbClr val="F7F9FC"/>
           </a:solidFill>
-          <a:ln/>
         </p:spPr>
       </p:sp>
       <p:sp>
@@ -8737,7 +8117,6 @@
           <a:solidFill>
             <a:srgbClr val="1F4E9C"/>
           </a:solidFill>
-          <a:ln/>
         </p:spPr>
       </p:sp>
       <p:sp>
@@ -8755,13 +8134,12 @@
             <a:avLst/>
           </a:prstGeom>
           <a:noFill/>
-          <a:ln/>
         </p:spPr>
         <p:txBody>
           <a:bodyPr wrap="square" rtlCol="0" anchor="t"/>
           <a:lstStyle/>
           <a:p>
-            <a:pPr algn="l" indent="0" marL="0">
+            <a:pPr marL="0" indent="0" algn="l">
               <a:lnSpc>
                 <a:spcPct val="125000"/>
               </a:lnSpc>
@@ -8772,9 +8150,9 @@
                 <a:solidFill>
                   <a:srgbClr val="1F2329"/>
                 </a:solidFill>
-                <a:latin typeface="Consolas" pitchFamily="34" charset="0"/>
-                <a:ea typeface="Consolas" pitchFamily="34" charset="-122"/>
-                <a:cs typeface="Consolas" pitchFamily="34" charset="-120"/>
+                <a:latin typeface="Consolas" panose="020B0609020204030204" pitchFamily="34" charset="0"/>
+                <a:ea typeface="Consolas" panose="020B0609020204030204" pitchFamily="34" charset="-122"/>
+                <a:cs typeface="Consolas" panose="020B0609020204030204" pitchFamily="34" charset="-120"/>
               </a:rPr>
               <a:t>// 循环双链表判空：头结点的 prior 和 next 都指向自己
 if(L-&gt;next == L &amp;&amp; L-&gt;prior == L)  // 空表
@@ -8799,13 +8177,12 @@
             <a:avLst/>
           </a:prstGeom>
           <a:noFill/>
-          <a:ln/>
         </p:spPr>
         <p:txBody>
           <a:bodyPr wrap="square" rtlCol="0" anchor="t"/>
           <a:lstStyle/>
           <a:p>
-            <a:pPr algn="l" indent="0" marL="0">
+            <a:pPr marL="0" indent="0" algn="l">
               <a:lnSpc>
                 <a:spcPct val="115000"/>
               </a:lnSpc>
@@ -8816,74 +8193,61 @@
                 <a:solidFill>
                   <a:srgbClr val="1F4E9C"/>
                 </a:solidFill>
-                <a:latin typeface="微软雅黑" pitchFamily="34" charset="0"/>
-                <a:ea typeface="微软雅黑" pitchFamily="34" charset="-122"/>
-                <a:cs typeface="微软雅黑" pitchFamily="34" charset="-120"/>
+                <a:latin typeface="微软雅黑" panose="020B0503020204020204" pitchFamily="34" charset="-122"/>
+                <a:ea typeface="微软雅黑" panose="020B0503020204020204" pitchFamily="34" charset="-122"/>
+                <a:cs typeface="微软雅黑" panose="020B0503020204020204" pitchFamily="34" charset="-120"/>
               </a:rPr>
               <a:t>•  </a:t>
             </a:r>
-            <a:pPr algn="l" indent="0" marL="0">
+            <a:r>
+              <a:rPr lang="en-US" sz="1800" dirty="0">
+                <a:solidFill>
+                  <a:srgbClr val="000000"/>
+                </a:solidFill>
+              </a:rPr>
+              <a:t>循环双链表首尾相接成一个环，头结点的 next 指第一个、prior 指最后一个</a:t>
+            </a:r>
+            <a:endParaRPr lang="en-US" sz="1800" dirty="0"/>
+          </a:p>
+        </p:txBody>
+      </p:sp>
+      <p:sp>
+        <p:nvSpPr>
+          <p:cNvPr id="9" name="Text 7"/>
+          <p:cNvSpPr/>
+          <p:nvPr/>
+        </p:nvSpPr>
+        <p:spPr>
+          <a:xfrm>
+            <a:off x="896112" y="4101084"/>
+            <a:ext cx="10454335" cy="740664"/>
+          </a:xfrm>
+          <a:prstGeom prst="rect">
+            <a:avLst/>
+          </a:prstGeom>
+          <a:noFill/>
+        </p:spPr>
+        <p:txBody>
+          <a:bodyPr wrap="square" rtlCol="0" anchor="t"/>
+          <a:lstStyle/>
+          <a:p>
+            <a:pPr marL="0" indent="0" algn="l">
               <a:lnSpc>
                 <a:spcPct val="115000"/>
               </a:lnSpc>
               <a:buNone/>
             </a:pPr>
             <a:r>
-              <a:rPr lang="en-US" sz="1800" dirty="0">
-                <a:solidFill>
-                  <a:srgbClr val="000000"/>
-                </a:solidFill>
-              </a:rPr>
-              <a:t>循环双链表首尾相接成一个环，头结点的 next 指第一个、prior 指最后一个</a:t>
-            </a:r>
-            <a:endParaRPr lang="en-US" sz="1800" dirty="0"/>
-          </a:p>
-        </p:txBody>
-      </p:sp>
-      <p:sp>
-        <p:nvSpPr>
-          <p:cNvPr id="9" name="Text 7"/>
-          <p:cNvSpPr/>
-          <p:nvPr/>
-        </p:nvSpPr>
-        <p:spPr>
-          <a:xfrm>
-            <a:off x="896112" y="4101084"/>
-            <a:ext cx="10454335" cy="740664"/>
-          </a:xfrm>
-          <a:prstGeom prst="rect">
-            <a:avLst/>
-          </a:prstGeom>
-          <a:noFill/>
-          <a:ln/>
-        </p:spPr>
-        <p:txBody>
-          <a:bodyPr wrap="square" rtlCol="0" anchor="t"/>
-          <a:lstStyle/>
-          <a:p>
-            <a:pPr algn="l" indent="0" marL="0">
-              <a:lnSpc>
-                <a:spcPct val="115000"/>
-              </a:lnSpc>
-              <a:buNone/>
-            </a:pPr>
-            <a:r>
               <a:rPr lang="en-US" sz="1800" b="1" dirty="0">
                 <a:solidFill>
                   <a:srgbClr val="1F4E9C"/>
                 </a:solidFill>
-                <a:latin typeface="微软雅黑" pitchFamily="34" charset="0"/>
-                <a:ea typeface="微软雅黑" pitchFamily="34" charset="-122"/>
-                <a:cs typeface="微软雅黑" pitchFamily="34" charset="-120"/>
+                <a:latin typeface="微软雅黑" panose="020B0503020204020204" pitchFamily="34" charset="-122"/>
+                <a:ea typeface="微软雅黑" panose="020B0503020204020204" pitchFamily="34" charset="-122"/>
+                <a:cs typeface="微软雅黑" panose="020B0503020204020204" pitchFamily="34" charset="-120"/>
               </a:rPr>
               <a:t>•  </a:t>
             </a:r>
-            <a:pPr algn="l" indent="0" marL="0">
-              <a:lnSpc>
-                <a:spcPct val="115000"/>
-              </a:lnSpc>
-              <a:buNone/>
-            </a:pPr>
             <a:r>
               <a:rPr lang="en-US" sz="1800" dirty="0">
                 <a:solidFill>
@@ -8906,7 +8270,7 @@
 
 <file path=ppt/slides/slide9.xml><?xml version="1.0" encoding="utf-8"?>
 <p:sld xmlns:a="http://schemas.openxmlformats.org/drawingml/2006/main" xmlns:r="http://schemas.openxmlformats.org/officeDocument/2006/relationships" xmlns:p="http://schemas.openxmlformats.org/presentationml/2006/main">
-  <p:cSld name="Slide 9">
+  <p:cSld>
     <p:bg>
       <p:bgPr>
         <a:blipFill dpi="0" rotWithShape="1">
@@ -8950,13 +8314,12 @@
             <a:avLst/>
           </a:prstGeom>
           <a:noFill/>
-          <a:ln/>
         </p:spPr>
         <p:txBody>
           <a:bodyPr wrap="square" rtlCol="0" anchor="ctr"/>
           <a:lstStyle/>
           <a:p>
-            <a:pPr algn="r" indent="0" marL="0">
+            <a:pPr marL="0" indent="0" algn="r">
               <a:buNone/>
             </a:pPr>
             <a:r>
@@ -8964,9 +8327,9 @@
                 <a:solidFill>
                   <a:srgbClr val="8A9099"/>
                 </a:solidFill>
-                <a:latin typeface="微软雅黑" pitchFamily="34" charset="0"/>
-                <a:ea typeface="微软雅黑" pitchFamily="34" charset="-122"/>
-                <a:cs typeface="微软雅黑" pitchFamily="34" charset="-120"/>
+                <a:latin typeface="微软雅黑" panose="020B0503020204020204" pitchFamily="34" charset="-122"/>
+                <a:ea typeface="微软雅黑" panose="020B0503020204020204" pitchFamily="34" charset="-122"/>
+                <a:cs typeface="微软雅黑" panose="020B0503020204020204" pitchFamily="34" charset="-120"/>
               </a:rPr>
               <a:t>9 / 14</a:t>
             </a:r>
@@ -8989,13 +8352,12 @@
             <a:avLst/>
           </a:prstGeom>
           <a:noFill/>
-          <a:ln/>
         </p:spPr>
         <p:txBody>
           <a:bodyPr wrap="square" rtlCol="0" anchor="ctr"/>
           <a:lstStyle/>
           <a:p>
-            <a:pPr algn="l" indent="0" marL="0">
+            <a:pPr marL="0" indent="0" algn="l">
               <a:buNone/>
             </a:pPr>
             <a:r>
@@ -9003,9 +8365,9 @@
                 <a:solidFill>
                   <a:srgbClr val="1F4E9C"/>
                 </a:solidFill>
-                <a:latin typeface="微软雅黑" pitchFamily="34" charset="0"/>
-                <a:ea typeface="微软雅黑" pitchFamily="34" charset="-122"/>
-                <a:cs typeface="微软雅黑" pitchFamily="34" charset="-120"/>
+                <a:latin typeface="微软雅黑" panose="020B0503020204020204" pitchFamily="34" charset="-122"/>
+                <a:ea typeface="微软雅黑" panose="020B0503020204020204" pitchFamily="34" charset="-122"/>
+                <a:cs typeface="微软雅黑" panose="020B0503020204020204" pitchFamily="34" charset="-120"/>
               </a:rPr>
               <a:t>静态链表</a:t>
             </a:r>
@@ -9028,13 +8390,12 @@
             <a:avLst/>
           </a:prstGeom>
           <a:noFill/>
-          <a:ln/>
         </p:spPr>
         <p:txBody>
           <a:bodyPr wrap="square" rtlCol="0" anchor="ctr"/>
           <a:lstStyle/>
           <a:p>
-            <a:pPr algn="l" indent="0" marL="0">
+            <a:pPr marL="0" indent="0" algn="l">
               <a:buNone/>
             </a:pPr>
             <a:r>
@@ -9042,9 +8403,9 @@
                 <a:solidFill>
                   <a:srgbClr val="1F2329"/>
                 </a:solidFill>
-                <a:latin typeface="微软雅黑" pitchFamily="34" charset="0"/>
-                <a:ea typeface="微软雅黑" pitchFamily="34" charset="-122"/>
-                <a:cs typeface="微软雅黑" pitchFamily="34" charset="-120"/>
+                <a:latin typeface="微软雅黑" panose="020B0503020204020204" pitchFamily="34" charset="-122"/>
+                <a:ea typeface="微软雅黑" panose="020B0503020204020204" pitchFamily="34" charset="-122"/>
+                <a:cs typeface="微软雅黑" panose="020B0503020204020204" pitchFamily="34" charset="-120"/>
               </a:rPr>
               <a:t>静态链表：用数组和游标模拟链表</a:t>
             </a:r>
@@ -9069,7 +8430,6 @@
           <a:solidFill>
             <a:srgbClr val="F7F9FC"/>
           </a:solidFill>
-          <a:ln/>
         </p:spPr>
       </p:sp>
       <p:sp>
@@ -9089,7 +8449,6 @@
           <a:solidFill>
             <a:srgbClr val="1F4E9C"/>
           </a:solidFill>
-          <a:ln/>
         </p:spPr>
       </p:sp>
       <p:sp>
@@ -9107,13 +8466,12 @@
             <a:avLst/>
           </a:prstGeom>
           <a:noFill/>
-          <a:ln/>
         </p:spPr>
         <p:txBody>
           <a:bodyPr wrap="square" rtlCol="0" anchor="t"/>
           <a:lstStyle/>
           <a:p>
-            <a:pPr algn="l" indent="0" marL="0">
+            <a:pPr marL="0" indent="0" algn="l">
               <a:lnSpc>
                 <a:spcPct val="125000"/>
               </a:lnSpc>
@@ -9124,9 +8482,9 @@
                 <a:solidFill>
                   <a:srgbClr val="1F2329"/>
                 </a:solidFill>
-                <a:latin typeface="Consolas" pitchFamily="34" charset="0"/>
-                <a:ea typeface="Consolas" pitchFamily="34" charset="-122"/>
-                <a:cs typeface="Consolas" pitchFamily="34" charset="-120"/>
+                <a:latin typeface="Consolas" panose="020B0609020204030204" pitchFamily="34" charset="0"/>
+                <a:ea typeface="Consolas" panose="020B0609020204030204" pitchFamily="34" charset="-122"/>
+                <a:cs typeface="Consolas" panose="020B0609020204030204" pitchFamily="34" charset="-120"/>
               </a:rPr>
               <a:t>#define MaxSize 100
 typedef struct{
@@ -9156,13 +8514,12 @@
             <a:avLst/>
           </a:prstGeom>
           <a:noFill/>
-          <a:ln/>
         </p:spPr>
         <p:txBody>
           <a:bodyPr wrap="square" rtlCol="0" anchor="t"/>
           <a:lstStyle/>
           <a:p>
-            <a:pPr algn="l" indent="0" marL="0">
+            <a:pPr marL="0" indent="0" algn="l">
               <a:lnSpc>
                 <a:spcPct val="115000"/>
               </a:lnSpc>
@@ -9173,25 +8530,68 @@
                 <a:solidFill>
                   <a:srgbClr val="1F4E9C"/>
                 </a:solidFill>
-                <a:latin typeface="微软雅黑" pitchFamily="34" charset="0"/>
-                <a:ea typeface="微软雅黑" pitchFamily="34" charset="-122"/>
-                <a:cs typeface="微软雅黑" pitchFamily="34" charset="-120"/>
+                <a:latin typeface="微软雅黑" panose="020B0503020204020204" pitchFamily="34" charset="-122"/>
+                <a:ea typeface="微软雅黑" panose="020B0503020204020204" pitchFamily="34" charset="-122"/>
+                <a:cs typeface="微软雅黑" panose="020B0503020204020204" pitchFamily="34" charset="-120"/>
               </a:rPr>
               <a:t>•  </a:t>
             </a:r>
-            <a:pPr algn="l" indent="0" marL="0">
+            <a:r>
+              <a:rPr lang="en-US" sz="1700" dirty="0">
+                <a:solidFill>
+                  <a:srgbClr val="000000"/>
+                </a:solidFill>
+              </a:rPr>
+              <a:t>next 里存的是下标（游标），不是地址；所以没有指针也能有链表的效果</a:t>
+            </a:r>
+            <a:endParaRPr lang="en-US" sz="1700" dirty="0"/>
+          </a:p>
+        </p:txBody>
+      </p:sp>
+      <p:sp>
+        <p:nvSpPr>
+          <p:cNvPr id="9" name="Text 7"/>
+          <p:cNvSpPr/>
+          <p:nvPr/>
+        </p:nvSpPr>
+        <p:spPr>
+          <a:xfrm>
+            <a:off x="896112" y="5200847"/>
+            <a:ext cx="10454335" cy="378714"/>
+          </a:xfrm>
+          <a:prstGeom prst="rect">
+            <a:avLst/>
+          </a:prstGeom>
+          <a:noFill/>
+        </p:spPr>
+        <p:txBody>
+          <a:bodyPr wrap="square" rtlCol="0" anchor="t"/>
+          <a:lstStyle/>
+          <a:p>
+            <a:pPr marL="0" indent="0" algn="l">
               <a:lnSpc>
                 <a:spcPct val="115000"/>
               </a:lnSpc>
               <a:buNone/>
             </a:pPr>
             <a:r>
+              <a:rPr lang="en-US" sz="1700" b="1" dirty="0">
+                <a:solidFill>
+                  <a:srgbClr val="1F4E9C"/>
+                </a:solidFill>
+                <a:latin typeface="微软雅黑" panose="020B0503020204020204" pitchFamily="34" charset="-122"/>
+                <a:ea typeface="微软雅黑" panose="020B0503020204020204" pitchFamily="34" charset="-122"/>
+                <a:cs typeface="微软雅黑" panose="020B0503020204020204" pitchFamily="34" charset="-120"/>
+              </a:rPr>
+              <a:t>•  </a:t>
+            </a:r>
+            <a:r>
               <a:rPr lang="en-US" sz="1700" dirty="0">
                 <a:solidFill>
                   <a:srgbClr val="000000"/>
                 </a:solidFill>
               </a:rPr>
-              <a:t>next 里存的是下标（游标），不是地址；所以没有指针也能有链表的效果</a:t>
+              <a:t>插入删除只改游标、不搬数据，这一点和链表一样，和顺序表不一样</a:t>
             </a:r>
             <a:endParaRPr lang="en-US" sz="1700" dirty="0"/>
           </a:p>
@@ -9199,26 +8599,25 @@
       </p:sp>
       <p:sp>
         <p:nvSpPr>
-          <p:cNvPr id="9" name="Text 7"/>
-          <p:cNvSpPr/>
-          <p:nvPr/>
-        </p:nvSpPr>
-        <p:spPr>
-          <a:xfrm>
-            <a:off x="896112" y="5200847"/>
+          <p:cNvPr id="10" name="Text 8"/>
+          <p:cNvSpPr/>
+          <p:nvPr/>
+        </p:nvSpPr>
+        <p:spPr>
+          <a:xfrm>
+            <a:off x="896112" y="5652713"/>
             <a:ext cx="10454335" cy="378714"/>
           </a:xfrm>
           <a:prstGeom prst="rect">
             <a:avLst/>
           </a:prstGeom>
           <a:noFill/>
-          <a:ln/>
         </p:spPr>
         <p:txBody>
           <a:bodyPr wrap="square" rtlCol="0" anchor="t"/>
           <a:lstStyle/>
           <a:p>
-            <a:pPr algn="l" indent="0" marL="0">
+            <a:pPr marL="0" indent="0" algn="l">
               <a:lnSpc>
                 <a:spcPct val="115000"/>
               </a:lnSpc>
@@ -9229,74 +8628,12 @@
                 <a:solidFill>
                   <a:srgbClr val="1F4E9C"/>
                 </a:solidFill>
-                <a:latin typeface="微软雅黑" pitchFamily="34" charset="0"/>
-                <a:ea typeface="微软雅黑" pitchFamily="34" charset="-122"/>
-                <a:cs typeface="微软雅黑" pitchFamily="34" charset="-120"/>
+                <a:latin typeface="微软雅黑" panose="020B0503020204020204" pitchFamily="34" charset="-122"/>
+                <a:ea typeface="微软雅黑" panose="020B0503020204020204" pitchFamily="34" charset="-122"/>
+                <a:cs typeface="微软雅黑" panose="020B0503020204020204" pitchFamily="34" charset="-120"/>
               </a:rPr>
               <a:t>•  </a:t>
             </a:r>
-            <a:pPr algn="l" indent="0" marL="0">
-              <a:lnSpc>
-                <a:spcPct val="115000"/>
-              </a:lnSpc>
-              <a:buNone/>
-            </a:pPr>
-            <a:r>
-              <a:rPr lang="en-US" sz="1700" dirty="0">
-                <a:solidFill>
-                  <a:srgbClr val="000000"/>
-                </a:solidFill>
-              </a:rPr>
-              <a:t>插入删除只改游标、不搬数据，这一点和链表一样，和顺序表不一样</a:t>
-            </a:r>
-            <a:endParaRPr lang="en-US" sz="1700" dirty="0"/>
-          </a:p>
-        </p:txBody>
-      </p:sp>
-      <p:sp>
-        <p:nvSpPr>
-          <p:cNvPr id="10" name="Text 8"/>
-          <p:cNvSpPr/>
-          <p:nvPr/>
-        </p:nvSpPr>
-        <p:spPr>
-          <a:xfrm>
-            <a:off x="896112" y="5652713"/>
-            <a:ext cx="10454335" cy="378714"/>
-          </a:xfrm>
-          <a:prstGeom prst="rect">
-            <a:avLst/>
-          </a:prstGeom>
-          <a:noFill/>
-          <a:ln/>
-        </p:spPr>
-        <p:txBody>
-          <a:bodyPr wrap="square" rtlCol="0" anchor="t"/>
-          <a:lstStyle/>
-          <a:p>
-            <a:pPr algn="l" indent="0" marL="0">
-              <a:lnSpc>
-                <a:spcPct val="115000"/>
-              </a:lnSpc>
-              <a:buNone/>
-            </a:pPr>
-            <a:r>
-              <a:rPr lang="en-US" sz="1700" b="1" dirty="0">
-                <a:solidFill>
-                  <a:srgbClr val="1F4E9C"/>
-                </a:solidFill>
-                <a:latin typeface="微软雅黑" pitchFamily="34" charset="0"/>
-                <a:ea typeface="微软雅黑" pitchFamily="34" charset="-122"/>
-                <a:cs typeface="微软雅黑" pitchFamily="34" charset="-120"/>
-              </a:rPr>
-              <a:t>•  </a:t>
-            </a:r>
-            <a:pPr algn="l" indent="0" marL="0">
-              <a:lnSpc>
-                <a:spcPct val="115000"/>
-              </a:lnSpc>
-              <a:buNone/>
-            </a:pPr>
             <a:r>
               <a:rPr lang="en-US" sz="1700" dirty="0">
                 <a:solidFill>
@@ -9360,7 +8697,7 @@
     </a:clrScheme>
     <a:fontScheme name="Office">
       <a:majorFont>
-        <a:latin typeface="Calibri Light" panose="020F0302020204030204"/>
+        <a:latin typeface="Calibri Light"/>
         <a:ea typeface=""/>
         <a:cs typeface=""/>
         <a:font script="Jpan" typeface="游ゴシック Light"/>
@@ -9393,26 +8730,9 @@
         <a:font script="Viet" typeface="Times New Roman"/>
         <a:font script="Uigh" typeface="Microsoft Uighur"/>
         <a:font script="Geor" typeface="Sylfaen"/>
-        <a:font script="Armn" typeface="Arial"/>
-        <a:font script="Bugi" typeface="Leelawadee UI"/>
-        <a:font script="Bopo" typeface="Microsoft JhengHei"/>
-        <a:font script="Java" typeface="Javanese Text"/>
-        <a:font script="Lisu" typeface="Segoe UI"/>
-        <a:font script="Mymr" typeface="Myanmar Text"/>
-        <a:font script="Nkoo" typeface="Ebrima"/>
-        <a:font script="Olck" typeface="Nirmala UI"/>
-        <a:font script="Osma" typeface="Ebrima"/>
-        <a:font script="Phag" typeface="Phagspa"/>
-        <a:font script="Syrn" typeface="Estrangelo Edessa"/>
-        <a:font script="Syrj" typeface="Estrangelo Edessa"/>
-        <a:font script="Syre" typeface="Estrangelo Edessa"/>
-        <a:font script="Sora" typeface="Nirmala UI"/>
-        <a:font script="Tale" typeface="Microsoft Tai Le"/>
-        <a:font script="Talu" typeface="Microsoft New Tai Lue"/>
-        <a:font script="Tfng" typeface="Ebrima"/>
       </a:majorFont>
       <a:minorFont>
-        <a:latin typeface="Calibri" panose="020F0502020204030204"/>
+        <a:latin typeface="Calibri"/>
         <a:ea typeface=""/>
         <a:cs typeface=""/>
         <a:font script="Jpan" typeface="游ゴシック"/>
@@ -9445,23 +8765,6 @@
         <a:font script="Viet" typeface="Arial"/>
         <a:font script="Uigh" typeface="Microsoft Uighur"/>
         <a:font script="Geor" typeface="Sylfaen"/>
-        <a:font script="Armn" typeface="Arial"/>
-        <a:font script="Bugi" typeface="Leelawadee UI"/>
-        <a:font script="Bopo" typeface="Microsoft JhengHei"/>
-        <a:font script="Java" typeface="Javanese Text"/>
-        <a:font script="Lisu" typeface="Segoe UI"/>
-        <a:font script="Mymr" typeface="Myanmar Text"/>
-        <a:font script="Nkoo" typeface="Ebrima"/>
-        <a:font script="Olck" typeface="Nirmala UI"/>
-        <a:font script="Osma" typeface="Ebrima"/>
-        <a:font script="Phag" typeface="Phagspa"/>
-        <a:font script="Syrn" typeface="Estrangelo Edessa"/>
-        <a:font script="Syrj" typeface="Estrangelo Edessa"/>
-        <a:font script="Syre" typeface="Estrangelo Edessa"/>
-        <a:font script="Sora" typeface="Nirmala UI"/>
-        <a:font script="Tale" typeface="Microsoft Tai Le"/>
-        <a:font script="Talu" typeface="Microsoft New Tai Lue"/>
-        <a:font script="Tfng" typeface="Ebrima"/>
       </a:minorFont>
     </a:fontScheme>
     <a:fmtScheme name="Office">
@@ -9602,8 +8905,265 @@
       </a:bgFillStyleLst>
     </a:fmtScheme>
   </a:themeElements>
-  <a:objectDefaults/>
-  <a:extraClrSchemeLst/>
+  <a:extLst>
+    <a:ext uri="{05A4C25C-085E-4340-85A3-A5531E510DB2}">
+      <thm15:themeFamily xmlns:thm15="http://schemas.microsoft.com/office/thememl/2012/main" name="Office Theme" id="{62F939B6-93AF-4DB8-9C6B-D6C7DFDC589F}" vid="{4A3C46E8-61CC-4603-A589-7422A47A8E4A}"/>
+    </a:ext>
+  </a:extLst>
+</a:theme>
+</file>
+
+<file path=ppt/theme/theme2.xml><?xml version="1.0" encoding="utf-8"?>
+<a:theme xmlns:a="http://schemas.openxmlformats.org/drawingml/2006/main" name="Office Theme">
+  <a:themeElements>
+    <a:clrScheme name="Office">
+      <a:dk1>
+        <a:sysClr val="windowText" lastClr="000000"/>
+      </a:dk1>
+      <a:lt1>
+        <a:sysClr val="window" lastClr="FFFFFF"/>
+      </a:lt1>
+      <a:dk2>
+        <a:srgbClr val="44546A"/>
+      </a:dk2>
+      <a:lt2>
+        <a:srgbClr val="E7E6E6"/>
+      </a:lt2>
+      <a:accent1>
+        <a:srgbClr val="4472C4"/>
+      </a:accent1>
+      <a:accent2>
+        <a:srgbClr val="ED7D31"/>
+      </a:accent2>
+      <a:accent3>
+        <a:srgbClr val="A5A5A5"/>
+      </a:accent3>
+      <a:accent4>
+        <a:srgbClr val="FFC000"/>
+      </a:accent4>
+      <a:accent5>
+        <a:srgbClr val="5B9BD5"/>
+      </a:accent5>
+      <a:accent6>
+        <a:srgbClr val="70AD47"/>
+      </a:accent6>
+      <a:hlink>
+        <a:srgbClr val="0563C1"/>
+      </a:hlink>
+      <a:folHlink>
+        <a:srgbClr val="954F72"/>
+      </a:folHlink>
+    </a:clrScheme>
+    <a:fontScheme name="Office">
+      <a:majorFont>
+        <a:latin typeface="Calibri Light"/>
+        <a:ea typeface=""/>
+        <a:cs typeface=""/>
+        <a:font script="Jpan" typeface="游ゴシック Light"/>
+        <a:font script="Hang" typeface="맑은 고딕"/>
+        <a:font script="Hans" typeface="等线 Light"/>
+        <a:font script="Hant" typeface="新細明體"/>
+        <a:font script="Arab" typeface="Times New Roman"/>
+        <a:font script="Hebr" typeface="Times New Roman"/>
+        <a:font script="Thai" typeface="Angsana New"/>
+        <a:font script="Ethi" typeface="Nyala"/>
+        <a:font script="Beng" typeface="Vrinda"/>
+        <a:font script="Gujr" typeface="Shruti"/>
+        <a:font script="Khmr" typeface="MoolBoran"/>
+        <a:font script="Knda" typeface="Tunga"/>
+        <a:font script="Guru" typeface="Raavi"/>
+        <a:font script="Cans" typeface="Euphemia"/>
+        <a:font script="Cher" typeface="Plantagenet Cherokee"/>
+        <a:font script="Yiii" typeface="Microsoft Yi Baiti"/>
+        <a:font script="Tibt" typeface="Microsoft Himalaya"/>
+        <a:font script="Thaa" typeface="MV Boli"/>
+        <a:font script="Deva" typeface="Mangal"/>
+        <a:font script="Telu" typeface="Gautami"/>
+        <a:font script="Taml" typeface="Latha"/>
+        <a:font script="Syrc" typeface="Estrangelo Edessa"/>
+        <a:font script="Orya" typeface="Kalinga"/>
+        <a:font script="Mlym" typeface="Kartika"/>
+        <a:font script="Laoo" typeface="DokChampa"/>
+        <a:font script="Sinh" typeface="Iskoola Pota"/>
+        <a:font script="Mong" typeface="Mongolian Baiti"/>
+        <a:font script="Viet" typeface="Times New Roman"/>
+        <a:font script="Uigh" typeface="Microsoft Uighur"/>
+        <a:font script="Geor" typeface="Sylfaen"/>
+      </a:majorFont>
+      <a:minorFont>
+        <a:latin typeface="Calibri"/>
+        <a:ea typeface=""/>
+        <a:cs typeface=""/>
+        <a:font script="Jpan" typeface="游ゴシック"/>
+        <a:font script="Hang" typeface="맑은 고딕"/>
+        <a:font script="Hans" typeface="等线"/>
+        <a:font script="Hant" typeface="新細明體"/>
+        <a:font script="Arab" typeface="Arial"/>
+        <a:font script="Hebr" typeface="Arial"/>
+        <a:font script="Thai" typeface="Cordia New"/>
+        <a:font script="Ethi" typeface="Nyala"/>
+        <a:font script="Beng" typeface="Vrinda"/>
+        <a:font script="Gujr" typeface="Shruti"/>
+        <a:font script="Khmr" typeface="DaunPenh"/>
+        <a:font script="Knda" typeface="Tunga"/>
+        <a:font script="Guru" typeface="Raavi"/>
+        <a:font script="Cans" typeface="Euphemia"/>
+        <a:font script="Cher" typeface="Plantagenet Cherokee"/>
+        <a:font script="Yiii" typeface="Microsoft Yi Baiti"/>
+        <a:font script="Tibt" typeface="Microsoft Himalaya"/>
+        <a:font script="Thaa" typeface="MV Boli"/>
+        <a:font script="Deva" typeface="Mangal"/>
+        <a:font script="Telu" typeface="Gautami"/>
+        <a:font script="Taml" typeface="Latha"/>
+        <a:font script="Syrc" typeface="Estrangelo Edessa"/>
+        <a:font script="Orya" typeface="Kalinga"/>
+        <a:font script="Mlym" typeface="Kartika"/>
+        <a:font script="Laoo" typeface="DokChampa"/>
+        <a:font script="Sinh" typeface="Iskoola Pota"/>
+        <a:font script="Mong" typeface="Mongolian Baiti"/>
+        <a:font script="Viet" typeface="Arial"/>
+        <a:font script="Uigh" typeface="Microsoft Uighur"/>
+        <a:font script="Geor" typeface="Sylfaen"/>
+      </a:minorFont>
+    </a:fontScheme>
+    <a:fmtScheme name="Office">
+      <a:fillStyleLst>
+        <a:solidFill>
+          <a:schemeClr val="phClr"/>
+        </a:solidFill>
+        <a:gradFill rotWithShape="1">
+          <a:gsLst>
+            <a:gs pos="0">
+              <a:schemeClr val="phClr">
+                <a:lumMod val="110000"/>
+                <a:satMod val="105000"/>
+                <a:tint val="67000"/>
+              </a:schemeClr>
+            </a:gs>
+            <a:gs pos="50000">
+              <a:schemeClr val="phClr">
+                <a:lumMod val="105000"/>
+                <a:satMod val="103000"/>
+                <a:tint val="73000"/>
+              </a:schemeClr>
+            </a:gs>
+            <a:gs pos="100000">
+              <a:schemeClr val="phClr">
+                <a:lumMod val="105000"/>
+                <a:satMod val="109000"/>
+                <a:tint val="81000"/>
+              </a:schemeClr>
+            </a:gs>
+          </a:gsLst>
+          <a:lin ang="5400000" scaled="0"/>
+        </a:gradFill>
+        <a:gradFill rotWithShape="1">
+          <a:gsLst>
+            <a:gs pos="0">
+              <a:schemeClr val="phClr">
+                <a:satMod val="103000"/>
+                <a:lumMod val="102000"/>
+                <a:tint val="94000"/>
+              </a:schemeClr>
+            </a:gs>
+            <a:gs pos="50000">
+              <a:schemeClr val="phClr">
+                <a:satMod val="110000"/>
+                <a:lumMod val="100000"/>
+                <a:shade val="100000"/>
+              </a:schemeClr>
+            </a:gs>
+            <a:gs pos="100000">
+              <a:schemeClr val="phClr">
+                <a:lumMod val="99000"/>
+                <a:satMod val="120000"/>
+                <a:shade val="78000"/>
+              </a:schemeClr>
+            </a:gs>
+          </a:gsLst>
+          <a:lin ang="5400000" scaled="0"/>
+        </a:gradFill>
+      </a:fillStyleLst>
+      <a:lnStyleLst>
+        <a:ln w="6350" cap="flat" cmpd="sng" algn="ctr">
+          <a:solidFill>
+            <a:schemeClr val="phClr"/>
+          </a:solidFill>
+          <a:prstDash val="solid"/>
+          <a:miter lim="800000"/>
+        </a:ln>
+        <a:ln w="12700" cap="flat" cmpd="sng" algn="ctr">
+          <a:solidFill>
+            <a:schemeClr val="phClr"/>
+          </a:solidFill>
+          <a:prstDash val="solid"/>
+          <a:miter lim="800000"/>
+        </a:ln>
+        <a:ln w="19050" cap="flat" cmpd="sng" algn="ctr">
+          <a:solidFill>
+            <a:schemeClr val="phClr"/>
+          </a:solidFill>
+          <a:prstDash val="solid"/>
+          <a:miter lim="800000"/>
+        </a:ln>
+      </a:lnStyleLst>
+      <a:effectStyleLst>
+        <a:effectStyle>
+          <a:effectLst/>
+        </a:effectStyle>
+        <a:effectStyle>
+          <a:effectLst/>
+        </a:effectStyle>
+        <a:effectStyle>
+          <a:effectLst>
+            <a:outerShdw blurRad="57150" dist="19050" dir="5400000" algn="ctr" rotWithShape="0">
+              <a:srgbClr val="000000">
+                <a:alpha val="63000"/>
+              </a:srgbClr>
+            </a:outerShdw>
+          </a:effectLst>
+        </a:effectStyle>
+      </a:effectStyleLst>
+      <a:bgFillStyleLst>
+        <a:solidFill>
+          <a:schemeClr val="phClr"/>
+        </a:solidFill>
+        <a:solidFill>
+          <a:schemeClr val="phClr">
+            <a:tint val="95000"/>
+            <a:satMod val="170000"/>
+          </a:schemeClr>
+        </a:solidFill>
+        <a:gradFill rotWithShape="1">
+          <a:gsLst>
+            <a:gs pos="0">
+              <a:schemeClr val="phClr">
+                <a:tint val="93000"/>
+                <a:satMod val="150000"/>
+                <a:shade val="98000"/>
+                <a:lumMod val="102000"/>
+              </a:schemeClr>
+            </a:gs>
+            <a:gs pos="50000">
+              <a:schemeClr val="phClr">
+                <a:tint val="98000"/>
+                <a:satMod val="130000"/>
+                <a:shade val="90000"/>
+                <a:lumMod val="103000"/>
+              </a:schemeClr>
+            </a:gs>
+            <a:gs pos="100000">
+              <a:schemeClr val="phClr">
+                <a:shade val="63000"/>
+                <a:satMod val="120000"/>
+              </a:schemeClr>
+            </a:gs>
+          </a:gsLst>
+          <a:lin ang="5400000" scaled="0"/>
+        </a:gradFill>
+      </a:bgFillStyleLst>
+    </a:fmtScheme>
+  </a:themeElements>
   <a:extLst>
     <a:ext uri="{05A4C25C-085E-4340-85A3-A5531E510DB2}">
       <thm15:themeFamily xmlns:thm15="http://schemas.microsoft.com/office/thememl/2012/main" name="Office Theme" id="{62F939B6-93AF-4DB8-9C6B-D6C7DFDC589F}" vid="{4A3C46E8-61CC-4603-A589-7422A47A8E4A}"/>
